--- a/docs/slides/insight2_leisure_lodging.pptx
+++ b/docs/slides/insight2_leisure_lodging.pptx
@@ -9,12 +9,9 @@
     <p:sldId id="257" r:id="rId3"/>
     <p:sldId id="258" r:id="rId4"/>
     <p:sldId id="259" r:id="rId5"/>
-    <p:sldId id="260" r:id="rId6"/>
-    <p:sldId id="261" r:id="rId7"/>
-    <p:sldId id="262" r:id="rId8"/>
   </p:sldIdLst>
   <p:notesMasterIdLst>
-    <p:notesMasterId r:id="rId9"/>
+    <p:notesMasterId r:id="rId6"/>
   </p:notesMasterIdLst>
   <p:sldSz cx="12192000" cy="6858000"/>
   <p:notesSz cx="6858000" cy="12192000"/>
@@ -113,15 +110,16 @@
   <p:extLst>
     <p:ext uri="{521415D9-36F7-43E2-AB2F-B90AF26B5E84}">
       <p14:sectionLst xmlns:p14="http://schemas.microsoft.com/office/powerpoint/2010/main">
-        <p14:section name="인사이트 2" id="{9447202f-2fdc-10bb-7d21-7351d2afeafa}">
+        <p14:section name="인사이트 2" id="{0ac39c49-d9bf-c251-2cec-1b2a95904615}">
           <p14:sldIdLst>
             <p14:sldId id="256"/>
             <p14:sldId id="257"/>
             <p14:sldId id="258"/>
+          </p14:sldIdLst>
+        </p14:section>
+        <p14:section name="부록" id="{8fe068eb-f207-31f2-89d3-30b6a9dd437a}">
+          <p14:sldIdLst>
             <p14:sldId id="259"/>
-            <p14:sldId id="260"/>
-            <p14:sldId id="261"/>
-            <p14:sldId id="262"/>
           </p14:sldIdLst>
         </p14:section>
       </p14:sectionLst>
@@ -1269,348 +1267,6 @@
 </c:chartSpace>
 </file>
 
-<file path=ppt/charts/chart4.xml><?xml version="1.0" encoding="utf-8"?>
-<c:chartSpace xmlns:c="http://schemas.openxmlformats.org/drawingml/2006/chart" xmlns:a="http://schemas.openxmlformats.org/drawingml/2006/main" xmlns:r="http://schemas.openxmlformats.org/officeDocument/2006/relationships">
-  <c:date1904 val="0"/>
-  <c:roundedCorners val="1"/>
-  <c:chart>
-    <c:autoTitleDeleted val="1"/>
-    <c:plotArea>
-      <c:layout/>
-      <c:barChart>
-        <c:barDir val="col"/>
-        <c:grouping val="clustered"/>
-        <c:varyColors val="0"/>
-        <c:ser>
-          <c:idx val="0"/>
-          <c:order val="0"/>
-          <c:tx>
-            <c:strRef>
-              <c:f>Sheet1!$B$1</c:f>
-              <c:strCache>
-                <c:ptCount val="1"/>
-                <c:pt idx="0">
-                  <c:v>강원 고객</c:v>
-                </c:pt>
-              </c:strCache>
-            </c:strRef>
-          </c:tx>
-          <c:spPr>
-            <a:solidFill>
-              <a:srgbClr val="2F6FA8"/>
-            </a:solidFill>
-            <a:effectLst/>
-          </c:spPr>
-          <c:invertIfNegative val="0"/>
-          <c:dLbls>
-            <c:numFmt formatCode="+0%;-0%;0%" sourceLinked="0"/>
-            <c:txPr>
-              <a:bodyPr/>
-              <a:lstStyle/>
-              <a:p>
-                <a:pPr>
-                  <a:defRPr b="0" i="0" strike="noStrike" sz="1100" u="none">
-                    <a:solidFill>
-                      <a:srgbClr val="1D2B33"/>
-                    </a:solidFill>
-                    <a:latin typeface="+mn-lt"/>
-                  </a:defRPr>
-                </a:pPr>
-              </a:p>
-            </c:txPr>
-            <c:showLegendKey val="0"/>
-            <c:showVal val="1"/>
-            <c:showCatName val="0"/>
-            <c:showSerName val="0"/>
-            <c:showPercent val="0"/>
-            <c:showBubbleSize val="0"/>
-            <c:showLeaderLines val="0"/>
-          </c:dLbls>
-          <c:cat>
-            <c:multiLvlStrRef>
-              <c:f>Sheet1!$A$2:$A$4</c:f>
-              <c:multiLvlStrCache>
-                <c:ptCount val="3"/>
-                <c:lvl>
-                  <c:pt idx="0">
-                    <c:v>골프장(실내·실외)</c:v>
-                  </c:pt>
-                  <c:pt idx="1">
-                    <c:v>레저타운·놀이동산</c:v>
-                  </c:pt>
-                  <c:pt idx="2">
-                    <c:v>사우나·목욕탕</c:v>
-                  </c:pt>
-                </c:lvl>
-              </c:multiLvlStrCache>
-            </c:multiLvlStrRef>
-          </c:cat>
-          <c:val>
-            <c:numRef>
-              <c:f>Sheet1!$B$2:$B$4</c:f>
-              <c:numCache>
-                <c:formatCode>General</c:formatCode>
-                <c:ptCount val="3"/>
-                <c:pt idx="0">
-                  <c:v>-0.43641939589086187</c:v>
-                </c:pt>
-                <c:pt idx="1">
-                  <c:v>-0.46075302762575554</c:v>
-                </c:pt>
-                <c:pt idx="2">
-                  <c:v>0.15397808279826797</c:v>
-                </c:pt>
-              </c:numCache>
-            </c:numRef>
-          </c:val>
-        </c:ser>
-        <c:ser>
-          <c:idx val="1"/>
-          <c:order val="1"/>
-          <c:tx>
-            <c:strRef>
-              <c:f>Sheet1!$C$1</c:f>
-              <c:strCache>
-                <c:ptCount val="1"/>
-                <c:pt idx="0">
-                  <c:v>외지 고객</c:v>
-                </c:pt>
-              </c:strCache>
-            </c:strRef>
-          </c:tx>
-          <c:spPr>
-            <a:solidFill>
-              <a:srgbClr val="D9622B"/>
-            </a:solidFill>
-            <a:effectLst/>
-          </c:spPr>
-          <c:invertIfNegative val="0"/>
-          <c:dLbls>
-            <c:numFmt formatCode="+0%;-0%;0%" sourceLinked="0"/>
-            <c:txPr>
-              <a:bodyPr/>
-              <a:lstStyle/>
-              <a:p>
-                <a:pPr>
-                  <a:defRPr b="0" i="0" strike="noStrike" sz="1100" u="none">
-                    <a:solidFill>
-                      <a:srgbClr val="1D2B33"/>
-                    </a:solidFill>
-                    <a:latin typeface="+mn-lt"/>
-                  </a:defRPr>
-                </a:pPr>
-              </a:p>
-            </c:txPr>
-            <c:showLegendKey val="0"/>
-            <c:showVal val="1"/>
-            <c:showCatName val="0"/>
-            <c:showSerName val="0"/>
-            <c:showPercent val="0"/>
-            <c:showBubbleSize val="0"/>
-            <c:showLeaderLines val="0"/>
-          </c:dLbls>
-          <c:cat>
-            <c:multiLvlStrRef>
-              <c:f>Sheet1!$A$2:$A$4</c:f>
-              <c:multiLvlStrCache>
-                <c:ptCount val="3"/>
-                <c:lvl>
-                  <c:pt idx="0">
-                    <c:v>골프장(실내·실외)</c:v>
-                  </c:pt>
-                  <c:pt idx="1">
-                    <c:v>레저타운·놀이동산</c:v>
-                  </c:pt>
-                  <c:pt idx="2">
-                    <c:v>사우나·목욕탕</c:v>
-                  </c:pt>
-                </c:lvl>
-              </c:multiLvlStrCache>
-            </c:multiLvlStrRef>
-          </c:cat>
-          <c:val>
-            <c:numRef>
-              <c:f>Sheet1!$C$2:$C$4</c:f>
-              <c:numCache>
-                <c:formatCode>General</c:formatCode>
-                <c:ptCount val="3"/>
-                <c:pt idx="0">
-                  <c:v>-0.6229873257044534</c:v>
-                </c:pt>
-                <c:pt idx="1">
-                  <c:v>-0.4456504531843808</c:v>
-                </c:pt>
-                <c:pt idx="2">
-                  <c:v>0.4749719799669989</c:v>
-                </c:pt>
-              </c:numCache>
-            </c:numRef>
-          </c:val>
-        </c:ser>
-        <c:dLbls>
-          <c:numFmt formatCode="+0%;-0%;0%" sourceLinked="0"/>
-          <c:txPr>
-            <a:bodyPr/>
-            <a:lstStyle/>
-            <a:p>
-              <a:pPr>
-                <a:defRPr b="0" i="0" strike="noStrike" sz="1100" u="none">
-                  <a:solidFill>
-                    <a:srgbClr val="1D2B33"/>
-                  </a:solidFill>
-                  <a:latin typeface="+mn-lt"/>
-                </a:defRPr>
-              </a:pPr>
-            </a:p>
-          </c:txPr>
-          <c:showLegendKey val="0"/>
-          <c:showVal val="1"/>
-          <c:showCatName val="0"/>
-          <c:showSerName val="0"/>
-          <c:showPercent val="0"/>
-          <c:showBubbleSize val="0"/>
-          <c:showLeaderLines val="0"/>
-        </c:dLbls>
-        <c:gapWidth val="60"/>
-        <c:overlap val="0"/>
-        <c:axId val="2094734554"/>
-        <c:axId val="2094734552"/>
-        <c:axId val="2094734556"/>
-      </c:barChart>
-      <c:catAx>
-        <c:axId val="2094734554"/>
-        <c:scaling>
-          <c:orientation val="minMax"/>
-        </c:scaling>
-        <c:delete val="0"/>
-        <c:axPos val="b"/>
-        <c:numFmt formatCode="General" sourceLinked="1"/>
-        <c:majorTickMark val="out"/>
-        <c:minorTickMark val="none"/>
-        <c:tickLblPos val="low"/>
-        <c:spPr>
-          <a:ln w="12700" cap="flat">
-            <a:noFill/>
-            <a:prstDash val="solid"/>
-            <a:round/>
-          </a:ln>
-        </c:spPr>
-        <c:txPr>
-          <a:bodyPr/>
-          <a:lstStyle/>
-          <a:p>
-            <a:pPr>
-              <a:defRPr sz="1200" b="0" i="0" u="none" strike="noStrike">
-                <a:solidFill>
-                  <a:srgbClr val="1D2B33"/>
-                </a:solidFill>
-                <a:latin typeface="+mn-lt"/>
-              </a:defRPr>
-            </a:pPr>
-            <a:endParaRPr lang="en-US"/>
-          </a:p>
-        </c:txPr>
-        <c:crossAx val="2094734552"/>
-        <c:crosses val="autoZero"/>
-        <c:auto val="1"/>
-        <c:lblAlgn val="ctr"/>
-        <c:noMultiLvlLbl val="1"/>
-      </c:catAx>
-      <c:valAx>
-        <c:axId val="2094734552"/>
-        <c:scaling>
-          <c:orientation val="minMax"/>
-          <c:max val="0.6"/>
-          <c:min val="-0.8"/>
-        </c:scaling>
-        <c:delete val="0"/>
-        <c:axPos val="l"/>
-        <c:majorGridlines>
-          <c:spPr>
-            <a:ln w="9525" cap="flat">
-              <a:solidFill>
-                <a:srgbClr val="E3E7EA"/>
-              </a:solidFill>
-              <a:prstDash val="solid"/>
-              <a:round/>
-            </a:ln>
-          </c:spPr>
-        </c:majorGridlines>
-        <c:numFmt formatCode="0%" sourceLinked="0"/>
-        <c:majorTickMark val="out"/>
-        <c:minorTickMark val="none"/>
-        <c:tickLblPos val="nextTo"/>
-        <c:spPr>
-          <a:ln w="12700" cap="flat">
-            <a:noFill/>
-            <a:prstDash val="solid"/>
-            <a:round/>
-          </a:ln>
-        </c:spPr>
-        <c:txPr>
-          <a:bodyPr/>
-          <a:lstStyle/>
-          <a:p>
-            <a:pPr>
-              <a:defRPr sz="1000" b="0" i="0" u="none" strike="noStrike">
-                <a:solidFill>
-                  <a:srgbClr val="6B7780"/>
-                </a:solidFill>
-                <a:latin typeface="+mn-lt"/>
-              </a:defRPr>
-            </a:pPr>
-            <a:endParaRPr lang="en-US"/>
-          </a:p>
-        </c:txPr>
-        <c:crossAx val="2094734554"/>
-        <c:crosses val="autoZero"/>
-        <c:crossBetween val="between"/>
-        <c:majorUnit val="0.2"/>
-      </c:valAx>
-      <c:spPr>
-        <a:noFill/>
-        <a:ln>
-          <a:noFill/>
-        </a:ln>
-        <a:effectLst/>
-      </c:spPr>
-    </c:plotArea>
-    <c:legend>
-      <c:legendPos val="t"/>
-      <c:overlay val="0"/>
-      <c:txPr>
-        <a:bodyPr/>
-        <a:lstStyle/>
-        <a:p>
-          <a:pPr>
-            <a:defRPr sz="1200">
-              <a:solidFill>
-                <a:srgbClr val="1D2B33"/>
-              </a:solidFill>
-              <a:latin typeface="+mn-lt"/>
-              <a:cs typeface="+mn-lt"/>
-            </a:defRPr>
-          </a:pPr>
-          <a:endParaRPr lang="en-US"/>
-        </a:p>
-      </c:txPr>
-    </c:legend>
-    <c:plotVisOnly val="1"/>
-    <c:dispBlanksAs val="span"/>
-  </c:chart>
-  <c:spPr>
-    <a:noFill/>
-    <a:ln>
-      <a:noFill/>
-    </a:ln>
-    <a:effectLst/>
-  </c:spPr>
-  <c:externalData r:id="rId1">
-    <c:autoUpdate val="0"/>
-  </c:externalData>
-</c:chartSpace>
-</file>
-
 <file path=ppt/notesMasters/notesMaster1.xml><?xml version="1.0" encoding="utf-8"?>
 <p:notesMaster xmlns:a="http://schemas.openxmlformats.org/drawingml/2006/main" xmlns:r="http://schemas.openxmlformats.org/officeDocument/2006/relationships" xmlns:p="http://schemas.openxmlformats.org/presentationml/2006/main">
   <p:cSld>
@@ -2006,7 +1662,7 @@
           <a:p>
             <a:r>
               <a:rPr lang="en-US" dirty="0"/>
-              <a:t>인사이트 1에서 비가 오면 춘천 상권 전체 매출이 줄어든다는 걸 봤습니다. 이번에는 '어떤 업종이 가장 약한가'입니다. 결론부터 말씀드리면, 야외·레저는 비 오는 당일 매출이 40% 줄어 업종 중 가장 크게 떨어지고, 숙박은 비 온 뒤 사흘에 걸쳐 손실이 쌓입니다. 반대로 생활소매는 다음 날 장보기로 손실을 거의 다 메웁니다.</a:t>
+              <a:t>업종군 12개를 비교한 결과입니다. 비가 10mm 넘게 오는 날 야외·레저 매출은 40% 줄어 다른 업종보다 압도적으로 큽니다. 95% 신뢰구간도 -47% ~ -33%로 확실합니다. 춘천 매출의 절반을 차지하는 외식과 생활소매는 5~7% 정도 줄어듭니다. 비 오는 날이 여름에 몰려 있어 기온을 더 촘촘히 통제해 봤는데, 그래도 야외·레저는 -34%로 뚜렷합니다. 숙박·여행은 당일 -12%로 통계적으로는 불확실한데, 다음 장에서 보듯 비 온 뒤 며칠에 걸쳐 손실이 커집니다. 분석에는 날짜, 업종, 결제금액 컬럼을 썼고, 고객 거주지는 데이터2에서 가져왔습니다. 자세한 선택 이유는 부록에 있습니다.</a:t>
             </a:r>
             <a:endParaRPr lang="en-US" dirty="0"/>
           </a:p>
@@ -2094,7 +1750,7 @@
           <a:p>
             <a:r>
               <a:rPr lang="en-US" dirty="0"/>
-              <a:t>분석에 쓴 컬럼과 이유입니다. 날짜(TA_YMD)로 기상과 연결하고, 업종(MCT_RY_CD)으로 업종을 비교했고, 결제금액(TS_AT)으로 피해를 금액 기준으로 봤습니다. 데이터2의 고객 거주지(CLN_SGG_CD)로 외지 관광객과 강원 고객을 나눴습니다. 비 피해율은 비가 10mm 넘게 온 날 매출이 비 안 온 날보다 얼마나 낮은지입니다. 같은 주, 요일, 공휴일, 폭염 효과는 빼고 비교했습니다. 회복은 비 온 뒤 1~3일까지의 효과를 더한 누적값으로 봤습니다.</a:t>
+              <a:t>비 온 뒤 회복을 본 장입니다. 파란 막대는 비 온 당일, 주황 막대는 그 뒤 사흘까지 더한 누적 변화입니다. 생활소매는 당일 5% 줄지만 그 뒤 1~3일 사이 매출이 반등해 누적으로는 0에 가깝습니다. 반등은 통계적으로 유의합니다(p = 0.04). 손님이 장보기를 하루이틀 미룬 것으로 해석할 수 있습니다. 야외·레저는 당일 40% 빠진 뒤 그대로입니다. 비 때문에 취소한 골프나 나들이는 다시 오지 않는다는 뜻입니다. 숙박·여행은 당일보다 그 뒤가 더 나빠 누적 38% 감소입니다. 비 예보로 이어지는 예약 취소로 보입니다. 그래서 레저와 숙박은 손실이 사라지는 업종, 즉 지원이 필요한 업종입니다.</a:t>
             </a:r>
             <a:endParaRPr lang="en-US" dirty="0"/>
           </a:p>
@@ -2182,7 +1838,7 @@
           <a:p>
             <a:r>
               <a:rPr lang="en-US" dirty="0"/>
-              <a:t>업종군 12개를 비교한 결과입니다. 비가 10mm 넘게 오는 날 야외·레저 매출은 40% 줄어, 다른 업종보다 압도적으로 큽니다. 95% 신뢰구간도 -47% ~ -33%로 확실합니다. 춘천 매출의 절반을 차지하는 외식과 생활소매는 5~7% 정도 줄어듭니다. 숙박·여행은 당일 -12%로 통계적으로는 불확실한데, 다음 장에서 보듯 비 온 뒤 며칠에 걸쳐 손실이 커집니다.</a:t>
+              <a:t>레저와 숙박을 세부 업종으로 쪼갠 결과입니다. 주황은 뚜렷하게 줄어든 업종, 회색은 차이가 불확실한 업종, 파랑은 뚜렷하게 늘어난 업종입니다. 골프장은 58%, 고속버스·철도는 47%, 레저타운·놀이동산은 45% 줄었습니다. 세 업종 모두 외지 고객 비중이 80% 안팎입니다. 같은 골프장 안에서도 강원 고객은 -44%, 외지 고객은 -62%로 외지 관광객이 더 크게 빠집니다. 반대로 헬스장과 스포츠시설처럼 주민이 쓰는 곳은 영향이 없습니다. 사우나는 오히려 20% 늘었고, 외지 고객은 +47% 늘었습니다. 비 오는 날 더 선선해서 늘어난 것 아니냐는 질문에 대비해 기온을 촘촘히 통제해 봤는데, 그래도 18% 증가로 유의합니다. 비가 오면 관광객이 아예 안 오는 게 아니라 실내로 옮겨 간다는 신호이고, 이것이 정책 제안의 실마리입니다. 호텔·콘도도 21% 줄었지만 결제가 들쭉날쭉해 통계적으로는 불확실하고, 숙박은 앱 선결제가 데이터에서 빠지는 한계가 있습니다.</a:t>
             </a:r>
             <a:endParaRPr lang="en-US" dirty="0"/>
           </a:p>
@@ -2270,7 +1926,7 @@
           <a:p>
             <a:r>
               <a:rPr lang="en-US" dirty="0"/>
-              <a:t>비 온 뒤 회복을 본 장입니다. 파란 막대는 비 온 당일, 주황 막대는 그 뒤 사흘까지 더한 누적 변화입니다. 생활소매는 당일 5% 줄지만 다음 날 장보기로 거의 다 메워 누적으로는 0에 가깝습니다. 손님이 날짜만 미룬 겁니다. 야외·레저는 당일 40% 빠진 뒤 그대로입니다. 비 때문에 취소한 골프나 나들이는 다시 오지 않는다는 뜻입니다. 숙박·여행은 당일보다 그 뒤가 더 나빠 누적 38% 감소입니다. 비 예보로 이어지는 예약 취소로 보입니다. 그래서 레저와 숙박은 손실이 사라지는 업종, 즉 지원이 필요한 업종입니다.</a:t>
+              <a:t>분석에 쓴 컬럼과 이유입니다. 질문이 나오면 이 장을 보여 주세요.</a:t>
             </a:r>
             <a:endParaRPr lang="en-US" dirty="0"/>
           </a:p>
@@ -2294,270 +1950,6 @@
             <a:fld id="{F7021451-1387-4CA6-816F-3879F97B5CBC}" type="slidenum">
               <a:rPr lang="en-US"/>
               <a:t>4</a:t>
-            </a:fld>
-            <a:endParaRPr lang="en-US"/>
-          </a:p>
-        </p:txBody>
-      </p:sp>
-    </p:spTree>
-    <p:extLst>
-      <p:ext uri="{BB962C8B-B14F-4D97-AF65-F5344CB8AC3E}">
-        <p14:creationId xmlns:p14="http://schemas.microsoft.com/office/powerpoint/2010/main" val="1024086991"/>
-      </p:ext>
-    </p:extLst>
-  </p:cSld>
-  <p:clrMapOvr>
-    <a:masterClrMapping/>
-  </p:clrMapOvr>
-</p:notes>
-</file>
-
-<file path=ppt/notesSlides/notesSlide5.xml><?xml version="1.0" encoding="utf-8"?>
-<p:notes xmlns:a="http://schemas.openxmlformats.org/drawingml/2006/main" xmlns:r="http://schemas.openxmlformats.org/officeDocument/2006/relationships" xmlns:p="http://schemas.openxmlformats.org/presentationml/2006/main">
-  <p:cSld>
-    <p:spTree>
-      <p:nvGrpSpPr>
-        <p:cNvPr id="1" name=""/>
-        <p:cNvGrpSpPr/>
-        <p:nvPr/>
-      </p:nvGrpSpPr>
-      <p:grpSpPr>
-        <a:xfrm>
-          <a:off x="0" y="0"/>
-          <a:ext cx="0" cy="0"/>
-          <a:chOff x="0" y="0"/>
-          <a:chExt cx="0" cy="0"/>
-        </a:xfrm>
-      </p:grpSpPr>
-      <p:sp>
-        <p:nvSpPr>
-          <p:cNvPr id="2" name="Slide Image Placeholder 1"/>
-          <p:cNvSpPr>
-            <a:spLocks noGrp="1" noRot="1" noChangeAspect="1"/>
-          </p:cNvSpPr>
-          <p:nvPr>
-            <p:ph type="sldImg"/>
-          </p:nvPr>
-        </p:nvSpPr>
-        <p:spPr/>
-      </p:sp>
-      <p:sp>
-        <p:nvSpPr>
-          <p:cNvPr id="3" name="Notes Placeholder 2"/>
-          <p:cNvSpPr>
-            <a:spLocks noGrp="1"/>
-          </p:cNvSpPr>
-          <p:nvPr>
-            <p:ph type="body" idx="1"/>
-          </p:nvPr>
-        </p:nvSpPr>
-        <p:spPr/>
-        <p:txBody>
-          <a:bodyPr/>
-          <a:lstStyle/>
-          <a:p>
-            <a:r>
-              <a:rPr lang="en-US" dirty="0"/>
-              <a:t>레저와 숙박 안을 업종별로 쪼갠 결과입니다. 주황은 뚜렷하게 줄어든 업종, 회색은 차이가 불확실한 업종, 파랑은 뚜렷하게 늘어난 업종입니다. 골프장은 58%, 고속버스·철도는 47%, 레저타운·놀이동산은 45% 줄었습니다. 세 업종 모두 외지 고객 비중이 80% 안팎입니다. 반대로 헬스장과 스포츠시설처럼 동네 주민이 쓰는 곳은 비의 영향이 없습니다. 사우나는 오히려 20% 늘었습니다. 비가 오면 관광객이 아예 안 오는 게 아니라 실내로 옮겨 간다는 신호입니다. 호텔·콘도도 21% 줄었지만 결제가 들쭉날쭉해 통계적으로는 불확실합니다. 숙박은 앱 선결제가 데이터에서 빠지는 한계도 있습니다.</a:t>
-            </a:r>
-            <a:endParaRPr lang="en-US" dirty="0"/>
-          </a:p>
-        </p:txBody>
-      </p:sp>
-      <p:sp>
-        <p:nvSpPr>
-          <p:cNvPr id="4" name="Slide Number Placeholder 3"/>
-          <p:cNvSpPr>
-            <a:spLocks noGrp="1"/>
-          </p:cNvSpPr>
-          <p:nvPr>
-            <p:ph type="sldNum" sz="quarter" idx="10"/>
-          </p:nvPr>
-        </p:nvSpPr>
-        <p:spPr/>
-        <p:txBody>
-          <a:bodyPr/>
-          <a:lstStyle/>
-          <a:p>
-            <a:fld id="{F7021451-1387-4CA6-816F-3879F97B5CBC}" type="slidenum">
-              <a:rPr lang="en-US"/>
-              <a:t>5</a:t>
-            </a:fld>
-            <a:endParaRPr lang="en-US"/>
-          </a:p>
-        </p:txBody>
-      </p:sp>
-    </p:spTree>
-    <p:extLst>
-      <p:ext uri="{BB962C8B-B14F-4D97-AF65-F5344CB8AC3E}">
-        <p14:creationId xmlns:p14="http://schemas.microsoft.com/office/powerpoint/2010/main" val="1024086991"/>
-      </p:ext>
-    </p:extLst>
-  </p:cSld>
-  <p:clrMapOvr>
-    <a:masterClrMapping/>
-  </p:clrMapOvr>
-</p:notes>
-</file>
-
-<file path=ppt/notesSlides/notesSlide6.xml><?xml version="1.0" encoding="utf-8"?>
-<p:notes xmlns:a="http://schemas.openxmlformats.org/drawingml/2006/main" xmlns:r="http://schemas.openxmlformats.org/officeDocument/2006/relationships" xmlns:p="http://schemas.openxmlformats.org/presentationml/2006/main">
-  <p:cSld>
-    <p:spTree>
-      <p:nvGrpSpPr>
-        <p:cNvPr id="1" name=""/>
-        <p:cNvGrpSpPr/>
-        <p:nvPr/>
-      </p:nvGrpSpPr>
-      <p:grpSpPr>
-        <a:xfrm>
-          <a:off x="0" y="0"/>
-          <a:ext cx="0" cy="0"/>
-          <a:chOff x="0" y="0"/>
-          <a:chExt cx="0" cy="0"/>
-        </a:xfrm>
-      </p:grpSpPr>
-      <p:sp>
-        <p:nvSpPr>
-          <p:cNvPr id="2" name="Slide Image Placeholder 1"/>
-          <p:cNvSpPr>
-            <a:spLocks noGrp="1" noRot="1" noChangeAspect="1"/>
-          </p:cNvSpPr>
-          <p:nvPr>
-            <p:ph type="sldImg"/>
-          </p:nvPr>
-        </p:nvSpPr>
-        <p:spPr/>
-      </p:sp>
-      <p:sp>
-        <p:nvSpPr>
-          <p:cNvPr id="3" name="Notes Placeholder 2"/>
-          <p:cNvSpPr>
-            <a:spLocks noGrp="1"/>
-          </p:cNvSpPr>
-          <p:nvPr>
-            <p:ph type="body" idx="1"/>
-          </p:nvPr>
-        </p:nvSpPr>
-        <p:spPr/>
-        <p:txBody>
-          <a:bodyPr/>
-          <a:lstStyle/>
-          <a:p>
-            <a:r>
-              <a:rPr lang="en-US" dirty="0"/>
-              <a:t>같은 업종 안에서 고객이 어디 사는지에 따라 나눠 봤습니다. 골프장은 강원 고객이 -44%, 외지 고객이 -62%로 외지 관광객이 더 크게 빠집니다. 레저타운·놀이동산은 둘 다 45% 정도 줄었는데, 애초에 고객 80%가 외지인입니다. 사우나는 외지 고객 매출이 +47% 늘었습니다. 비 오는 날 춘천에 온 관광객이 실내 시설로 옮겨 간 겁니다. 결국 레저 피해는 외지 관광객이 비 때문에 일정을 취소하거나 바꾸는 문제이고, 실내로 붙잡을 여지도 있다는 뜻입니다.</a:t>
-            </a:r>
-            <a:endParaRPr lang="en-US" dirty="0"/>
-          </a:p>
-        </p:txBody>
-      </p:sp>
-      <p:sp>
-        <p:nvSpPr>
-          <p:cNvPr id="4" name="Slide Number Placeholder 3"/>
-          <p:cNvSpPr>
-            <a:spLocks noGrp="1"/>
-          </p:cNvSpPr>
-          <p:nvPr>
-            <p:ph type="sldNum" sz="quarter" idx="10"/>
-          </p:nvPr>
-        </p:nvSpPr>
-        <p:spPr/>
-        <p:txBody>
-          <a:bodyPr/>
-          <a:lstStyle/>
-          <a:p>
-            <a:fld id="{F7021451-1387-4CA6-816F-3879F97B5CBC}" type="slidenum">
-              <a:rPr lang="en-US"/>
-              <a:t>6</a:t>
-            </a:fld>
-            <a:endParaRPr lang="en-US"/>
-          </a:p>
-        </p:txBody>
-      </p:sp>
-    </p:spTree>
-    <p:extLst>
-      <p:ext uri="{BB962C8B-B14F-4D97-AF65-F5344CB8AC3E}">
-        <p14:creationId xmlns:p14="http://schemas.microsoft.com/office/powerpoint/2010/main" val="1024086991"/>
-      </p:ext>
-    </p:extLst>
-  </p:cSld>
-  <p:clrMapOvr>
-    <a:masterClrMapping/>
-  </p:clrMapOvr>
-</p:notes>
-</file>
-
-<file path=ppt/notesSlides/notesSlide7.xml><?xml version="1.0" encoding="utf-8"?>
-<p:notes xmlns:a="http://schemas.openxmlformats.org/drawingml/2006/main" xmlns:r="http://schemas.openxmlformats.org/officeDocument/2006/relationships" xmlns:p="http://schemas.openxmlformats.org/presentationml/2006/main">
-  <p:cSld>
-    <p:spTree>
-      <p:nvGrpSpPr>
-        <p:cNvPr id="1" name=""/>
-        <p:cNvGrpSpPr/>
-        <p:nvPr/>
-      </p:nvGrpSpPr>
-      <p:grpSpPr>
-        <a:xfrm>
-          <a:off x="0" y="0"/>
-          <a:ext cx="0" cy="0"/>
-          <a:chOff x="0" y="0"/>
-          <a:chExt cx="0" cy="0"/>
-        </a:xfrm>
-      </p:grpSpPr>
-      <p:sp>
-        <p:nvSpPr>
-          <p:cNvPr id="2" name="Slide Image Placeholder 1"/>
-          <p:cNvSpPr>
-            <a:spLocks noGrp="1" noRot="1" noChangeAspect="1"/>
-          </p:cNvSpPr>
-          <p:nvPr>
-            <p:ph type="sldImg"/>
-          </p:nvPr>
-        </p:nvSpPr>
-        <p:spPr/>
-      </p:sp>
-      <p:sp>
-        <p:nvSpPr>
-          <p:cNvPr id="3" name="Notes Placeholder 2"/>
-          <p:cNvSpPr>
-            <a:spLocks noGrp="1"/>
-          </p:cNvSpPr>
-          <p:nvPr>
-            <p:ph type="body" idx="1"/>
-          </p:nvPr>
-        </p:nvSpPr>
-        <p:spPr/>
-        <p:txBody>
-          <a:bodyPr/>
-          <a:lstStyle/>
-          <a:p>
-            <a:r>
-              <a:rPr lang="en-US" dirty="0"/>
-              <a:t>정리하겠습니다. 춘천에서 비에 가장 약한 상권은 두 곳입니다. 야외·레저는 비 오는 당일 40% 빠지는 충격이 가장 크고, 숙박은 당일보다 그 뒤 사흘에 걸쳐 손실이 쌓여 회복하지 못합니다. 원인은 외지 관광객이 비 때문에 오지 않는 데 있고, 비가 와도 실내로 옮겨 가는 관광객이 있다는 점은 대책의 실마리입니다. 다음 장 AI 모델에서는 이 두 업종의 매출 감소와 회복을 예측하고, 정책 제안에서는 관광객을 다시 오게 하는 방법을 다룹니다. 한계로, 숙박은 앱 선결제가 데이터에서 빠지고, 기간이 6개월이며, 업종군 전체로 보면 외지인 비중과 피해의 관계는 뚜렷하지 않아 레저·숙박 안에서만 주장합니다.</a:t>
-            </a:r>
-            <a:endParaRPr lang="en-US" dirty="0"/>
-          </a:p>
-        </p:txBody>
-      </p:sp>
-      <p:sp>
-        <p:nvSpPr>
-          <p:cNvPr id="4" name="Slide Number Placeholder 3"/>
-          <p:cNvSpPr>
-            <a:spLocks noGrp="1"/>
-          </p:cNvSpPr>
-          <p:nvPr>
-            <p:ph type="sldNum" sz="quarter" idx="10"/>
-          </p:nvPr>
-        </p:nvSpPr>
-        <p:spPr/>
-        <p:txBody>
-          <a:bodyPr/>
-          <a:lstStyle/>
-          <a:p>
-            <a:fld id="{F7021451-1387-4CA6-816F-3879F97B5CBC}" type="slidenum">
-              <a:rPr lang="en-US"/>
-              <a:t>7</a:t>
             </a:fld>
             <a:endParaRPr lang="en-US"/>
           </a:p>
@@ -2608,116 +2000,6 @@
 
 <file path=ppt/slideLayouts/slideLayout2.xml><?xml version="1.0" encoding="utf-8"?>
 <p:sldLayout xmlns:a="http://schemas.openxmlformats.org/drawingml/2006/main" xmlns:r="http://schemas.openxmlformats.org/officeDocument/2006/relationships" xmlns:p="http://schemas.openxmlformats.org/presentationml/2006/main" preserve="1">
-  <p:cSld name="SECTION">
-    <p:bg>
-      <p:bgPr>
-        <a:solidFill>
-          <a:srgbClr val="15303D"/>
-        </a:solidFill>
-      </p:bgPr>
-    </p:bg>
-    <p:spTree>
-      <p:nvGrpSpPr>
-        <p:cNvPr id="1" name=""/>
-        <p:cNvGrpSpPr/>
-        <p:nvPr/>
-      </p:nvGrpSpPr>
-      <p:grpSpPr>
-        <a:xfrm>
-          <a:off x="0" y="0"/>
-          <a:ext cx="0" cy="0"/>
-          <a:chOff x="0" y="0"/>
-          <a:chExt cx="0" cy="0"/>
-        </a:xfrm>
-      </p:grpSpPr>
-      <p:sp>
-        <p:nvSpPr>
-          <p:cNvPr id="2" name="Text 0"/>
-          <p:cNvSpPr/>
-          <p:nvPr>
-            <p:ph idx="100" type="title" hasCustomPrompt="1"/>
-          </p:nvPr>
-        </p:nvSpPr>
-        <p:spPr>
-          <a:xfrm>
-            <a:off x="731520" y="1371600"/>
-            <a:ext cx="10698480" cy="1828800"/>
-          </a:xfrm>
-          <a:prstGeom prst="rect">
-            <a:avLst/>
-          </a:prstGeom>
-          <a:noFill/>
-          <a:ln/>
-        </p:spPr>
-        <p:txBody>
-          <a:bodyPr wrap="square" rtlCol="0"/>
-          <a:lstStyle>
-            <a:lvl1pPr algn="l" indent="0" marL="0">
-              <a:buNone/>
-              <a:defRPr lang="en-US" sz="4400" b="1" dirty="0">
-                <a:solidFill>
-                  <a:schemeClr val="bg1"/>
-                </a:solidFill>
-              </a:defRPr>
-            </a:lvl1pPr>
-          </a:lstStyle>
-          <a:p>
-            <a:pPr algn="l" indent="0" marL="0">
-              <a:buNone/>
-            </a:pPr>
-            <a:endParaRPr lang="en-US" sz="4400" dirty="0"/>
-          </a:p>
-        </p:txBody>
-      </p:sp>
-      <p:sp>
-        <p:nvSpPr>
-          <p:cNvPr id="3" name="Text 0"/>
-          <p:cNvSpPr/>
-          <p:nvPr>
-            <p:ph idx="101" type="body" hasCustomPrompt="1"/>
-          </p:nvPr>
-        </p:nvSpPr>
-        <p:spPr>
-          <a:xfrm>
-            <a:off x="731520" y="3383280"/>
-            <a:ext cx="10698480" cy="548640"/>
-          </a:xfrm>
-          <a:prstGeom prst="rect">
-            <a:avLst/>
-          </a:prstGeom>
-          <a:noFill/>
-          <a:ln/>
-        </p:spPr>
-        <p:txBody>
-          <a:bodyPr wrap="square" rtlCol="0"/>
-          <a:lstStyle>
-            <a:lvl1pPr indent="0" marL="0">
-              <a:buNone/>
-              <a:defRPr lang="en-US" sz="2000" dirty="0">
-                <a:solidFill>
-                  <a:srgbClr val="C8D6DF"/>
-                </a:solidFill>
-              </a:defRPr>
-            </a:lvl1pPr>
-          </a:lstStyle>
-          <a:p>
-            <a:pPr indent="0" marL="0">
-              <a:buNone/>
-            </a:pPr>
-            <a:endParaRPr lang="en-US" sz="2000" dirty="0"/>
-          </a:p>
-        </p:txBody>
-      </p:sp>
-    </p:spTree>
-  </p:cSld>
-  <p:clrMapOvr>
-    <a:masterClrMapping/>
-  </p:clrMapOvr>
-</p:sldLayout>
-</file>
-
-<file path=ppt/slideLayouts/slideLayout3.xml><?xml version="1.0" encoding="utf-8"?>
-<p:sldLayout xmlns:a="http://schemas.openxmlformats.org/drawingml/2006/main" xmlns:r="http://schemas.openxmlformats.org/officeDocument/2006/relationships" xmlns:p="http://schemas.openxmlformats.org/presentationml/2006/main" preserve="1">
   <p:cSld name="CONTENT">
     <p:bg>
       <p:bgPr>
@@ -2890,7 +2172,7 @@
             <a:pPr algn="r"/>
             <a:fld id="{F7021451-1387-4CA6-816F-3879F97B5CBC}" type="slidenum">
               <a:rPr b="0" lang="en-US"/>
-              <a:t>1003</a:t>
+              <a:t>1002</a:t>
             </a:fld>
             <a:endParaRPr lang="en-US"/>
           </a:p>
@@ -2972,7 +2254,6 @@
   <p:sldLayoutIdLst>
     <p:sldLayoutId id="2147483649" r:id="rId1"/>
     <p:sldLayoutId id="2147483650" r:id="rId2"/>
-    <p:sldLayoutId id="2147483651" r:id="rId3"/>
   </p:sldLayoutIdLst>
   <p:hf sldNum="0" hdr="0" ftr="0" dt="0"/>
   <p:txStyles>
@@ -3247,16 +2528,262 @@
       </p:grpSpPr>
       <p:sp>
         <p:nvSpPr>
-          <p:cNvPr id="2" name="Text 0"/>
+          <p:cNvPr id="2" name="Text 1"/>
           <p:cNvSpPr/>
           <p:nvPr>
-            <p:ph idx="100" type="title" hasCustomPrompt="1"/>
+            <p:ph idx="101" type="title" hasCustomPrompt="1"/>
           </p:nvPr>
         </p:nvSpPr>
         <p:spPr>
           <a:xfrm>
-            <a:off x="731520" y="1371600"/>
-            <a:ext cx="10698480" cy="1828800"/>
+            <a:off x="548640" y="640080"/>
+            <a:ext cx="11064240" cy="822960"/>
+          </a:xfrm>
+          <a:prstGeom prst="rect">
+            <a:avLst/>
+          </a:prstGeom>
+          <a:noFill/>
+          <a:ln/>
+        </p:spPr>
+        <p:txBody>
+          <a:bodyPr wrap="square" lIns="0" tIns="0" rIns="0" bIns="0" rtlCol="0" anchor="t"/>
+          <a:lstStyle/>
+          <a:p>
+            <a:pPr algn="l" indent="0" marL="0">
+              <a:buNone/>
+            </a:pPr>
+            <a:r>
+              <a:rPr lang="en-US" sz="3000" b="1" dirty="0">
+                <a:solidFill>
+                  <a:schemeClr val="tx1"/>
+                </a:solidFill>
+              </a:rPr>
+              <a:t>비 오는 날 야외·레저 매출 40% 감소, 업종 중 최대</a:t>
+            </a:r>
+            <a:endParaRPr lang="en-US" sz="3000" dirty="0"/>
+          </a:p>
+        </p:txBody>
+      </p:sp>
+      <p:sp>
+        <p:nvSpPr>
+          <p:cNvPr id="3" name="chart caption"/>
+          <p:cNvSpPr txBox="1"/>
+          <p:nvPr/>
+        </p:nvSpPr>
+        <p:spPr>
+          <a:xfrm>
+            <a:off x="548640" y="1600200"/>
+            <a:ext cx="7223760" cy="320040"/>
+          </a:xfrm>
+          <a:prstGeom prst="rect">
+            <a:avLst/>
+          </a:prstGeom>
+          <a:noFill/>
+          <a:ln/>
+        </p:spPr>
+        <p:txBody>
+          <a:bodyPr wrap="square" lIns="0" tIns="0" rIns="0" bIns="0" rtlCol="0" anchor="ctr"/>
+          <a:lstStyle/>
+          <a:p>
+            <a:pPr indent="0" marL="0">
+              <a:buNone/>
+            </a:pPr>
+            <a:r>
+              <a:rPr lang="en-US" sz="1300" b="1" dirty="0">
+                <a:solidFill>
+                  <a:srgbClr val="1D2B33"/>
+                </a:solidFill>
+              </a:rPr>
+              <a:t>업종군별 비 10mm+ 날 매출 변화 (비 안 온 날 대비)</a:t>
+            </a:r>
+            <a:endParaRPr lang="en-US" sz="1300" dirty="0"/>
+          </a:p>
+        </p:txBody>
+      </p:sp>
+      <p:graphicFrame>
+        <p:nvGraphicFramePr>
+          <p:cNvPr id="4" name="group rain chart" descr=""/>
+          <p:cNvGraphicFramePr/>
+          <p:nvPr/>
+        </p:nvGraphicFramePr>
+        <p:xfrm>
+          <a:off x="457200" y="1920240"/>
+          <a:ext cx="7315200" cy="4297680"/>
+        </p:xfrm>
+        <a:graphic xmlns:a="http://schemas.openxmlformats.org/drawingml/2006/main">
+          <a:graphicData uri="http://schemas.openxmlformats.org/drawingml/2006/chart">
+            <c:chart xmlns:c="http://schemas.openxmlformats.org/drawingml/2006/chart" r:id="rId1"/>
+          </a:graphicData>
+        </a:graphic>
+      </p:graphicFrame>
+      <p:sp>
+        <p:nvSpPr>
+          <p:cNvPr id="5" name="Text 2"/>
+          <p:cNvSpPr txBox="1"/>
+          <p:nvPr/>
+        </p:nvSpPr>
+        <p:spPr>
+          <a:xfrm>
+            <a:off x="8229600" y="1783080"/>
+            <a:ext cx="3383280" cy="1005840"/>
+          </a:xfrm>
+          <a:prstGeom prst="rect">
+            <a:avLst/>
+          </a:prstGeom>
+          <a:noFill/>
+          <a:ln/>
+        </p:spPr>
+        <p:txBody>
+          <a:bodyPr wrap="square" lIns="0" tIns="0" rIns="0" bIns="0" rtlCol="0" anchor="ctr"/>
+          <a:lstStyle/>
+          <a:p>
+            <a:pPr indent="0" marL="0">
+              <a:buNone/>
+            </a:pPr>
+            <a:r>
+              <a:rPr lang="en-US" sz="6400" b="1" dirty="0">
+                <a:solidFill>
+                  <a:srgbClr val="D9622B"/>
+                </a:solidFill>
+              </a:rPr>
+              <a:t>-40%</a:t>
+            </a:r>
+            <a:endParaRPr lang="en-US" sz="6400" dirty="0"/>
+          </a:p>
+        </p:txBody>
+      </p:sp>
+      <p:sp>
+        <p:nvSpPr>
+          <p:cNvPr id="6" name="Text 3"/>
+          <p:cNvSpPr txBox="1"/>
+          <p:nvPr/>
+        </p:nvSpPr>
+        <p:spPr>
+          <a:xfrm>
+            <a:off x="8229600" y="2788920"/>
+            <a:ext cx="3429000" cy="868680"/>
+          </a:xfrm>
+          <a:prstGeom prst="rect">
+            <a:avLst/>
+          </a:prstGeom>
+          <a:noFill/>
+          <a:ln/>
+        </p:spPr>
+        <p:txBody>
+          <a:bodyPr wrap="square" lIns="0" tIns="0" rIns="0" bIns="0" rtlCol="0" anchor="ctr"/>
+          <a:lstStyle/>
+          <a:p>
+            <a:pPr indent="0" marL="0">
+              <a:buNone/>
+            </a:pPr>
+            <a:r>
+              <a:rPr lang="en-US" sz="1400" b="1" dirty="0">
+                <a:solidFill>
+                  <a:srgbClr val="1D2B33"/>
+                </a:solidFill>
+              </a:rPr>
+              <a:t>야외·레저</a:t>
+            </a:r>
+            <a:endParaRPr lang="en-US" sz="1400" dirty="0"/>
+          </a:p>
+          <a:p>
+            <a:pPr indent="0" marL="0">
+              <a:buNone/>
+            </a:pPr>
+            <a:r>
+              <a:rPr lang="en-US" sz="1400" dirty="0">
+                <a:solidFill>
+                  <a:srgbClr val="1D2B33"/>
+                </a:solidFill>
+              </a:rPr>
+              <a:t>비 10mm+ 날 매출 변화</a:t>
+            </a:r>
+            <a:endParaRPr lang="en-US" sz="1400" dirty="0"/>
+          </a:p>
+          <a:p>
+            <a:pPr indent="0" marL="0">
+              <a:buNone/>
+            </a:pPr>
+            <a:r>
+              <a:rPr lang="en-US" sz="1200" dirty="0">
+                <a:solidFill>
+                  <a:srgbClr val="6B7780"/>
+                </a:solidFill>
+              </a:rPr>
+              <a:t>95% 구간 -47% ~ -33%</a:t>
+            </a:r>
+            <a:endParaRPr lang="en-US" sz="1400" dirty="0"/>
+          </a:p>
+        </p:txBody>
+      </p:sp>
+      <p:sp>
+        <p:nvSpPr>
+          <p:cNvPr id="7" name="Text 4"/>
+          <p:cNvSpPr txBox="1"/>
+          <p:nvPr/>
+        </p:nvSpPr>
+        <p:spPr>
+          <a:xfrm>
+            <a:off x="8229600" y="3794760"/>
+            <a:ext cx="3429000" cy="1463040"/>
+          </a:xfrm>
+          <a:prstGeom prst="rect">
+            <a:avLst/>
+          </a:prstGeom>
+          <a:noFill/>
+          <a:ln/>
+        </p:spPr>
+        <p:txBody>
+          <a:bodyPr wrap="square" lIns="0" tIns="0" rIns="0" bIns="0" rtlCol="0" anchor="t"/>
+          <a:lstStyle/>
+          <a:p>
+            <a:pPr marL="342900" indent="-342900">
+              <a:spcAft>
+                <a:spcPts val="800"/>
+              </a:spcAft>
+              <a:buSzPct val="100000"/>
+              <a:buChar char="•"/>
+            </a:pPr>
+            <a:r>
+              <a:rPr lang="en-US" sz="1400" dirty="0">
+                <a:solidFill>
+                  <a:srgbClr val="1D2B33"/>
+                </a:solidFill>
+              </a:rPr>
+              <a:t>매출 절반을 차지하는 외식·생활소매보다 6~8배 큰 감소</a:t>
+            </a:r>
+            <a:endParaRPr lang="en-US" sz="1400" dirty="0"/>
+          </a:p>
+          <a:p>
+            <a:pPr marL="342900" indent="-342900">
+              <a:spcAft>
+                <a:spcPts val="800"/>
+              </a:spcAft>
+              <a:buSzPct val="100000"/>
+              <a:buChar char="•"/>
+            </a:pPr>
+            <a:r>
+              <a:rPr lang="en-US" sz="1400" dirty="0">
+                <a:solidFill>
+                  <a:srgbClr val="1D2B33"/>
+                </a:solidFill>
+              </a:rPr>
+              <a:t>숙박·여행은 당일 감소가 불확실하고, 손실은 비 온 뒤에 드러남 (다음 장)</a:t>
+            </a:r>
+            <a:endParaRPr lang="en-US" sz="1400" dirty="0"/>
+          </a:p>
+        </p:txBody>
+      </p:sp>
+      <p:sp>
+        <p:nvSpPr>
+          <p:cNvPr id="8" name="footnote"/>
+          <p:cNvSpPr txBox="1"/>
+          <p:nvPr/>
+        </p:nvSpPr>
+        <p:spPr>
+          <a:xfrm>
+            <a:off x="8229600" y="5349240"/>
+            <a:ext cx="3474720" cy="914400"/>
           </a:xfrm>
           <a:prstGeom prst="rect">
             <a:avLst/>
@@ -3268,409 +2795,77 @@
           <a:bodyPr wrap="square" lIns="0" tIns="0" rIns="0" bIns="0" rtlCol="0" anchor="b"/>
           <a:lstStyle/>
           <a:p>
-            <a:pPr algn="l" indent="0" marL="0">
+            <a:pPr indent="0" marL="0">
               <a:buNone/>
             </a:pPr>
             <a:r>
-              <a:rPr lang="en-US" sz="4400" b="1" dirty="0">
-                <a:solidFill>
-                  <a:schemeClr val="bg1"/>
+              <a:rPr lang="en-US" sz="1000" dirty="0">
+                <a:solidFill>
+                  <a:srgbClr val="6B7780"/>
                 </a:solidFill>
               </a:rPr>
-              <a:t>춘천 레저·숙박은</a:t>
+              <a:t>쓴 컬럼: 날짜·업종·결제금액·고객 거주지 (부록 A)</a:t>
             </a:r>
-            <a:endParaRPr lang="en-US" sz="4400" dirty="0"/>
-          </a:p>
-          <a:p>
-            <a:pPr algn="l" indent="0" marL="0">
+            <a:endParaRPr lang="en-US" sz="1000" dirty="0"/>
+          </a:p>
+          <a:p>
+            <a:pPr indent="0" marL="0">
               <a:buNone/>
             </a:pPr>
             <a:r>
-              <a:rPr lang="en-US" sz="4400" b="1" dirty="0">
-                <a:solidFill>
-                  <a:schemeClr val="bg1"/>
+              <a:rPr lang="en-US" sz="1000" dirty="0">
+                <a:solidFill>
+                  <a:srgbClr val="6B7780"/>
                 </a:solidFill>
               </a:rPr>
-              <a:t>비 오는 날 가장 약한 상권</a:t>
+              <a:t>기온을 연속값으로 통제해도 야외·레저 -34% (p&lt;0.001)</a:t>
             </a:r>
-            <a:endParaRPr lang="en-US" sz="4400" dirty="0"/>
+            <a:endParaRPr lang="en-US" sz="1000" dirty="0"/>
           </a:p>
         </p:txBody>
       </p:sp>
       <p:sp>
         <p:nvSpPr>
-          <p:cNvPr id="3" name="Text 0"/>
-          <p:cNvSpPr/>
+          <p:cNvPr id="25" name="Slide Number Placeholder 0"/>
+          <p:cNvSpPr>
+            <a:spLocks noGrp="1"/>
+          </p:cNvSpPr>
           <p:nvPr>
-            <p:ph idx="101" type="body" hasCustomPrompt="1"/>
+            <p:ph type="sldNum" sz="quarter" idx="4294967295"/>
           </p:nvPr>
         </p:nvSpPr>
         <p:spPr>
           <a:xfrm>
-            <a:off x="731520" y="3383280"/>
-            <a:ext cx="10698480" cy="548640"/>
+            <a:off x="11247120" y="6355080"/>
+            <a:ext cx="457200" cy="274320"/>
           </a:xfrm>
           <a:prstGeom prst="rect">
             <a:avLst/>
           </a:prstGeom>
-          <a:noFill/>
-          <a:ln/>
+          <a:extLst>
+            <a:ext uri="{C572A759-6A51-4108-AA02-DFA0A04FC94B}">
+              <ma14:wrappingTextBoxFlag xmlns:ma14="http://schemas.microsoft.com/office/mac/drawingml/2011/main" val="0"/>
+            </a:ext>
+          </a:extLst>
         </p:spPr>
         <p:txBody>
-          <a:bodyPr wrap="square" lIns="0" tIns="0" rIns="0" bIns="0" rtlCol="0"/>
-          <a:lstStyle/>
-          <a:p>
-            <a:pPr indent="0" marL="0">
-              <a:buNone/>
-            </a:pPr>
-            <a:r>
-              <a:rPr lang="en-US" sz="2000" dirty="0">
-                <a:solidFill>
-                  <a:srgbClr val="C8D6DF"/>
-                </a:solidFill>
-              </a:rPr>
-              <a:t>인사이트 2 · 업종별 비 피해와 회복</a:t>
-            </a:r>
-            <a:endParaRPr lang="en-US" sz="2000" dirty="0"/>
-          </a:p>
-        </p:txBody>
-      </p:sp>
-      <p:sp>
-        <p:nvSpPr>
-          <p:cNvPr id="4" name="stat card 1"/>
-          <p:cNvSpPr/>
-          <p:nvPr/>
-        </p:nvSpPr>
-        <p:spPr>
-          <a:xfrm>
-            <a:off x="731520" y="4434840"/>
-            <a:ext cx="3291840" cy="1417320"/>
-          </a:xfrm>
-          <a:prstGeom prst="roundRect">
-            <a:avLst>
-              <a:gd name="adj" fmla="val 7742"/>
-            </a:avLst>
-          </a:prstGeom>
-          <a:solidFill>
-            <a:srgbClr val="1F4252"/>
-          </a:solidFill>
-          <a:ln w="12700">
-            <a:solidFill>
-              <a:srgbClr val="1F4252"/>
-            </a:solidFill>
-            <a:prstDash val="solid"/>
-          </a:ln>
-        </p:spPr>
-      </p:sp>
-      <p:sp>
-        <p:nvSpPr>
-          <p:cNvPr id="5" name="Text 3"/>
-          <p:cNvSpPr txBox="1"/>
-          <p:nvPr/>
-        </p:nvSpPr>
-        <p:spPr>
-          <a:xfrm>
-            <a:off x="1005840" y="4553712"/>
-            <a:ext cx="2743200" cy="685800"/>
-          </a:xfrm>
-          <a:prstGeom prst="rect">
-            <a:avLst/>
-          </a:prstGeom>
-          <a:noFill/>
-          <a:ln/>
-        </p:spPr>
-        <p:txBody>
-          <a:bodyPr wrap="square" lIns="0" tIns="0" rIns="0" bIns="0" rtlCol="0" anchor="ctr"/>
-          <a:lstStyle/>
-          <a:p>
-            <a:pPr indent="0" marL="0">
-              <a:buNone/>
-            </a:pPr>
-            <a:r>
-              <a:rPr lang="en-US" sz="3600" b="1" dirty="0">
-                <a:solidFill>
-                  <a:srgbClr val="F08A57"/>
-                </a:solidFill>
-              </a:rPr>
-              <a:t>-40%</a:t>
-            </a:r>
-            <a:endParaRPr lang="en-US" sz="3600" dirty="0"/>
-          </a:p>
-        </p:txBody>
-      </p:sp>
-      <p:sp>
-        <p:nvSpPr>
-          <p:cNvPr id="6" name="Text 4"/>
-          <p:cNvSpPr txBox="1"/>
-          <p:nvPr/>
-        </p:nvSpPr>
-        <p:spPr>
-          <a:xfrm>
-            <a:off x="1005840" y="5230368"/>
-            <a:ext cx="2834640" cy="548640"/>
-          </a:xfrm>
-          <a:prstGeom prst="rect">
-            <a:avLst/>
-          </a:prstGeom>
-          <a:noFill/>
-          <a:ln/>
-        </p:spPr>
-        <p:txBody>
-          <a:bodyPr wrap="square" lIns="0" tIns="0" rIns="0" bIns="0" rtlCol="0" anchor="ctr"/>
-          <a:lstStyle/>
-          <a:p>
-            <a:pPr indent="0" marL="0">
-              <a:buNone/>
-            </a:pPr>
-            <a:r>
-              <a:rPr lang="en-US" sz="1300" b="1" dirty="0">
-                <a:solidFill>
-                  <a:srgbClr val="DCE6EC"/>
-                </a:solidFill>
-              </a:rPr>
-              <a:t>야외·레저</a:t>
-            </a:r>
-            <a:endParaRPr lang="en-US" sz="1300" dirty="0"/>
-          </a:p>
-          <a:p>
-            <a:pPr indent="0" marL="0">
-              <a:buNone/>
-            </a:pPr>
-            <a:r>
-              <a:rPr lang="en-US" sz="1300" dirty="0">
-                <a:solidFill>
-                  <a:srgbClr val="DCE6EC"/>
-                </a:solidFill>
-              </a:rPr>
-              <a:t>비 10mm+ 날 매출 변화</a:t>
-            </a:r>
-            <a:endParaRPr lang="en-US" sz="1300" dirty="0"/>
-          </a:p>
-        </p:txBody>
-      </p:sp>
-      <p:sp>
-        <p:nvSpPr>
-          <p:cNvPr id="7" name="stat card 2"/>
-          <p:cNvSpPr/>
-          <p:nvPr/>
-        </p:nvSpPr>
-        <p:spPr>
-          <a:xfrm>
-            <a:off x="4297680" y="4434840"/>
-            <a:ext cx="3291840" cy="1417320"/>
-          </a:xfrm>
-          <a:prstGeom prst="roundRect">
-            <a:avLst>
-              <a:gd name="adj" fmla="val 7742"/>
-            </a:avLst>
-          </a:prstGeom>
-          <a:solidFill>
-            <a:srgbClr val="1F4252"/>
-          </a:solidFill>
-          <a:ln w="12700">
-            <a:solidFill>
-              <a:srgbClr val="1F4252"/>
-            </a:solidFill>
-            <a:prstDash val="solid"/>
-          </a:ln>
-        </p:spPr>
-      </p:sp>
-      <p:sp>
-        <p:nvSpPr>
-          <p:cNvPr id="8" name="Text 6"/>
-          <p:cNvSpPr txBox="1"/>
-          <p:nvPr/>
-        </p:nvSpPr>
-        <p:spPr>
-          <a:xfrm>
-            <a:off x="4572000" y="4553712"/>
-            <a:ext cx="2743200" cy="685800"/>
-          </a:xfrm>
-          <a:prstGeom prst="rect">
-            <a:avLst/>
-          </a:prstGeom>
-          <a:noFill/>
-          <a:ln/>
-        </p:spPr>
-        <p:txBody>
-          <a:bodyPr wrap="square" lIns="0" tIns="0" rIns="0" bIns="0" rtlCol="0" anchor="ctr"/>
-          <a:lstStyle/>
-          <a:p>
-            <a:pPr indent="0" marL="0">
-              <a:buNone/>
-            </a:pPr>
-            <a:r>
-              <a:rPr lang="en-US" sz="3600" b="1" dirty="0">
-                <a:solidFill>
-                  <a:srgbClr val="F08A57"/>
-                </a:solidFill>
-              </a:rPr>
-              <a:t>-38%</a:t>
-            </a:r>
-            <a:endParaRPr lang="en-US" sz="3600" dirty="0"/>
-          </a:p>
-        </p:txBody>
-      </p:sp>
-      <p:sp>
-        <p:nvSpPr>
-          <p:cNvPr id="9" name="Text 7"/>
-          <p:cNvSpPr txBox="1"/>
-          <p:nvPr/>
-        </p:nvSpPr>
-        <p:spPr>
-          <a:xfrm>
-            <a:off x="4572000" y="5230368"/>
-            <a:ext cx="2834640" cy="548640"/>
-          </a:xfrm>
-          <a:prstGeom prst="rect">
-            <a:avLst/>
-          </a:prstGeom>
-          <a:noFill/>
-          <a:ln/>
-        </p:spPr>
-        <p:txBody>
-          <a:bodyPr wrap="square" lIns="0" tIns="0" rIns="0" bIns="0" rtlCol="0" anchor="ctr"/>
-          <a:lstStyle/>
-          <a:p>
-            <a:pPr indent="0" marL="0">
-              <a:buNone/>
-            </a:pPr>
-            <a:r>
-              <a:rPr lang="en-US" sz="1300" b="1" dirty="0">
-                <a:solidFill>
-                  <a:srgbClr val="DCE6EC"/>
-                </a:solidFill>
-              </a:rPr>
-              <a:t>숙박·여행</a:t>
-            </a:r>
-            <a:endParaRPr lang="en-US" sz="1300" dirty="0"/>
-          </a:p>
-          <a:p>
-            <a:pPr indent="0" marL="0">
-              <a:buNone/>
-            </a:pPr>
-            <a:r>
-              <a:rPr lang="en-US" sz="1300" dirty="0">
-                <a:solidFill>
-                  <a:srgbClr val="DCE6EC"/>
-                </a:solidFill>
-              </a:rPr>
-              <a:t>비 온 뒤 3일 누적 변화</a:t>
-            </a:r>
-            <a:endParaRPr lang="en-US" sz="1300" dirty="0"/>
-          </a:p>
-        </p:txBody>
-      </p:sp>
-      <p:sp>
-        <p:nvSpPr>
-          <p:cNvPr id="10" name="stat card 3"/>
-          <p:cNvSpPr/>
-          <p:nvPr/>
-        </p:nvSpPr>
-        <p:spPr>
-          <a:xfrm>
-            <a:off x="7863840" y="4434840"/>
-            <a:ext cx="3291840" cy="1417320"/>
-          </a:xfrm>
-          <a:prstGeom prst="roundRect">
-            <a:avLst>
-              <a:gd name="adj" fmla="val 7742"/>
-            </a:avLst>
-          </a:prstGeom>
-          <a:solidFill>
-            <a:srgbClr val="1F4252"/>
-          </a:solidFill>
-          <a:ln w="12700">
-            <a:solidFill>
-              <a:srgbClr val="1F4252"/>
-            </a:solidFill>
-            <a:prstDash val="solid"/>
-          </a:ln>
-        </p:spPr>
-      </p:sp>
-      <p:sp>
-        <p:nvSpPr>
-          <p:cNvPr id="11" name="Text 9"/>
-          <p:cNvSpPr txBox="1"/>
-          <p:nvPr/>
-        </p:nvSpPr>
-        <p:spPr>
-          <a:xfrm>
-            <a:off x="8138160" y="4553712"/>
-            <a:ext cx="2743200" cy="685800"/>
-          </a:xfrm>
-          <a:prstGeom prst="rect">
-            <a:avLst/>
-          </a:prstGeom>
-          <a:noFill/>
-          <a:ln/>
-        </p:spPr>
-        <p:txBody>
-          <a:bodyPr wrap="square" lIns="0" tIns="0" rIns="0" bIns="0" rtlCol="0" anchor="ctr"/>
-          <a:lstStyle/>
-          <a:p>
-            <a:pPr indent="0" marL="0">
-              <a:buNone/>
-            </a:pPr>
-            <a:r>
-              <a:rPr lang="en-US" sz="3600" b="1" dirty="0">
-                <a:solidFill>
-                  <a:srgbClr val="9CC3E6"/>
-                </a:solidFill>
-              </a:rPr>
-              <a:t>-0.5%</a:t>
-            </a:r>
-            <a:endParaRPr lang="en-US" sz="3600" dirty="0"/>
-          </a:p>
-        </p:txBody>
-      </p:sp>
-      <p:sp>
-        <p:nvSpPr>
-          <p:cNvPr id="12" name="Text 10"/>
-          <p:cNvSpPr txBox="1"/>
-          <p:nvPr/>
-        </p:nvSpPr>
-        <p:spPr>
-          <a:xfrm>
-            <a:off x="8138160" y="5230368"/>
-            <a:ext cx="2834640" cy="548640"/>
-          </a:xfrm>
-          <a:prstGeom prst="rect">
-            <a:avLst/>
-          </a:prstGeom>
-          <a:noFill/>
-          <a:ln/>
-        </p:spPr>
-        <p:txBody>
-          <a:bodyPr wrap="square" lIns="0" tIns="0" rIns="0" bIns="0" rtlCol="0" anchor="ctr"/>
-          <a:lstStyle/>
-          <a:p>
-            <a:pPr indent="0" marL="0">
-              <a:buNone/>
-            </a:pPr>
-            <a:r>
-              <a:rPr lang="en-US" sz="1300" b="1" dirty="0">
-                <a:solidFill>
-                  <a:srgbClr val="DCE6EC"/>
-                </a:solidFill>
-              </a:rPr>
-              <a:t>생활소매</a:t>
-            </a:r>
-            <a:endParaRPr lang="en-US" sz="1300" dirty="0"/>
-          </a:p>
-          <a:p>
-            <a:pPr indent="0" marL="0">
-              <a:buNone/>
-            </a:pPr>
-            <a:r>
-              <a:rPr lang="en-US" sz="1300" dirty="0">
-                <a:solidFill>
-                  <a:srgbClr val="DCE6EC"/>
-                </a:solidFill>
-              </a:rPr>
-              <a:t>3일 누적: 다음 날 회복</a:t>
-            </a:r>
-            <a:endParaRPr lang="en-US" sz="1300" dirty="0"/>
+          <a:bodyPr/>
+          <a:lstStyle>
+            <a:lvl1pPr>
+              <a:defRPr sz="1000">
+                <a:solidFill>
+                  <a:srgbClr val="6B7780"/>
+                </a:solidFill>
+              </a:defRPr>
+            </a:lvl1pPr>
+          </a:lstStyle>
+          <a:p>
+            <a:pPr algn="r"/>
+            <a:fld id="{F7021451-1387-4CA6-816F-3879F97B5CBC}" type="slidenum">
+              <a:rPr b="0" lang="en-US"/>
+              <a:t>1</a:t>
+            </a:fld>
+            <a:endParaRPr lang="en-US"/>
           </a:p>
         </p:txBody>
       </p:sp>
@@ -3731,15 +2926,1156 @@
                   <a:schemeClr val="tx1"/>
                 </a:solidFill>
               </a:rPr>
-              <a:t>어떤 컬럼으로, 어떻게 비교했나</a:t>
+              <a:t>레저는 당일에, 숙박은 며칠에 걸쳐 무너지고 회복하지 못한다</a:t>
             </a:r>
             <a:endParaRPr lang="en-US" sz="3000" dirty="0"/>
           </a:p>
         </p:txBody>
       </p:sp>
+      <p:sp>
+        <p:nvSpPr>
+          <p:cNvPr id="3" name="chart caption"/>
+          <p:cNvSpPr txBox="1"/>
+          <p:nvPr/>
+        </p:nvSpPr>
+        <p:spPr>
+          <a:xfrm>
+            <a:off x="548640" y="1600200"/>
+            <a:ext cx="7223760" cy="320040"/>
+          </a:xfrm>
+          <a:prstGeom prst="rect">
+            <a:avLst/>
+          </a:prstGeom>
+          <a:noFill/>
+          <a:ln/>
+        </p:spPr>
+        <p:txBody>
+          <a:bodyPr wrap="square" lIns="0" tIns="0" rIns="0" bIns="0" rtlCol="0" anchor="ctr"/>
+          <a:lstStyle/>
+          <a:p>
+            <a:pPr indent="0" marL="0">
+              <a:buNone/>
+            </a:pPr>
+            <a:r>
+              <a:rPr lang="en-US" sz="1300" b="1" dirty="0">
+                <a:solidFill>
+                  <a:srgbClr val="1D2B33"/>
+                </a:solidFill>
+              </a:rPr>
+              <a:t>비 10mm+ 날 매출 변화: 당일 vs 3일 뒤까지 누적</a:t>
+            </a:r>
+            <a:endParaRPr lang="en-US" sz="1300" dirty="0"/>
+          </a:p>
+        </p:txBody>
+      </p:sp>
       <p:graphicFrame>
         <p:nvGraphicFramePr>
-          <p:cNvPr id="3" name="column table"/>
+          <p:cNvPr id="4" name="recovery chart" descr=""/>
+          <p:cNvGraphicFramePr/>
+          <p:nvPr/>
+        </p:nvGraphicFramePr>
+        <p:xfrm>
+          <a:off x="457200" y="1920240"/>
+          <a:ext cx="7315200" cy="4297680"/>
+        </p:xfrm>
+        <a:graphic xmlns:a="http://schemas.openxmlformats.org/drawingml/2006/main">
+          <a:graphicData uri="http://schemas.openxmlformats.org/drawingml/2006/chart">
+            <c:chart xmlns:c="http://schemas.openxmlformats.org/drawingml/2006/chart" r:id="rId1"/>
+          </a:graphicData>
+        </a:graphic>
+      </p:graphicFrame>
+      <p:sp>
+        <p:nvSpPr>
+          <p:cNvPr id="5" name="recovery card 1"/>
+          <p:cNvSpPr/>
+          <p:nvPr/>
+        </p:nvSpPr>
+        <p:spPr>
+          <a:xfrm>
+            <a:off x="8229600" y="1783080"/>
+            <a:ext cx="3429000" cy="1097280"/>
+          </a:xfrm>
+          <a:prstGeom prst="roundRect">
+            <a:avLst>
+              <a:gd name="adj" fmla="val 8333"/>
+            </a:avLst>
+          </a:prstGeom>
+          <a:solidFill>
+            <a:srgbClr val="F3F6F8"/>
+          </a:solidFill>
+          <a:ln w="12700">
+            <a:solidFill>
+              <a:srgbClr val="F3F6F8"/>
+            </a:solidFill>
+            <a:prstDash val="solid"/>
+          </a:ln>
+        </p:spPr>
+      </p:sp>
+      <p:sp>
+        <p:nvSpPr>
+          <p:cNvPr id="6" name="Text 3"/>
+          <p:cNvSpPr txBox="1"/>
+          <p:nvPr/>
+        </p:nvSpPr>
+        <p:spPr>
+          <a:xfrm>
+            <a:off x="8412480" y="1847088"/>
+            <a:ext cx="3108960" cy="987552"/>
+          </a:xfrm>
+          <a:prstGeom prst="rect">
+            <a:avLst/>
+          </a:prstGeom>
+          <a:noFill/>
+          <a:ln/>
+        </p:spPr>
+        <p:txBody>
+          <a:bodyPr wrap="square" lIns="0" tIns="0" rIns="0" bIns="0" rtlCol="0" anchor="t"/>
+          <a:lstStyle/>
+          <a:p>
+            <a:pPr indent="0" marL="0">
+              <a:buNone/>
+            </a:pPr>
+            <a:r>
+              <a:rPr lang="en-US" sz="1400" b="1" dirty="0">
+                <a:solidFill>
+                  <a:srgbClr val="1D2B33"/>
+                </a:solidFill>
+              </a:rPr>
+              <a:t>야외·레저</a:t>
+            </a:r>
+            <a:endParaRPr lang="en-US" sz="1400" dirty="0"/>
+          </a:p>
+          <a:p>
+            <a:pPr indent="0" marL="0">
+              <a:buNone/>
+            </a:pPr>
+            <a:r>
+              <a:rPr lang="en-US" sz="1800" b="1" dirty="0">
+                <a:solidFill>
+                  <a:srgbClr val="D9622B"/>
+                </a:solidFill>
+              </a:rPr>
+              <a:t>-40.4% → -37.2%</a:t>
+            </a:r>
+            <a:endParaRPr lang="en-US" sz="1400" dirty="0"/>
+          </a:p>
+          <a:p>
+            <a:pPr indent="0" marL="0">
+              <a:buNone/>
+            </a:pPr>
+            <a:r>
+              <a:rPr lang="en-US" sz="1300" dirty="0">
+                <a:solidFill>
+                  <a:srgbClr val="1D2B33"/>
+                </a:solidFill>
+              </a:rPr>
+              <a:t>잃은 손님이 돌아오지 않음</a:t>
+            </a:r>
+            <a:endParaRPr lang="en-US" sz="1400" dirty="0"/>
+          </a:p>
+        </p:txBody>
+      </p:sp>
+      <p:sp>
+        <p:nvSpPr>
+          <p:cNvPr id="7" name="recovery card 2"/>
+          <p:cNvSpPr/>
+          <p:nvPr/>
+        </p:nvSpPr>
+        <p:spPr>
+          <a:xfrm>
+            <a:off x="8229600" y="3017520"/>
+            <a:ext cx="3429000" cy="1097280"/>
+          </a:xfrm>
+          <a:prstGeom prst="roundRect">
+            <a:avLst>
+              <a:gd name="adj" fmla="val 8333"/>
+            </a:avLst>
+          </a:prstGeom>
+          <a:solidFill>
+            <a:srgbClr val="F3F6F8"/>
+          </a:solidFill>
+          <a:ln w="12700">
+            <a:solidFill>
+              <a:srgbClr val="F3F6F8"/>
+            </a:solidFill>
+            <a:prstDash val="solid"/>
+          </a:ln>
+        </p:spPr>
+      </p:sp>
+      <p:sp>
+        <p:nvSpPr>
+          <p:cNvPr id="8" name="Text 5"/>
+          <p:cNvSpPr txBox="1"/>
+          <p:nvPr/>
+        </p:nvSpPr>
+        <p:spPr>
+          <a:xfrm>
+            <a:off x="8412480" y="3081528"/>
+            <a:ext cx="3108960" cy="987552"/>
+          </a:xfrm>
+          <a:prstGeom prst="rect">
+            <a:avLst/>
+          </a:prstGeom>
+          <a:noFill/>
+          <a:ln/>
+        </p:spPr>
+        <p:txBody>
+          <a:bodyPr wrap="square" lIns="0" tIns="0" rIns="0" bIns="0" rtlCol="0" anchor="t"/>
+          <a:lstStyle/>
+          <a:p>
+            <a:pPr indent="0" marL="0">
+              <a:buNone/>
+            </a:pPr>
+            <a:r>
+              <a:rPr lang="en-US" sz="1400" b="1" dirty="0">
+                <a:solidFill>
+                  <a:srgbClr val="1D2B33"/>
+                </a:solidFill>
+              </a:rPr>
+              <a:t>숙박·여행</a:t>
+            </a:r>
+            <a:endParaRPr lang="en-US" sz="1400" dirty="0"/>
+          </a:p>
+          <a:p>
+            <a:pPr indent="0" marL="0">
+              <a:buNone/>
+            </a:pPr>
+            <a:r>
+              <a:rPr lang="en-US" sz="1800" b="1" dirty="0">
+                <a:solidFill>
+                  <a:srgbClr val="D9622B"/>
+                </a:solidFill>
+              </a:rPr>
+              <a:t>-15.5% → -37.9%</a:t>
+            </a:r>
+            <a:endParaRPr lang="en-US" sz="1400" dirty="0"/>
+          </a:p>
+          <a:p>
+            <a:pPr indent="0" marL="0">
+              <a:buNone/>
+            </a:pPr>
+            <a:r>
+              <a:rPr lang="en-US" sz="1300" dirty="0">
+                <a:solidFill>
+                  <a:srgbClr val="1D2B33"/>
+                </a:solidFill>
+              </a:rPr>
+              <a:t>비 온 뒤에도 손실이 커짐</a:t>
+            </a:r>
+            <a:endParaRPr lang="en-US" sz="1400" dirty="0"/>
+          </a:p>
+        </p:txBody>
+      </p:sp>
+      <p:sp>
+        <p:nvSpPr>
+          <p:cNvPr id="9" name="recovery card 3"/>
+          <p:cNvSpPr/>
+          <p:nvPr/>
+        </p:nvSpPr>
+        <p:spPr>
+          <a:xfrm>
+            <a:off x="8229600" y="4251960"/>
+            <a:ext cx="3429000" cy="1097280"/>
+          </a:xfrm>
+          <a:prstGeom prst="roundRect">
+            <a:avLst>
+              <a:gd name="adj" fmla="val 8333"/>
+            </a:avLst>
+          </a:prstGeom>
+          <a:solidFill>
+            <a:srgbClr val="F3F6F8"/>
+          </a:solidFill>
+          <a:ln w="12700">
+            <a:solidFill>
+              <a:srgbClr val="F3F6F8"/>
+            </a:solidFill>
+            <a:prstDash val="solid"/>
+          </a:ln>
+        </p:spPr>
+      </p:sp>
+      <p:sp>
+        <p:nvSpPr>
+          <p:cNvPr id="10" name="Text 7"/>
+          <p:cNvSpPr txBox="1"/>
+          <p:nvPr/>
+        </p:nvSpPr>
+        <p:spPr>
+          <a:xfrm>
+            <a:off x="8412480" y="4315968"/>
+            <a:ext cx="3108960" cy="987552"/>
+          </a:xfrm>
+          <a:prstGeom prst="rect">
+            <a:avLst/>
+          </a:prstGeom>
+          <a:noFill/>
+          <a:ln/>
+        </p:spPr>
+        <p:txBody>
+          <a:bodyPr wrap="square" lIns="0" tIns="0" rIns="0" bIns="0" rtlCol="0" anchor="t"/>
+          <a:lstStyle/>
+          <a:p>
+            <a:pPr indent="0" marL="0">
+              <a:buNone/>
+            </a:pPr>
+            <a:r>
+              <a:rPr lang="en-US" sz="1400" b="1" dirty="0">
+                <a:solidFill>
+                  <a:srgbClr val="1D2B33"/>
+                </a:solidFill>
+              </a:rPr>
+              <a:t>생활소매</a:t>
+            </a:r>
+            <a:endParaRPr lang="en-US" sz="1400" dirty="0"/>
+          </a:p>
+          <a:p>
+            <a:pPr indent="0" marL="0">
+              <a:buNone/>
+            </a:pPr>
+            <a:r>
+              <a:rPr lang="en-US" sz="1800" b="1" dirty="0">
+                <a:solidFill>
+                  <a:srgbClr val="2F6FA8"/>
+                </a:solidFill>
+              </a:rPr>
+              <a:t>-4.8% → -0.5%</a:t>
+            </a:r>
+            <a:endParaRPr lang="en-US" sz="1400" dirty="0"/>
+          </a:p>
+          <a:p>
+            <a:pPr indent="0" marL="0">
+              <a:buNone/>
+            </a:pPr>
+            <a:r>
+              <a:rPr lang="en-US" sz="1300" dirty="0">
+                <a:solidFill>
+                  <a:srgbClr val="1D2B33"/>
+                </a:solidFill>
+              </a:rPr>
+              <a:t>1~3일 안에 반등해 손실을 메움</a:t>
+            </a:r>
+            <a:endParaRPr lang="en-US" sz="1400" dirty="0"/>
+          </a:p>
+        </p:txBody>
+      </p:sp>
+      <p:sp>
+        <p:nvSpPr>
+          <p:cNvPr id="11" name="footnote"/>
+          <p:cNvSpPr txBox="1"/>
+          <p:nvPr/>
+        </p:nvSpPr>
+        <p:spPr>
+          <a:xfrm>
+            <a:off x="8229600" y="5669280"/>
+            <a:ext cx="3474720" cy="594360"/>
+          </a:xfrm>
+          <a:prstGeom prst="rect">
+            <a:avLst/>
+          </a:prstGeom>
+          <a:noFill/>
+          <a:ln/>
+        </p:spPr>
+        <p:txBody>
+          <a:bodyPr wrap="square" lIns="0" tIns="0" rIns="0" bIns="0" rtlCol="0" anchor="b"/>
+          <a:lstStyle/>
+          <a:p>
+            <a:pPr indent="0" marL="0">
+              <a:buNone/>
+            </a:pPr>
+            <a:r>
+              <a:rPr lang="en-US" sz="1000" dirty="0">
+                <a:solidFill>
+                  <a:srgbClr val="6B7780"/>
+                </a:solidFill>
+              </a:rPr>
+              <a:t>누적 95% 구간: 레저 -55%~-12%, 숙박 -56%~-12%</a:t>
+            </a:r>
+            <a:endParaRPr lang="en-US" sz="1000" dirty="0"/>
+          </a:p>
+          <a:p>
+            <a:pPr indent="0" marL="0">
+              <a:buNone/>
+            </a:pPr>
+            <a:r>
+              <a:rPr lang="en-US" sz="1000" dirty="0">
+                <a:solidFill>
+                  <a:srgbClr val="6B7780"/>
+                </a:solidFill>
+              </a:rPr>
+              <a:t>생활소매 1~3일 뒤 반등 p = 0.04</a:t>
+            </a:r>
+            <a:endParaRPr lang="en-US" sz="1000" dirty="0"/>
+          </a:p>
+        </p:txBody>
+      </p:sp>
+      <p:sp>
+        <p:nvSpPr>
+          <p:cNvPr id="25" name="Slide Number Placeholder 0"/>
+          <p:cNvSpPr>
+            <a:spLocks noGrp="1"/>
+          </p:cNvSpPr>
+          <p:nvPr>
+            <p:ph type="sldNum" sz="quarter" idx="4294967295"/>
+          </p:nvPr>
+        </p:nvSpPr>
+        <p:spPr>
+          <a:xfrm>
+            <a:off x="11247120" y="6355080"/>
+            <a:ext cx="457200" cy="274320"/>
+          </a:xfrm>
+          <a:prstGeom prst="rect">
+            <a:avLst/>
+          </a:prstGeom>
+          <a:extLst>
+            <a:ext uri="{C572A759-6A51-4108-AA02-DFA0A04FC94B}">
+              <ma14:wrappingTextBoxFlag xmlns:ma14="http://schemas.microsoft.com/office/mac/drawingml/2011/main" val="0"/>
+            </a:ext>
+          </a:extLst>
+        </p:spPr>
+        <p:txBody>
+          <a:bodyPr/>
+          <a:lstStyle>
+            <a:lvl1pPr>
+              <a:defRPr sz="1000">
+                <a:solidFill>
+                  <a:srgbClr val="6B7780"/>
+                </a:solidFill>
+              </a:defRPr>
+            </a:lvl1pPr>
+          </a:lstStyle>
+          <a:p>
+            <a:pPr algn="r"/>
+            <a:fld id="{F7021451-1387-4CA6-816F-3879F97B5CBC}" type="slidenum">
+              <a:rPr b="0" lang="en-US"/>
+              <a:t>2</a:t>
+            </a:fld>
+            <a:endParaRPr lang="en-US"/>
+          </a:p>
+        </p:txBody>
+      </p:sp>
+    </p:spTree>
+  </p:cSld>
+  <p:clrMapOvr>
+    <a:masterClrMapping/>
+  </p:clrMapOvr>
+</p:sld>
+</file>
+
+<file path=ppt/slides/slide3.xml><?xml version="1.0" encoding="utf-8"?>
+<p:sld xmlns:a="http://schemas.openxmlformats.org/drawingml/2006/main" xmlns:r="http://schemas.openxmlformats.org/officeDocument/2006/relationships" xmlns:p="http://schemas.openxmlformats.org/presentationml/2006/main">
+  <p:cSld name="Slide 3">
+    <p:spTree>
+      <p:nvGrpSpPr>
+        <p:cNvPr id="1" name=""/>
+        <p:cNvGrpSpPr/>
+        <p:nvPr/>
+      </p:nvGrpSpPr>
+      <p:grpSpPr>
+        <a:xfrm>
+          <a:off x="0" y="0"/>
+          <a:ext cx="0" cy="0"/>
+          <a:chOff x="0" y="0"/>
+          <a:chExt cx="0" cy="0"/>
+        </a:xfrm>
+      </p:grpSpPr>
+      <p:sp>
+        <p:nvSpPr>
+          <p:cNvPr id="2" name="Text 1"/>
+          <p:cNvSpPr/>
+          <p:nvPr>
+            <p:ph idx="101" type="title" hasCustomPrompt="1"/>
+          </p:nvPr>
+        </p:nvSpPr>
+        <p:spPr>
+          <a:xfrm>
+            <a:off x="548640" y="640080"/>
+            <a:ext cx="11064240" cy="822960"/>
+          </a:xfrm>
+          <a:prstGeom prst="rect">
+            <a:avLst/>
+          </a:prstGeom>
+          <a:noFill/>
+          <a:ln/>
+        </p:spPr>
+        <p:txBody>
+          <a:bodyPr wrap="square" lIns="0" tIns="0" rIns="0" bIns="0" rtlCol="0" anchor="t"/>
+          <a:lstStyle/>
+          <a:p>
+            <a:pPr algn="l" indent="0" marL="0">
+              <a:buNone/>
+            </a:pPr>
+            <a:r>
+              <a:rPr lang="en-US" sz="3000" b="1" dirty="0">
+                <a:solidFill>
+                  <a:schemeClr val="tx1"/>
+                </a:solidFill>
+              </a:rPr>
+              <a:t>피해는 외지 관광객 업종에 집중, 비가 오면 실내로 옮겨 간다</a:t>
+            </a:r>
+            <a:endParaRPr lang="en-US" sz="3000" dirty="0"/>
+          </a:p>
+        </p:txBody>
+      </p:sp>
+      <p:sp>
+        <p:nvSpPr>
+          <p:cNvPr id="3" name="chart caption"/>
+          <p:cNvSpPr txBox="1"/>
+          <p:nvPr/>
+        </p:nvSpPr>
+        <p:spPr>
+          <a:xfrm>
+            <a:off x="548640" y="1600200"/>
+            <a:ext cx="7223760" cy="320040"/>
+          </a:xfrm>
+          <a:prstGeom prst="rect">
+            <a:avLst/>
+          </a:prstGeom>
+          <a:noFill/>
+          <a:ln/>
+        </p:spPr>
+        <p:txBody>
+          <a:bodyPr wrap="square" lIns="0" tIns="0" rIns="0" bIns="0" rtlCol="0" anchor="ctr"/>
+          <a:lstStyle/>
+          <a:p>
+            <a:pPr indent="0" marL="0">
+              <a:buNone/>
+            </a:pPr>
+            <a:r>
+              <a:rPr lang="en-US" sz="1300" b="1" dirty="0">
+                <a:solidFill>
+                  <a:srgbClr val="1D2B33"/>
+                </a:solidFill>
+              </a:rPr>
+              <a:t>레저·숙박 세부 업종별 비 10mm+ 날 매출 변화</a:t>
+            </a:r>
+            <a:endParaRPr lang="en-US" sz="1300" dirty="0"/>
+          </a:p>
+        </p:txBody>
+      </p:sp>
+      <p:graphicFrame>
+        <p:nvGraphicFramePr>
+          <p:cNvPr id="4" name="subindustry chart" descr=""/>
+          <p:cNvGraphicFramePr/>
+          <p:nvPr/>
+        </p:nvGraphicFramePr>
+        <p:xfrm>
+          <a:off x="457200" y="1920240"/>
+          <a:ext cx="7315200" cy="4297680"/>
+        </p:xfrm>
+        <a:graphic xmlns:a="http://schemas.openxmlformats.org/drawingml/2006/main">
+          <a:graphicData uri="http://schemas.openxmlformats.org/drawingml/2006/chart">
+            <c:chart xmlns:c="http://schemas.openxmlformats.org/drawingml/2006/chart" r:id="rId1"/>
+          </a:graphicData>
+        </a:graphic>
+      </p:graphicFrame>
+      <p:sp>
+        <p:nvSpPr>
+          <p:cNvPr id="5" name="key 1"/>
+          <p:cNvSpPr/>
+          <p:nvPr/>
+        </p:nvSpPr>
+        <p:spPr>
+          <a:xfrm>
+            <a:off x="8229600" y="1691640"/>
+            <a:ext cx="256032" cy="256032"/>
+          </a:xfrm>
+          <a:prstGeom prst="roundRect">
+            <a:avLst>
+              <a:gd name="adj" fmla="val 17857"/>
+            </a:avLst>
+          </a:prstGeom>
+          <a:solidFill>
+            <a:srgbClr val="D9622B"/>
+          </a:solidFill>
+          <a:ln w="12700">
+            <a:solidFill>
+              <a:srgbClr val="D9622B"/>
+            </a:solidFill>
+            <a:prstDash val="solid"/>
+          </a:ln>
+        </p:spPr>
+      </p:sp>
+      <p:sp>
+        <p:nvSpPr>
+          <p:cNvPr id="6" name="Text 3"/>
+          <p:cNvSpPr txBox="1"/>
+          <p:nvPr/>
+        </p:nvSpPr>
+        <p:spPr>
+          <a:xfrm>
+            <a:off x="8531352" y="1645920"/>
+            <a:ext cx="868680" cy="347472"/>
+          </a:xfrm>
+          <a:prstGeom prst="rect">
+            <a:avLst/>
+          </a:prstGeom>
+          <a:noFill/>
+          <a:ln/>
+        </p:spPr>
+        <p:txBody>
+          <a:bodyPr wrap="square" lIns="0" tIns="0" rIns="0" bIns="0" rtlCol="0" anchor="ctr"/>
+          <a:lstStyle/>
+          <a:p>
+            <a:pPr indent="0" marL="0">
+              <a:buNone/>
+            </a:pPr>
+            <a:r>
+              <a:rPr lang="en-US" sz="1100" dirty="0">
+                <a:solidFill>
+                  <a:srgbClr val="1D2B33"/>
+                </a:solidFill>
+              </a:rPr>
+              <a:t>뚜렷한 감소</a:t>
+            </a:r>
+            <a:endParaRPr lang="en-US" sz="1100" dirty="0"/>
+          </a:p>
+        </p:txBody>
+      </p:sp>
+      <p:sp>
+        <p:nvSpPr>
+          <p:cNvPr id="7" name="key 2"/>
+          <p:cNvSpPr/>
+          <p:nvPr/>
+        </p:nvSpPr>
+        <p:spPr>
+          <a:xfrm>
+            <a:off x="9390888" y="1691640"/>
+            <a:ext cx="256032" cy="256032"/>
+          </a:xfrm>
+          <a:prstGeom prst="roundRect">
+            <a:avLst>
+              <a:gd name="adj" fmla="val 17857"/>
+            </a:avLst>
+          </a:prstGeom>
+          <a:solidFill>
+            <a:srgbClr val="C5CBD1"/>
+          </a:solidFill>
+          <a:ln w="12700">
+            <a:solidFill>
+              <a:srgbClr val="C5CBD1"/>
+            </a:solidFill>
+            <a:prstDash val="solid"/>
+          </a:ln>
+        </p:spPr>
+      </p:sp>
+      <p:sp>
+        <p:nvSpPr>
+          <p:cNvPr id="8" name="Text 5"/>
+          <p:cNvSpPr txBox="1"/>
+          <p:nvPr/>
+        </p:nvSpPr>
+        <p:spPr>
+          <a:xfrm>
+            <a:off x="9692640" y="1645920"/>
+            <a:ext cx="868680" cy="347472"/>
+          </a:xfrm>
+          <a:prstGeom prst="rect">
+            <a:avLst/>
+          </a:prstGeom>
+          <a:noFill/>
+          <a:ln/>
+        </p:spPr>
+        <p:txBody>
+          <a:bodyPr wrap="square" lIns="0" tIns="0" rIns="0" bIns="0" rtlCol="0" anchor="ctr"/>
+          <a:lstStyle/>
+          <a:p>
+            <a:pPr indent="0" marL="0">
+              <a:buNone/>
+            </a:pPr>
+            <a:r>
+              <a:rPr lang="en-US" sz="1100" dirty="0">
+                <a:solidFill>
+                  <a:srgbClr val="1D2B33"/>
+                </a:solidFill>
+              </a:rPr>
+              <a:t>차이 불확실</a:t>
+            </a:r>
+            <a:endParaRPr lang="en-US" sz="1100" dirty="0"/>
+          </a:p>
+        </p:txBody>
+      </p:sp>
+      <p:sp>
+        <p:nvSpPr>
+          <p:cNvPr id="9" name="key 3"/>
+          <p:cNvSpPr/>
+          <p:nvPr/>
+        </p:nvSpPr>
+        <p:spPr>
+          <a:xfrm>
+            <a:off x="10552176" y="1691640"/>
+            <a:ext cx="256032" cy="256032"/>
+          </a:xfrm>
+          <a:prstGeom prst="roundRect">
+            <a:avLst>
+              <a:gd name="adj" fmla="val 17857"/>
+            </a:avLst>
+          </a:prstGeom>
+          <a:solidFill>
+            <a:srgbClr val="2F6FA8"/>
+          </a:solidFill>
+          <a:ln w="12700">
+            <a:solidFill>
+              <a:srgbClr val="2F6FA8"/>
+            </a:solidFill>
+            <a:prstDash val="solid"/>
+          </a:ln>
+        </p:spPr>
+      </p:sp>
+      <p:sp>
+        <p:nvSpPr>
+          <p:cNvPr id="10" name="Text 7"/>
+          <p:cNvSpPr txBox="1"/>
+          <p:nvPr/>
+        </p:nvSpPr>
+        <p:spPr>
+          <a:xfrm>
+            <a:off x="10853928" y="1645920"/>
+            <a:ext cx="868680" cy="347472"/>
+          </a:xfrm>
+          <a:prstGeom prst="rect">
+            <a:avLst/>
+          </a:prstGeom>
+          <a:noFill/>
+          <a:ln/>
+        </p:spPr>
+        <p:txBody>
+          <a:bodyPr wrap="square" lIns="0" tIns="0" rIns="0" bIns="0" rtlCol="0" anchor="ctr"/>
+          <a:lstStyle/>
+          <a:p>
+            <a:pPr indent="0" marL="0">
+              <a:buNone/>
+            </a:pPr>
+            <a:r>
+              <a:rPr lang="en-US" sz="1100" dirty="0">
+                <a:solidFill>
+                  <a:srgbClr val="1D2B33"/>
+                </a:solidFill>
+              </a:rPr>
+              <a:t>뚜렷한 증가</a:t>
+            </a:r>
+            <a:endParaRPr lang="en-US" sz="1100" dirty="0"/>
+          </a:p>
+        </p:txBody>
+      </p:sp>
+      <p:sp>
+        <p:nvSpPr>
+          <p:cNvPr id="11" name="sub card 1"/>
+          <p:cNvSpPr/>
+          <p:nvPr/>
+        </p:nvSpPr>
+        <p:spPr>
+          <a:xfrm>
+            <a:off x="8229600" y="2148840"/>
+            <a:ext cx="3429000" cy="1051560"/>
+          </a:xfrm>
+          <a:prstGeom prst="roundRect">
+            <a:avLst>
+              <a:gd name="adj" fmla="val 8696"/>
+            </a:avLst>
+          </a:prstGeom>
+          <a:solidFill>
+            <a:srgbClr val="F3F6F8"/>
+          </a:solidFill>
+          <a:ln w="12700">
+            <a:solidFill>
+              <a:srgbClr val="F3F6F8"/>
+            </a:solidFill>
+            <a:prstDash val="solid"/>
+          </a:ln>
+        </p:spPr>
+      </p:sp>
+      <p:sp>
+        <p:nvSpPr>
+          <p:cNvPr id="12" name="Text 9"/>
+          <p:cNvSpPr txBox="1"/>
+          <p:nvPr/>
+        </p:nvSpPr>
+        <p:spPr>
+          <a:xfrm>
+            <a:off x="8412480" y="2212848"/>
+            <a:ext cx="3108960" cy="941832"/>
+          </a:xfrm>
+          <a:prstGeom prst="rect">
+            <a:avLst/>
+          </a:prstGeom>
+          <a:noFill/>
+          <a:ln/>
+        </p:spPr>
+        <p:txBody>
+          <a:bodyPr wrap="square" lIns="0" tIns="0" rIns="0" bIns="0" rtlCol="0" anchor="t"/>
+          <a:lstStyle/>
+          <a:p>
+            <a:pPr indent="0" marL="0">
+              <a:buNone/>
+            </a:pPr>
+            <a:r>
+              <a:rPr lang="en-US" sz="1400" b="1" dirty="0">
+                <a:solidFill>
+                  <a:srgbClr val="1D2B33"/>
+                </a:solidFill>
+              </a:rPr>
+              <a:t>골프장 (외지 고객 78%)</a:t>
+            </a:r>
+            <a:endParaRPr lang="en-US" sz="1400" dirty="0"/>
+          </a:p>
+          <a:p>
+            <a:pPr indent="0" marL="0">
+              <a:buNone/>
+            </a:pPr>
+            <a:r>
+              <a:rPr lang="en-US" sz="1800" b="1" dirty="0">
+                <a:solidFill>
+                  <a:srgbClr val="D9622B"/>
+                </a:solidFill>
+              </a:rPr>
+              <a:t>강원 -44% · 외지 -62%</a:t>
+            </a:r>
+            <a:endParaRPr lang="en-US" sz="1400" dirty="0"/>
+          </a:p>
+          <a:p>
+            <a:pPr indent="0" marL="0">
+              <a:buNone/>
+            </a:pPr>
+            <a:r>
+              <a:rPr lang="en-US" sz="1300" dirty="0">
+                <a:solidFill>
+                  <a:srgbClr val="1D2B33"/>
+                </a:solidFill>
+              </a:rPr>
+              <a:t>외지 관광객이 더 크게 취소</a:t>
+            </a:r>
+            <a:endParaRPr lang="en-US" sz="1400" dirty="0"/>
+          </a:p>
+        </p:txBody>
+      </p:sp>
+      <p:sp>
+        <p:nvSpPr>
+          <p:cNvPr id="13" name="sub card 2"/>
+          <p:cNvSpPr/>
+          <p:nvPr/>
+        </p:nvSpPr>
+        <p:spPr>
+          <a:xfrm>
+            <a:off x="8229600" y="3310128"/>
+            <a:ext cx="3429000" cy="1051560"/>
+          </a:xfrm>
+          <a:prstGeom prst="roundRect">
+            <a:avLst>
+              <a:gd name="adj" fmla="val 8696"/>
+            </a:avLst>
+          </a:prstGeom>
+          <a:solidFill>
+            <a:srgbClr val="F3F6F8"/>
+          </a:solidFill>
+          <a:ln w="12700">
+            <a:solidFill>
+              <a:srgbClr val="F3F6F8"/>
+            </a:solidFill>
+            <a:prstDash val="solid"/>
+          </a:ln>
+        </p:spPr>
+      </p:sp>
+      <p:sp>
+        <p:nvSpPr>
+          <p:cNvPr id="14" name="Text 11"/>
+          <p:cNvSpPr txBox="1"/>
+          <p:nvPr/>
+        </p:nvSpPr>
+        <p:spPr>
+          <a:xfrm>
+            <a:off x="8412480" y="3374136"/>
+            <a:ext cx="3108960" cy="941832"/>
+          </a:xfrm>
+          <a:prstGeom prst="rect">
+            <a:avLst/>
+          </a:prstGeom>
+          <a:noFill/>
+          <a:ln/>
+        </p:spPr>
+        <p:txBody>
+          <a:bodyPr wrap="square" lIns="0" tIns="0" rIns="0" bIns="0" rtlCol="0" anchor="t"/>
+          <a:lstStyle/>
+          <a:p>
+            <a:pPr indent="0" marL="0">
+              <a:buNone/>
+            </a:pPr>
+            <a:r>
+              <a:rPr lang="en-US" sz="1400" b="1" dirty="0">
+                <a:solidFill>
+                  <a:srgbClr val="1D2B33"/>
+                </a:solidFill>
+              </a:rPr>
+              <a:t>사우나·목욕탕</a:t>
+            </a:r>
+            <a:endParaRPr lang="en-US" sz="1400" dirty="0"/>
+          </a:p>
+          <a:p>
+            <a:pPr indent="0" marL="0">
+              <a:buNone/>
+            </a:pPr>
+            <a:r>
+              <a:rPr lang="en-US" sz="1800" b="1" dirty="0">
+                <a:solidFill>
+                  <a:srgbClr val="2F6FA8"/>
+                </a:solidFill>
+              </a:rPr>
+              <a:t>강원 +15% · 외지 +47%</a:t>
+            </a:r>
+            <a:endParaRPr lang="en-US" sz="1400" dirty="0"/>
+          </a:p>
+          <a:p>
+            <a:pPr indent="0" marL="0">
+              <a:buNone/>
+            </a:pPr>
+            <a:r>
+              <a:rPr lang="en-US" sz="1300" dirty="0">
+                <a:solidFill>
+                  <a:srgbClr val="1D2B33"/>
+                </a:solidFill>
+              </a:rPr>
+              <a:t>비 오는 날 실내로 이동</a:t>
+            </a:r>
+            <a:endParaRPr lang="en-US" sz="1400" dirty="0"/>
+          </a:p>
+        </p:txBody>
+      </p:sp>
+      <p:sp>
+        <p:nvSpPr>
+          <p:cNvPr id="15" name="sub card 3"/>
+          <p:cNvSpPr/>
+          <p:nvPr/>
+        </p:nvSpPr>
+        <p:spPr>
+          <a:xfrm>
+            <a:off x="8229600" y="4471416"/>
+            <a:ext cx="3429000" cy="1051560"/>
+          </a:xfrm>
+          <a:prstGeom prst="roundRect">
+            <a:avLst>
+              <a:gd name="adj" fmla="val 8696"/>
+            </a:avLst>
+          </a:prstGeom>
+          <a:solidFill>
+            <a:srgbClr val="F3F6F8"/>
+          </a:solidFill>
+          <a:ln w="12700">
+            <a:solidFill>
+              <a:srgbClr val="F3F6F8"/>
+            </a:solidFill>
+            <a:prstDash val="solid"/>
+          </a:ln>
+        </p:spPr>
+      </p:sp>
+      <p:sp>
+        <p:nvSpPr>
+          <p:cNvPr id="16" name="Text 13"/>
+          <p:cNvSpPr txBox="1"/>
+          <p:nvPr/>
+        </p:nvSpPr>
+        <p:spPr>
+          <a:xfrm>
+            <a:off x="8412480" y="4535424"/>
+            <a:ext cx="3108960" cy="941832"/>
+          </a:xfrm>
+          <a:prstGeom prst="rect">
+            <a:avLst/>
+          </a:prstGeom>
+          <a:noFill/>
+          <a:ln/>
+        </p:spPr>
+        <p:txBody>
+          <a:bodyPr wrap="square" lIns="0" tIns="0" rIns="0" bIns="0" rtlCol="0" anchor="t"/>
+          <a:lstStyle/>
+          <a:p>
+            <a:pPr indent="0" marL="0">
+              <a:buNone/>
+            </a:pPr>
+            <a:r>
+              <a:rPr lang="en-US" sz="1400" b="1" dirty="0">
+                <a:solidFill>
+                  <a:srgbClr val="1D2B33"/>
+                </a:solidFill>
+              </a:rPr>
+              <a:t>헬스장·스포츠시설</a:t>
+            </a:r>
+            <a:endParaRPr lang="en-US" sz="1400" dirty="0"/>
+          </a:p>
+          <a:p>
+            <a:pPr indent="0" marL="0">
+              <a:buNone/>
+            </a:pPr>
+            <a:r>
+              <a:rPr lang="en-US" sz="1800" b="1" dirty="0">
+                <a:solidFill>
+                  <a:srgbClr val="6B7780"/>
+                </a:solidFill>
+              </a:rPr>
+              <a:t>외지 고객 10%~32%</a:t>
+            </a:r>
+            <a:endParaRPr lang="en-US" sz="1400" dirty="0"/>
+          </a:p>
+          <a:p>
+            <a:pPr indent="0" marL="0">
+              <a:buNone/>
+            </a:pPr>
+            <a:r>
+              <a:rPr lang="en-US" sz="1300" dirty="0">
+                <a:solidFill>
+                  <a:srgbClr val="1D2B33"/>
+                </a:solidFill>
+              </a:rPr>
+              <a:t>주민 이용 시설은 영향 없음</a:t>
+            </a:r>
+            <a:endParaRPr lang="en-US" sz="1400" dirty="0"/>
+          </a:p>
+        </p:txBody>
+      </p:sp>
+      <p:sp>
+        <p:nvSpPr>
+          <p:cNvPr id="17" name="footnote"/>
+          <p:cNvSpPr txBox="1"/>
+          <p:nvPr/>
+        </p:nvSpPr>
+        <p:spPr>
+          <a:xfrm>
+            <a:off x="8229600" y="5623560"/>
+            <a:ext cx="3474720" cy="640080"/>
+          </a:xfrm>
+          <a:prstGeom prst="rect">
+            <a:avLst/>
+          </a:prstGeom>
+          <a:noFill/>
+          <a:ln/>
+        </p:spPr>
+        <p:txBody>
+          <a:bodyPr wrap="square" lIns="0" tIns="0" rIns="0" bIns="0" rtlCol="0" anchor="b"/>
+          <a:lstStyle/>
+          <a:p>
+            <a:pPr indent="0" marL="0">
+              <a:buNone/>
+            </a:pPr>
+            <a:r>
+              <a:rPr lang="en-US" sz="1000" dirty="0">
+                <a:solidFill>
+                  <a:srgbClr val="6B7780"/>
+                </a:solidFill>
+              </a:rPr>
+              <a:t>사우나 증가는 기온 통제 방식을 바꿔도 +18% (p = 0.001). 강원 = 강원도 거주(춘천 밖 포함). 숙박은 앱 선결제가 빠진 현장 결제 위주</a:t>
+            </a:r>
+            <a:endParaRPr lang="en-US" sz="1000" dirty="0"/>
+          </a:p>
+        </p:txBody>
+      </p:sp>
+      <p:sp>
+        <p:nvSpPr>
+          <p:cNvPr id="25" name="Slide Number Placeholder 0"/>
+          <p:cNvSpPr>
+            <a:spLocks noGrp="1"/>
+          </p:cNvSpPr>
+          <p:nvPr>
+            <p:ph type="sldNum" sz="quarter" idx="4294967295"/>
+          </p:nvPr>
+        </p:nvSpPr>
+        <p:spPr>
+          <a:xfrm>
+            <a:off x="11247120" y="6355080"/>
+            <a:ext cx="457200" cy="274320"/>
+          </a:xfrm>
+          <a:prstGeom prst="rect">
+            <a:avLst/>
+          </a:prstGeom>
+          <a:extLst>
+            <a:ext uri="{C572A759-6A51-4108-AA02-DFA0A04FC94B}">
+              <ma14:wrappingTextBoxFlag xmlns:ma14="http://schemas.microsoft.com/office/mac/drawingml/2011/main" val="0"/>
+            </a:ext>
+          </a:extLst>
+        </p:spPr>
+        <p:txBody>
+          <a:bodyPr/>
+          <a:lstStyle>
+            <a:lvl1pPr>
+              <a:defRPr sz="1000">
+                <a:solidFill>
+                  <a:srgbClr val="6B7780"/>
+                </a:solidFill>
+              </a:defRPr>
+            </a:lvl1pPr>
+          </a:lstStyle>
+          <a:p>
+            <a:pPr algn="r"/>
+            <a:fld id="{F7021451-1387-4CA6-816F-3879F97B5CBC}" type="slidenum">
+              <a:rPr b="0" lang="en-US"/>
+              <a:t>3</a:t>
+            </a:fld>
+            <a:endParaRPr lang="en-US"/>
+          </a:p>
+        </p:txBody>
+      </p:sp>
+    </p:spTree>
+  </p:cSld>
+  <p:clrMapOvr>
+    <a:masterClrMapping/>
+  </p:clrMapOvr>
+</p:sld>
+</file>
+
+<file path=ppt/slides/slide4.xml><?xml version="1.0" encoding="utf-8"?>
+<p:sld xmlns:a="http://schemas.openxmlformats.org/drawingml/2006/main" xmlns:r="http://schemas.openxmlformats.org/officeDocument/2006/relationships" xmlns:p="http://schemas.openxmlformats.org/presentationml/2006/main">
+  <p:cSld name="Slide 4">
+    <p:spTree>
+      <p:nvGrpSpPr>
+        <p:cNvPr id="1" name=""/>
+        <p:cNvGrpSpPr/>
+        <p:nvPr/>
+      </p:nvGrpSpPr>
+      <p:grpSpPr>
+        <a:xfrm>
+          <a:off x="0" y="0"/>
+          <a:ext cx="0" cy="0"/>
+          <a:chOff x="0" y="0"/>
+          <a:chExt cx="0" cy="0"/>
+        </a:xfrm>
+      </p:grpSpPr>
+      <p:sp>
+        <p:nvSpPr>
+          <p:cNvPr id="2" name="Text 1"/>
+          <p:cNvSpPr/>
+          <p:nvPr>
+            <p:ph idx="101" type="title" hasCustomPrompt="1"/>
+          </p:nvPr>
+        </p:nvSpPr>
+        <p:spPr>
+          <a:xfrm>
+            <a:off x="548640" y="640080"/>
+            <a:ext cx="11064240" cy="822960"/>
+          </a:xfrm>
+          <a:prstGeom prst="rect">
+            <a:avLst/>
+          </a:prstGeom>
+          <a:noFill/>
+          <a:ln/>
+        </p:spPr>
+        <p:txBody>
+          <a:bodyPr wrap="square" lIns="0" tIns="0" rIns="0" bIns="0" rtlCol="0" anchor="t"/>
+          <a:lstStyle/>
+          <a:p>
+            <a:pPr algn="l" indent="0" marL="0">
+              <a:buNone/>
+            </a:pPr>
+            <a:r>
+              <a:rPr lang="en-US" sz="3000" b="1" dirty="0">
+                <a:solidFill>
+                  <a:schemeClr val="tx1"/>
+                </a:solidFill>
+              </a:rPr>
+              <a:t>부록 A. 사용 컬럼과 선택 이유</a:t>
+            </a:r>
+            <a:endParaRPr lang="en-US" sz="3000" dirty="0"/>
+          </a:p>
+        </p:txBody>
+      </p:sp>
+      <p:graphicFrame>
+        <p:nvGraphicFramePr>
+          <p:cNvPr id="5" name="column table"/>
           <p:cNvGraphicFramePr>
             <a:graphicFrameLocks noGrp="1"/>
           </p:cNvGraphicFramePr>
@@ -4668,7 +5004,7 @@
                             <a:srgbClr val="1D2B33"/>
                           </a:solidFill>
                         </a:rPr>
-                        <a:t>일강수량 · 최고기온</a:t>
+                        <a:t>일강수량 · 기온</a:t>
                       </a:r>
                       <a:endParaRPr lang="en-US" sz="1300" dirty="0"/>
                     </a:p>
@@ -4784,7 +5120,7 @@
                             <a:srgbClr val="1D2B33"/>
                           </a:solidFill>
                         </a:rPr>
-                        <a:t>비 10mm+ 여부, 폭염 날 통제</a:t>
+                        <a:t>비 10mm+ 여부, 기온 효과 통제</a:t>
                       </a:r>
                       <a:endParaRPr lang="en-US" sz="1300" dirty="0"/>
                     </a:p>
@@ -4966,7 +5302,7 @@
         <p:spPr>
           <a:xfrm>
             <a:off x="8915400" y="1874520"/>
-            <a:ext cx="2606040" cy="1005840"/>
+            <a:ext cx="2606040" cy="1097280"/>
           </a:xfrm>
           <a:prstGeom prst="rect">
             <a:avLst/>
@@ -5077,7 +5413,7 @@
         <p:spPr>
           <a:xfrm>
             <a:off x="8915400" y="3063240"/>
-            <a:ext cx="2606040" cy="1005840"/>
+            <a:ext cx="2606040" cy="1097280"/>
           </a:xfrm>
           <a:prstGeom prst="rect">
             <a:avLst/>
@@ -5112,7 +5448,7 @@
                   <a:srgbClr val="1D2B33"/>
                 </a:solidFill>
               </a:rPr>
-              <a:t>같은 주 · 요일 · 공휴일(추석 연휴) · 폭염</a:t>
+              <a:t>같은 주 · 요일 · 공휴일(추석 연휴) · 폭염. 강건성 확인으로 기온 연속값 통제도 함께</a:t>
             </a:r>
             <a:endParaRPr lang="en-US" sz="1500" dirty="0"/>
           </a:p>
@@ -5188,7 +5524,7 @@
         <p:spPr>
           <a:xfrm>
             <a:off x="8915400" y="4251960"/>
-            <a:ext cx="2606040" cy="1005840"/>
+            <a:ext cx="2606040" cy="1097280"/>
           </a:xfrm>
           <a:prstGeom prst="rect">
             <a:avLst/>
@@ -5268,2413 +5604,9 @@
             <a:pPr algn="r"/>
             <a:fld id="{F7021451-1387-4CA6-816F-3879F97B5CBC}" type="slidenum">
               <a:rPr b="0" lang="en-US"/>
-              <a:t>2</a:t>
-            </a:fld>
-            <a:endParaRPr lang="en-US"/>
-          </a:p>
-        </p:txBody>
-      </p:sp>
-    </p:spTree>
-  </p:cSld>
-  <p:clrMapOvr>
-    <a:masterClrMapping/>
-  </p:clrMapOvr>
-</p:sld>
-</file>
-
-<file path=ppt/slides/slide3.xml><?xml version="1.0" encoding="utf-8"?>
-<p:sld xmlns:a="http://schemas.openxmlformats.org/drawingml/2006/main" xmlns:r="http://schemas.openxmlformats.org/officeDocument/2006/relationships" xmlns:p="http://schemas.openxmlformats.org/presentationml/2006/main">
-  <p:cSld name="Slide 3">
-    <p:spTree>
-      <p:nvGrpSpPr>
-        <p:cNvPr id="1" name=""/>
-        <p:cNvGrpSpPr/>
-        <p:nvPr/>
-      </p:nvGrpSpPr>
-      <p:grpSpPr>
-        <a:xfrm>
-          <a:off x="0" y="0"/>
-          <a:ext cx="0" cy="0"/>
-          <a:chOff x="0" y="0"/>
-          <a:chExt cx="0" cy="0"/>
-        </a:xfrm>
-      </p:grpSpPr>
-      <p:sp>
-        <p:nvSpPr>
-          <p:cNvPr id="2" name="Text 1"/>
-          <p:cNvSpPr/>
-          <p:nvPr>
-            <p:ph idx="101" type="title" hasCustomPrompt="1"/>
-          </p:nvPr>
-        </p:nvSpPr>
-        <p:spPr>
-          <a:xfrm>
-            <a:off x="548640" y="640080"/>
-            <a:ext cx="11064240" cy="822960"/>
-          </a:xfrm>
-          <a:prstGeom prst="rect">
-            <a:avLst/>
-          </a:prstGeom>
-          <a:noFill/>
-          <a:ln/>
-        </p:spPr>
-        <p:txBody>
-          <a:bodyPr wrap="square" lIns="0" tIns="0" rIns="0" bIns="0" rtlCol="0" anchor="t"/>
-          <a:lstStyle/>
-          <a:p>
-            <a:pPr algn="l" indent="0" marL="0">
-              <a:buNone/>
-            </a:pPr>
-            <a:r>
-              <a:rPr lang="en-US" sz="3000" b="1" dirty="0">
-                <a:solidFill>
-                  <a:schemeClr val="tx1"/>
-                </a:solidFill>
-              </a:rPr>
-              <a:t>비 오는 날 야외·레저 매출 40% 감소, 업종 중 최대</a:t>
-            </a:r>
-            <a:endParaRPr lang="en-US" sz="3000" dirty="0"/>
-          </a:p>
-        </p:txBody>
-      </p:sp>
-      <p:sp>
-        <p:nvSpPr>
-          <p:cNvPr id="3" name="chart caption"/>
-          <p:cNvSpPr txBox="1"/>
-          <p:nvPr/>
-        </p:nvSpPr>
-        <p:spPr>
-          <a:xfrm>
-            <a:off x="548640" y="1600200"/>
-            <a:ext cx="7223760" cy="320040"/>
-          </a:xfrm>
-          <a:prstGeom prst="rect">
-            <a:avLst/>
-          </a:prstGeom>
-          <a:noFill/>
-          <a:ln/>
-        </p:spPr>
-        <p:txBody>
-          <a:bodyPr wrap="square" lIns="0" tIns="0" rIns="0" bIns="0" rtlCol="0" anchor="ctr"/>
-          <a:lstStyle/>
-          <a:p>
-            <a:pPr indent="0" marL="0">
-              <a:buNone/>
-            </a:pPr>
-            <a:r>
-              <a:rPr lang="en-US" sz="1300" b="1" dirty="0">
-                <a:solidFill>
-                  <a:srgbClr val="1D2B33"/>
-                </a:solidFill>
-              </a:rPr>
-              <a:t>업종군별 비 10mm+ 날 매출 변화 (비 안 온 날 대비)</a:t>
-            </a:r>
-            <a:endParaRPr lang="en-US" sz="1300" dirty="0"/>
-          </a:p>
-        </p:txBody>
-      </p:sp>
-      <p:graphicFrame>
-        <p:nvGraphicFramePr>
-          <p:cNvPr id="4" name="group rain chart" descr=""/>
-          <p:cNvGraphicFramePr/>
-          <p:nvPr/>
-        </p:nvGraphicFramePr>
-        <p:xfrm>
-          <a:off x="457200" y="1920240"/>
-          <a:ext cx="7315200" cy="4297680"/>
-        </p:xfrm>
-        <a:graphic xmlns:a="http://schemas.openxmlformats.org/drawingml/2006/main">
-          <a:graphicData uri="http://schemas.openxmlformats.org/drawingml/2006/chart">
-            <c:chart xmlns:c="http://schemas.openxmlformats.org/drawingml/2006/chart" r:id="rId1"/>
-          </a:graphicData>
-        </a:graphic>
-      </p:graphicFrame>
-      <p:sp>
-        <p:nvSpPr>
-          <p:cNvPr id="5" name="Text 2"/>
-          <p:cNvSpPr txBox="1"/>
-          <p:nvPr/>
-        </p:nvSpPr>
-        <p:spPr>
-          <a:xfrm>
-            <a:off x="8229600" y="1783080"/>
-            <a:ext cx="3383280" cy="1005840"/>
-          </a:xfrm>
-          <a:prstGeom prst="rect">
-            <a:avLst/>
-          </a:prstGeom>
-          <a:noFill/>
-          <a:ln/>
-        </p:spPr>
-        <p:txBody>
-          <a:bodyPr wrap="square" lIns="0" tIns="0" rIns="0" bIns="0" rtlCol="0" anchor="ctr"/>
-          <a:lstStyle/>
-          <a:p>
-            <a:pPr indent="0" marL="0">
-              <a:buNone/>
-            </a:pPr>
-            <a:r>
-              <a:rPr lang="en-US" sz="6400" b="1" dirty="0">
-                <a:solidFill>
-                  <a:srgbClr val="D9622B"/>
-                </a:solidFill>
-              </a:rPr>
-              <a:t>-40%</a:t>
-            </a:r>
-            <a:endParaRPr lang="en-US" sz="6400" dirty="0"/>
-          </a:p>
-        </p:txBody>
-      </p:sp>
-      <p:sp>
-        <p:nvSpPr>
-          <p:cNvPr id="6" name="Text 3"/>
-          <p:cNvSpPr txBox="1"/>
-          <p:nvPr/>
-        </p:nvSpPr>
-        <p:spPr>
-          <a:xfrm>
-            <a:off x="8229600" y="2788920"/>
-            <a:ext cx="3429000" cy="868680"/>
-          </a:xfrm>
-          <a:prstGeom prst="rect">
-            <a:avLst/>
-          </a:prstGeom>
-          <a:noFill/>
-          <a:ln/>
-        </p:spPr>
-        <p:txBody>
-          <a:bodyPr wrap="square" lIns="0" tIns="0" rIns="0" bIns="0" rtlCol="0" anchor="ctr"/>
-          <a:lstStyle/>
-          <a:p>
-            <a:pPr indent="0" marL="0">
-              <a:buNone/>
-            </a:pPr>
-            <a:r>
-              <a:rPr lang="en-US" sz="1400" b="1" dirty="0">
-                <a:solidFill>
-                  <a:srgbClr val="1D2B33"/>
-                </a:solidFill>
-              </a:rPr>
-              <a:t>야외·레저</a:t>
-            </a:r>
-            <a:endParaRPr lang="en-US" sz="1400" dirty="0"/>
-          </a:p>
-          <a:p>
-            <a:pPr indent="0" marL="0">
-              <a:buNone/>
-            </a:pPr>
-            <a:r>
-              <a:rPr lang="en-US" sz="1400" dirty="0">
-                <a:solidFill>
-                  <a:srgbClr val="1D2B33"/>
-                </a:solidFill>
-              </a:rPr>
-              <a:t>비 10mm+ 날 매출 변화</a:t>
-            </a:r>
-            <a:endParaRPr lang="en-US" sz="1400" dirty="0"/>
-          </a:p>
-          <a:p>
-            <a:pPr indent="0" marL="0">
-              <a:buNone/>
-            </a:pPr>
-            <a:r>
-              <a:rPr lang="en-US" sz="1200" dirty="0">
-                <a:solidFill>
-                  <a:srgbClr val="6B7780"/>
-                </a:solidFill>
-              </a:rPr>
-              <a:t>95% 구간 -47% ~ -33%</a:t>
-            </a:r>
-            <a:endParaRPr lang="en-US" sz="1400" dirty="0"/>
-          </a:p>
-        </p:txBody>
-      </p:sp>
-      <p:sp>
-        <p:nvSpPr>
-          <p:cNvPr id="7" name="Text 4"/>
-          <p:cNvSpPr txBox="1"/>
-          <p:nvPr/>
-        </p:nvSpPr>
-        <p:spPr>
-          <a:xfrm>
-            <a:off x="8229600" y="3794760"/>
-            <a:ext cx="3429000" cy="2194560"/>
-          </a:xfrm>
-          <a:prstGeom prst="rect">
-            <a:avLst/>
-          </a:prstGeom>
-          <a:noFill/>
-          <a:ln/>
-        </p:spPr>
-        <p:txBody>
-          <a:bodyPr wrap="square" lIns="0" tIns="0" rIns="0" bIns="0" rtlCol="0" anchor="t"/>
-          <a:lstStyle/>
-          <a:p>
-            <a:pPr marL="342900" indent="-342900">
-              <a:spcAft>
-                <a:spcPts val="800"/>
-              </a:spcAft>
-              <a:buSzPct val="100000"/>
-              <a:buChar char="•"/>
-            </a:pPr>
-            <a:r>
-              <a:rPr lang="en-US" sz="1400" dirty="0">
-                <a:solidFill>
-                  <a:srgbClr val="1D2B33"/>
-                </a:solidFill>
-              </a:rPr>
-              <a:t>매출 절반을 차지하는 외식·생활소매보다 6~8배 큰 감소</a:t>
-            </a:r>
-            <a:endParaRPr lang="en-US" sz="1400" dirty="0"/>
-          </a:p>
-          <a:p>
-            <a:pPr marL="342900" indent="-342900">
-              <a:spcAft>
-                <a:spcPts val="800"/>
-              </a:spcAft>
-              <a:buSzPct val="100000"/>
-              <a:buChar char="•"/>
-            </a:pPr>
-            <a:r>
-              <a:rPr lang="en-US" sz="1400" dirty="0">
-                <a:solidFill>
-                  <a:srgbClr val="1D2B33"/>
-                </a:solidFill>
-              </a:rPr>
-              <a:t>숙박·여행 -12%은 당일만 보면 불확실하지만, 비 온 뒤 며칠에 걸쳐 손실이 드러남 (다음 장)</a:t>
-            </a:r>
-            <a:endParaRPr lang="en-US" sz="1400" dirty="0"/>
-          </a:p>
-        </p:txBody>
-      </p:sp>
-      <p:sp>
-        <p:nvSpPr>
-          <p:cNvPr id="25" name="Slide Number Placeholder 0"/>
-          <p:cNvSpPr>
-            <a:spLocks noGrp="1"/>
-          </p:cNvSpPr>
-          <p:nvPr>
-            <p:ph type="sldNum" sz="quarter" idx="4294967295"/>
-          </p:nvPr>
-        </p:nvSpPr>
-        <p:spPr>
-          <a:xfrm>
-            <a:off x="11247120" y="6355080"/>
-            <a:ext cx="457200" cy="274320"/>
-          </a:xfrm>
-          <a:prstGeom prst="rect">
-            <a:avLst/>
-          </a:prstGeom>
-          <a:extLst>
-            <a:ext uri="{C572A759-6A51-4108-AA02-DFA0A04FC94B}">
-              <ma14:wrappingTextBoxFlag xmlns:ma14="http://schemas.microsoft.com/office/mac/drawingml/2011/main" val="0"/>
-            </a:ext>
-          </a:extLst>
-        </p:spPr>
-        <p:txBody>
-          <a:bodyPr/>
-          <a:lstStyle>
-            <a:lvl1pPr>
-              <a:defRPr sz="1000">
-                <a:solidFill>
-                  <a:srgbClr val="6B7780"/>
-                </a:solidFill>
-              </a:defRPr>
-            </a:lvl1pPr>
-          </a:lstStyle>
-          <a:p>
-            <a:pPr algn="r"/>
-            <a:fld id="{F7021451-1387-4CA6-816F-3879F97B5CBC}" type="slidenum">
-              <a:rPr b="0" lang="en-US"/>
-              <a:t>3</a:t>
-            </a:fld>
-            <a:endParaRPr lang="en-US"/>
-          </a:p>
-        </p:txBody>
-      </p:sp>
-    </p:spTree>
-  </p:cSld>
-  <p:clrMapOvr>
-    <a:masterClrMapping/>
-  </p:clrMapOvr>
-</p:sld>
-</file>
-
-<file path=ppt/slides/slide4.xml><?xml version="1.0" encoding="utf-8"?>
-<p:sld xmlns:a="http://schemas.openxmlformats.org/drawingml/2006/main" xmlns:r="http://schemas.openxmlformats.org/officeDocument/2006/relationships" xmlns:p="http://schemas.openxmlformats.org/presentationml/2006/main">
-  <p:cSld name="Slide 4">
-    <p:spTree>
-      <p:nvGrpSpPr>
-        <p:cNvPr id="1" name=""/>
-        <p:cNvGrpSpPr/>
-        <p:nvPr/>
-      </p:nvGrpSpPr>
-      <p:grpSpPr>
-        <a:xfrm>
-          <a:off x="0" y="0"/>
-          <a:ext cx="0" cy="0"/>
-          <a:chOff x="0" y="0"/>
-          <a:chExt cx="0" cy="0"/>
-        </a:xfrm>
-      </p:grpSpPr>
-      <p:sp>
-        <p:nvSpPr>
-          <p:cNvPr id="2" name="Text 1"/>
-          <p:cNvSpPr/>
-          <p:nvPr>
-            <p:ph idx="101" type="title" hasCustomPrompt="1"/>
-          </p:nvPr>
-        </p:nvSpPr>
-        <p:spPr>
-          <a:xfrm>
-            <a:off x="548640" y="640080"/>
-            <a:ext cx="11064240" cy="822960"/>
-          </a:xfrm>
-          <a:prstGeom prst="rect">
-            <a:avLst/>
-          </a:prstGeom>
-          <a:noFill/>
-          <a:ln/>
-        </p:spPr>
-        <p:txBody>
-          <a:bodyPr wrap="square" lIns="0" tIns="0" rIns="0" bIns="0" rtlCol="0" anchor="t"/>
-          <a:lstStyle/>
-          <a:p>
-            <a:pPr algn="l" indent="0" marL="0">
-              <a:buNone/>
-            </a:pPr>
-            <a:r>
-              <a:rPr lang="en-US" sz="3000" b="1" dirty="0">
-                <a:solidFill>
-                  <a:schemeClr val="tx1"/>
-                </a:solidFill>
-              </a:rPr>
-              <a:t>레저는 당일에, 숙박은 며칠에 걸쳐 무너지고 회복하지 못한다</a:t>
-            </a:r>
-            <a:endParaRPr lang="en-US" sz="3000" dirty="0"/>
-          </a:p>
-        </p:txBody>
-      </p:sp>
-      <p:sp>
-        <p:nvSpPr>
-          <p:cNvPr id="3" name="chart caption"/>
-          <p:cNvSpPr txBox="1"/>
-          <p:nvPr/>
-        </p:nvSpPr>
-        <p:spPr>
-          <a:xfrm>
-            <a:off x="548640" y="1600200"/>
-            <a:ext cx="7223760" cy="320040"/>
-          </a:xfrm>
-          <a:prstGeom prst="rect">
-            <a:avLst/>
-          </a:prstGeom>
-          <a:noFill/>
-          <a:ln/>
-        </p:spPr>
-        <p:txBody>
-          <a:bodyPr wrap="square" lIns="0" tIns="0" rIns="0" bIns="0" rtlCol="0" anchor="ctr"/>
-          <a:lstStyle/>
-          <a:p>
-            <a:pPr indent="0" marL="0">
-              <a:buNone/>
-            </a:pPr>
-            <a:r>
-              <a:rPr lang="en-US" sz="1300" b="1" dirty="0">
-                <a:solidFill>
-                  <a:srgbClr val="1D2B33"/>
-                </a:solidFill>
-              </a:rPr>
-              <a:t>비 10mm+ 날 매출 변화: 당일 vs 3일 뒤까지 누적</a:t>
-            </a:r>
-            <a:endParaRPr lang="en-US" sz="1300" dirty="0"/>
-          </a:p>
-        </p:txBody>
-      </p:sp>
-      <p:graphicFrame>
-        <p:nvGraphicFramePr>
-          <p:cNvPr id="4" name="recovery chart" descr=""/>
-          <p:cNvGraphicFramePr/>
-          <p:nvPr/>
-        </p:nvGraphicFramePr>
-        <p:xfrm>
-          <a:off x="457200" y="1920240"/>
-          <a:ext cx="7315200" cy="4297680"/>
-        </p:xfrm>
-        <a:graphic xmlns:a="http://schemas.openxmlformats.org/drawingml/2006/main">
-          <a:graphicData uri="http://schemas.openxmlformats.org/drawingml/2006/chart">
-            <c:chart xmlns:c="http://schemas.openxmlformats.org/drawingml/2006/chart" r:id="rId1"/>
-          </a:graphicData>
-        </a:graphic>
-      </p:graphicFrame>
-      <p:sp>
-        <p:nvSpPr>
-          <p:cNvPr id="5" name="recovery card 1"/>
-          <p:cNvSpPr/>
-          <p:nvPr/>
-        </p:nvSpPr>
-        <p:spPr>
-          <a:xfrm>
-            <a:off x="8229600" y="1783080"/>
-            <a:ext cx="3429000" cy="1143000"/>
-          </a:xfrm>
-          <a:prstGeom prst="roundRect">
-            <a:avLst>
-              <a:gd name="adj" fmla="val 8000"/>
-            </a:avLst>
-          </a:prstGeom>
-          <a:solidFill>
-            <a:srgbClr val="F3F6F8"/>
-          </a:solidFill>
-          <a:ln w="12700">
-            <a:solidFill>
-              <a:srgbClr val="F3F6F8"/>
-            </a:solidFill>
-            <a:prstDash val="solid"/>
-          </a:ln>
-        </p:spPr>
-      </p:sp>
-      <p:sp>
-        <p:nvSpPr>
-          <p:cNvPr id="6" name="Text 3"/>
-          <p:cNvSpPr txBox="1"/>
-          <p:nvPr/>
-        </p:nvSpPr>
-        <p:spPr>
-          <a:xfrm>
-            <a:off x="8412480" y="1856232"/>
-            <a:ext cx="3108960" cy="1005840"/>
-          </a:xfrm>
-          <a:prstGeom prst="rect">
-            <a:avLst/>
-          </a:prstGeom>
-          <a:noFill/>
-          <a:ln/>
-        </p:spPr>
-        <p:txBody>
-          <a:bodyPr wrap="square" lIns="0" tIns="0" rIns="0" bIns="0" rtlCol="0" anchor="t"/>
-          <a:lstStyle/>
-          <a:p>
-            <a:pPr indent="0" marL="0">
-              <a:buNone/>
-            </a:pPr>
-            <a:r>
-              <a:rPr lang="en-US" sz="1400" b="1" dirty="0">
-                <a:solidFill>
-                  <a:srgbClr val="1D2B33"/>
-                </a:solidFill>
-              </a:rPr>
-              <a:t>야외·레저</a:t>
-            </a:r>
-            <a:endParaRPr lang="en-US" sz="1400" dirty="0"/>
-          </a:p>
-          <a:p>
-            <a:pPr indent="0" marL="0">
-              <a:buNone/>
-            </a:pPr>
-            <a:r>
-              <a:rPr lang="en-US" sz="2000" b="1" dirty="0">
-                <a:solidFill>
-                  <a:srgbClr val="D9622B"/>
-                </a:solidFill>
-              </a:rPr>
-              <a:t>-40.4% → -37.2%</a:t>
-            </a:r>
-            <a:endParaRPr lang="en-US" sz="1400" dirty="0"/>
-          </a:p>
-          <a:p>
-            <a:pPr indent="0" marL="0">
-              <a:buNone/>
-            </a:pPr>
-            <a:r>
-              <a:rPr lang="en-US" sz="1300" dirty="0">
-                <a:solidFill>
-                  <a:srgbClr val="1D2B33"/>
-                </a:solidFill>
-              </a:rPr>
-              <a:t>잃은 손님이 돌아오지 않음</a:t>
-            </a:r>
-            <a:endParaRPr lang="en-US" sz="1400" dirty="0"/>
-          </a:p>
-        </p:txBody>
-      </p:sp>
-      <p:sp>
-        <p:nvSpPr>
-          <p:cNvPr id="7" name="recovery card 2"/>
-          <p:cNvSpPr/>
-          <p:nvPr/>
-        </p:nvSpPr>
-        <p:spPr>
-          <a:xfrm>
-            <a:off x="8229600" y="3108960"/>
-            <a:ext cx="3429000" cy="1143000"/>
-          </a:xfrm>
-          <a:prstGeom prst="roundRect">
-            <a:avLst>
-              <a:gd name="adj" fmla="val 8000"/>
-            </a:avLst>
-          </a:prstGeom>
-          <a:solidFill>
-            <a:srgbClr val="F3F6F8"/>
-          </a:solidFill>
-          <a:ln w="12700">
-            <a:solidFill>
-              <a:srgbClr val="F3F6F8"/>
-            </a:solidFill>
-            <a:prstDash val="solid"/>
-          </a:ln>
-        </p:spPr>
-      </p:sp>
-      <p:sp>
-        <p:nvSpPr>
-          <p:cNvPr id="8" name="Text 5"/>
-          <p:cNvSpPr txBox="1"/>
-          <p:nvPr/>
-        </p:nvSpPr>
-        <p:spPr>
-          <a:xfrm>
-            <a:off x="8412480" y="3182112"/>
-            <a:ext cx="3108960" cy="1005840"/>
-          </a:xfrm>
-          <a:prstGeom prst="rect">
-            <a:avLst/>
-          </a:prstGeom>
-          <a:noFill/>
-          <a:ln/>
-        </p:spPr>
-        <p:txBody>
-          <a:bodyPr wrap="square" lIns="0" tIns="0" rIns="0" bIns="0" rtlCol="0" anchor="t"/>
-          <a:lstStyle/>
-          <a:p>
-            <a:pPr indent="0" marL="0">
-              <a:buNone/>
-            </a:pPr>
-            <a:r>
-              <a:rPr lang="en-US" sz="1400" b="1" dirty="0">
-                <a:solidFill>
-                  <a:srgbClr val="1D2B33"/>
-                </a:solidFill>
-              </a:rPr>
-              <a:t>숙박·여행</a:t>
-            </a:r>
-            <a:endParaRPr lang="en-US" sz="1400" dirty="0"/>
-          </a:p>
-          <a:p>
-            <a:pPr indent="0" marL="0">
-              <a:buNone/>
-            </a:pPr>
-            <a:r>
-              <a:rPr lang="en-US" sz="2000" b="1" dirty="0">
-                <a:solidFill>
-                  <a:srgbClr val="D9622B"/>
-                </a:solidFill>
-              </a:rPr>
-              <a:t>-15.5% → -37.9%</a:t>
-            </a:r>
-            <a:endParaRPr lang="en-US" sz="1400" dirty="0"/>
-          </a:p>
-          <a:p>
-            <a:pPr indent="0" marL="0">
-              <a:buNone/>
-            </a:pPr>
-            <a:r>
-              <a:rPr lang="en-US" sz="1300" dirty="0">
-                <a:solidFill>
-                  <a:srgbClr val="1D2B33"/>
-                </a:solidFill>
-              </a:rPr>
-              <a:t>취소가 이어져 손실이 커짐</a:t>
-            </a:r>
-            <a:endParaRPr lang="en-US" sz="1400" dirty="0"/>
-          </a:p>
-        </p:txBody>
-      </p:sp>
-      <p:sp>
-        <p:nvSpPr>
-          <p:cNvPr id="9" name="recovery card 3"/>
-          <p:cNvSpPr/>
-          <p:nvPr/>
-        </p:nvSpPr>
-        <p:spPr>
-          <a:xfrm>
-            <a:off x="8229600" y="4434840"/>
-            <a:ext cx="3429000" cy="1143000"/>
-          </a:xfrm>
-          <a:prstGeom prst="roundRect">
-            <a:avLst>
-              <a:gd name="adj" fmla="val 8000"/>
-            </a:avLst>
-          </a:prstGeom>
-          <a:solidFill>
-            <a:srgbClr val="F3F6F8"/>
-          </a:solidFill>
-          <a:ln w="12700">
-            <a:solidFill>
-              <a:srgbClr val="F3F6F8"/>
-            </a:solidFill>
-            <a:prstDash val="solid"/>
-          </a:ln>
-        </p:spPr>
-      </p:sp>
-      <p:sp>
-        <p:nvSpPr>
-          <p:cNvPr id="10" name="Text 7"/>
-          <p:cNvSpPr txBox="1"/>
-          <p:nvPr/>
-        </p:nvSpPr>
-        <p:spPr>
-          <a:xfrm>
-            <a:off x="8412480" y="4507992"/>
-            <a:ext cx="3108960" cy="1005840"/>
-          </a:xfrm>
-          <a:prstGeom prst="rect">
-            <a:avLst/>
-          </a:prstGeom>
-          <a:noFill/>
-          <a:ln/>
-        </p:spPr>
-        <p:txBody>
-          <a:bodyPr wrap="square" lIns="0" tIns="0" rIns="0" bIns="0" rtlCol="0" anchor="t"/>
-          <a:lstStyle/>
-          <a:p>
-            <a:pPr indent="0" marL="0">
-              <a:buNone/>
-            </a:pPr>
-            <a:r>
-              <a:rPr lang="en-US" sz="1400" b="1" dirty="0">
-                <a:solidFill>
-                  <a:srgbClr val="1D2B33"/>
-                </a:solidFill>
-              </a:rPr>
-              <a:t>생활소매</a:t>
-            </a:r>
-            <a:endParaRPr lang="en-US" sz="1400" dirty="0"/>
-          </a:p>
-          <a:p>
-            <a:pPr indent="0" marL="0">
-              <a:buNone/>
-            </a:pPr>
-            <a:r>
-              <a:rPr lang="en-US" sz="2000" b="1" dirty="0">
-                <a:solidFill>
-                  <a:srgbClr val="2F6FA8"/>
-                </a:solidFill>
-              </a:rPr>
-              <a:t>-4.8% → -0.5%</a:t>
-            </a:r>
-            <a:endParaRPr lang="en-US" sz="1400" dirty="0"/>
-          </a:p>
-          <a:p>
-            <a:pPr indent="0" marL="0">
-              <a:buNone/>
-            </a:pPr>
-            <a:r>
-              <a:rPr lang="en-US" sz="1300" dirty="0">
-                <a:solidFill>
-                  <a:srgbClr val="1D2B33"/>
-                </a:solidFill>
-              </a:rPr>
-              <a:t>다음 날 장보기로 회복</a:t>
-            </a:r>
-            <a:endParaRPr lang="en-US" sz="1400" dirty="0"/>
-          </a:p>
-        </p:txBody>
-      </p:sp>
-      <p:sp>
-        <p:nvSpPr>
-          <p:cNvPr id="11" name="Text 8"/>
-          <p:cNvSpPr txBox="1"/>
-          <p:nvPr/>
-        </p:nvSpPr>
-        <p:spPr>
-          <a:xfrm>
-            <a:off x="8229600" y="5760720"/>
-            <a:ext cx="3474720" cy="457200"/>
-          </a:xfrm>
-          <a:prstGeom prst="rect">
-            <a:avLst/>
-          </a:prstGeom>
-          <a:noFill/>
-          <a:ln/>
-        </p:spPr>
-        <p:txBody>
-          <a:bodyPr wrap="square" lIns="0" tIns="0" rIns="0" bIns="0" rtlCol="0" anchor="ctr"/>
-          <a:lstStyle/>
-          <a:p>
-            <a:pPr indent="0" marL="0">
-              <a:buNone/>
-            </a:pPr>
-            <a:r>
-              <a:rPr lang="en-US" sz="1000" dirty="0">
-                <a:solidFill>
-                  <a:srgbClr val="6B7780"/>
-                </a:solidFill>
-              </a:rPr>
-              <a:t>누적 95% 구간</a:t>
-            </a:r>
-            <a:endParaRPr lang="en-US" sz="1000" dirty="0"/>
-          </a:p>
-          <a:p>
-            <a:pPr indent="0" marL="0">
-              <a:buNone/>
-            </a:pPr>
-            <a:r>
-              <a:rPr lang="en-US" sz="1000" dirty="0">
-                <a:solidFill>
-                  <a:srgbClr val="6B7780"/>
-                </a:solidFill>
-              </a:rPr>
-              <a:t>야외·레저 -55% ~ -12% · 숙박·여행 -56% ~ -12%</a:t>
-            </a:r>
-            <a:endParaRPr lang="en-US" sz="1000" dirty="0"/>
-          </a:p>
-        </p:txBody>
-      </p:sp>
-      <p:sp>
-        <p:nvSpPr>
-          <p:cNvPr id="25" name="Slide Number Placeholder 0"/>
-          <p:cNvSpPr>
-            <a:spLocks noGrp="1"/>
-          </p:cNvSpPr>
-          <p:nvPr>
-            <p:ph type="sldNum" sz="quarter" idx="4294967295"/>
-          </p:nvPr>
-        </p:nvSpPr>
-        <p:spPr>
-          <a:xfrm>
-            <a:off x="11247120" y="6355080"/>
-            <a:ext cx="457200" cy="274320"/>
-          </a:xfrm>
-          <a:prstGeom prst="rect">
-            <a:avLst/>
-          </a:prstGeom>
-          <a:extLst>
-            <a:ext uri="{C572A759-6A51-4108-AA02-DFA0A04FC94B}">
-              <ma14:wrappingTextBoxFlag xmlns:ma14="http://schemas.microsoft.com/office/mac/drawingml/2011/main" val="0"/>
-            </a:ext>
-          </a:extLst>
-        </p:spPr>
-        <p:txBody>
-          <a:bodyPr/>
-          <a:lstStyle>
-            <a:lvl1pPr>
-              <a:defRPr sz="1000">
-                <a:solidFill>
-                  <a:srgbClr val="6B7780"/>
-                </a:solidFill>
-              </a:defRPr>
-            </a:lvl1pPr>
-          </a:lstStyle>
-          <a:p>
-            <a:pPr algn="r"/>
-            <a:fld id="{F7021451-1387-4CA6-816F-3879F97B5CBC}" type="slidenum">
-              <a:rPr b="0" lang="en-US"/>
               <a:t>4</a:t>
             </a:fld>
             <a:endParaRPr lang="en-US"/>
-          </a:p>
-        </p:txBody>
-      </p:sp>
-    </p:spTree>
-  </p:cSld>
-  <p:clrMapOvr>
-    <a:masterClrMapping/>
-  </p:clrMapOvr>
-</p:sld>
-</file>
-
-<file path=ppt/slides/slide5.xml><?xml version="1.0" encoding="utf-8"?>
-<p:sld xmlns:a="http://schemas.openxmlformats.org/drawingml/2006/main" xmlns:r="http://schemas.openxmlformats.org/officeDocument/2006/relationships" xmlns:p="http://schemas.openxmlformats.org/presentationml/2006/main">
-  <p:cSld name="Slide 5">
-    <p:spTree>
-      <p:nvGrpSpPr>
-        <p:cNvPr id="1" name=""/>
-        <p:cNvGrpSpPr/>
-        <p:nvPr/>
-      </p:nvGrpSpPr>
-      <p:grpSpPr>
-        <a:xfrm>
-          <a:off x="0" y="0"/>
-          <a:ext cx="0" cy="0"/>
-          <a:chOff x="0" y="0"/>
-          <a:chExt cx="0" cy="0"/>
-        </a:xfrm>
-      </p:grpSpPr>
-      <p:sp>
-        <p:nvSpPr>
-          <p:cNvPr id="2" name="Text 1"/>
-          <p:cNvSpPr/>
-          <p:nvPr>
-            <p:ph idx="101" type="title" hasCustomPrompt="1"/>
-          </p:nvPr>
-        </p:nvSpPr>
-        <p:spPr>
-          <a:xfrm>
-            <a:off x="548640" y="640080"/>
-            <a:ext cx="11064240" cy="822960"/>
-          </a:xfrm>
-          <a:prstGeom prst="rect">
-            <a:avLst/>
-          </a:prstGeom>
-          <a:noFill/>
-          <a:ln/>
-        </p:spPr>
-        <p:txBody>
-          <a:bodyPr wrap="square" lIns="0" tIns="0" rIns="0" bIns="0" rtlCol="0" anchor="t"/>
-          <a:lstStyle/>
-          <a:p>
-            <a:pPr algn="l" indent="0" marL="0">
-              <a:buNone/>
-            </a:pPr>
-            <a:r>
-              <a:rPr lang="en-US" sz="3000" b="1" dirty="0">
-                <a:solidFill>
-                  <a:schemeClr val="tx1"/>
-                </a:solidFill>
-              </a:rPr>
-              <a:t>피해는 골프장·레저타운·교통에 집중, 사우나는 오히려 늘었다</a:t>
-            </a:r>
-            <a:endParaRPr lang="en-US" sz="3000" dirty="0"/>
-          </a:p>
-        </p:txBody>
-      </p:sp>
-      <p:sp>
-        <p:nvSpPr>
-          <p:cNvPr id="3" name="chart caption"/>
-          <p:cNvSpPr txBox="1"/>
-          <p:nvPr/>
-        </p:nvSpPr>
-        <p:spPr>
-          <a:xfrm>
-            <a:off x="548640" y="1600200"/>
-            <a:ext cx="7223760" cy="320040"/>
-          </a:xfrm>
-          <a:prstGeom prst="rect">
-            <a:avLst/>
-          </a:prstGeom>
-          <a:noFill/>
-          <a:ln/>
-        </p:spPr>
-        <p:txBody>
-          <a:bodyPr wrap="square" lIns="0" tIns="0" rIns="0" bIns="0" rtlCol="0" anchor="ctr"/>
-          <a:lstStyle/>
-          <a:p>
-            <a:pPr indent="0" marL="0">
-              <a:buNone/>
-            </a:pPr>
-            <a:r>
-              <a:rPr lang="en-US" sz="1300" b="1" dirty="0">
-                <a:solidFill>
-                  <a:srgbClr val="1D2B33"/>
-                </a:solidFill>
-              </a:rPr>
-              <a:t>레저·숙박 세부 업종별 비 10mm+ 날 매출 변화</a:t>
-            </a:r>
-            <a:endParaRPr lang="en-US" sz="1300" dirty="0"/>
-          </a:p>
-        </p:txBody>
-      </p:sp>
-      <p:graphicFrame>
-        <p:nvGraphicFramePr>
-          <p:cNvPr id="4" name="subindustry chart" descr=""/>
-          <p:cNvGraphicFramePr/>
-          <p:nvPr/>
-        </p:nvGraphicFramePr>
-        <p:xfrm>
-          <a:off x="457200" y="1920240"/>
-          <a:ext cx="7315200" cy="4297680"/>
-        </p:xfrm>
-        <a:graphic xmlns:a="http://schemas.openxmlformats.org/drawingml/2006/main">
-          <a:graphicData uri="http://schemas.openxmlformats.org/drawingml/2006/chart">
-            <c:chart xmlns:c="http://schemas.openxmlformats.org/drawingml/2006/chart" r:id="rId1"/>
-          </a:graphicData>
-        </a:graphic>
-      </p:graphicFrame>
-      <p:sp>
-        <p:nvSpPr>
-          <p:cNvPr id="5" name="key 1"/>
-          <p:cNvSpPr/>
-          <p:nvPr/>
-        </p:nvSpPr>
-        <p:spPr>
-          <a:xfrm>
-            <a:off x="8229600" y="1783080"/>
-            <a:ext cx="256032" cy="256032"/>
-          </a:xfrm>
-          <a:prstGeom prst="roundRect">
-            <a:avLst>
-              <a:gd name="adj" fmla="val 17857"/>
-            </a:avLst>
-          </a:prstGeom>
-          <a:solidFill>
-            <a:srgbClr val="D9622B"/>
-          </a:solidFill>
-          <a:ln w="12700">
-            <a:solidFill>
-              <a:srgbClr val="D9622B"/>
-            </a:solidFill>
-            <a:prstDash val="solid"/>
-          </a:ln>
-        </p:spPr>
-      </p:sp>
-      <p:sp>
-        <p:nvSpPr>
-          <p:cNvPr id="6" name="Text 3"/>
-          <p:cNvSpPr txBox="1"/>
-          <p:nvPr/>
-        </p:nvSpPr>
-        <p:spPr>
-          <a:xfrm>
-            <a:off x="8531352" y="1737360"/>
-            <a:ext cx="868680" cy="347472"/>
-          </a:xfrm>
-          <a:prstGeom prst="rect">
-            <a:avLst/>
-          </a:prstGeom>
-          <a:noFill/>
-          <a:ln/>
-        </p:spPr>
-        <p:txBody>
-          <a:bodyPr wrap="square" lIns="0" tIns="0" rIns="0" bIns="0" rtlCol="0" anchor="ctr"/>
-          <a:lstStyle/>
-          <a:p>
-            <a:pPr indent="0" marL="0">
-              <a:buNone/>
-            </a:pPr>
-            <a:r>
-              <a:rPr lang="en-US" sz="1100" dirty="0">
-                <a:solidFill>
-                  <a:srgbClr val="1D2B33"/>
-                </a:solidFill>
-              </a:rPr>
-              <a:t>뚜렷한 감소</a:t>
-            </a:r>
-            <a:endParaRPr lang="en-US" sz="1100" dirty="0"/>
-          </a:p>
-        </p:txBody>
-      </p:sp>
-      <p:sp>
-        <p:nvSpPr>
-          <p:cNvPr id="7" name="key 2"/>
-          <p:cNvSpPr/>
-          <p:nvPr/>
-        </p:nvSpPr>
-        <p:spPr>
-          <a:xfrm>
-            <a:off x="9390888" y="1783080"/>
-            <a:ext cx="256032" cy="256032"/>
-          </a:xfrm>
-          <a:prstGeom prst="roundRect">
-            <a:avLst>
-              <a:gd name="adj" fmla="val 17857"/>
-            </a:avLst>
-          </a:prstGeom>
-          <a:solidFill>
-            <a:srgbClr val="C5CBD1"/>
-          </a:solidFill>
-          <a:ln w="12700">
-            <a:solidFill>
-              <a:srgbClr val="C5CBD1"/>
-            </a:solidFill>
-            <a:prstDash val="solid"/>
-          </a:ln>
-        </p:spPr>
-      </p:sp>
-      <p:sp>
-        <p:nvSpPr>
-          <p:cNvPr id="8" name="Text 5"/>
-          <p:cNvSpPr txBox="1"/>
-          <p:nvPr/>
-        </p:nvSpPr>
-        <p:spPr>
-          <a:xfrm>
-            <a:off x="9692640" y="1737360"/>
-            <a:ext cx="868680" cy="347472"/>
-          </a:xfrm>
-          <a:prstGeom prst="rect">
-            <a:avLst/>
-          </a:prstGeom>
-          <a:noFill/>
-          <a:ln/>
-        </p:spPr>
-        <p:txBody>
-          <a:bodyPr wrap="square" lIns="0" tIns="0" rIns="0" bIns="0" rtlCol="0" anchor="ctr"/>
-          <a:lstStyle/>
-          <a:p>
-            <a:pPr indent="0" marL="0">
-              <a:buNone/>
-            </a:pPr>
-            <a:r>
-              <a:rPr lang="en-US" sz="1100" dirty="0">
-                <a:solidFill>
-                  <a:srgbClr val="1D2B33"/>
-                </a:solidFill>
-              </a:rPr>
-              <a:t>차이 불확실</a:t>
-            </a:r>
-            <a:endParaRPr lang="en-US" sz="1100" dirty="0"/>
-          </a:p>
-        </p:txBody>
-      </p:sp>
-      <p:sp>
-        <p:nvSpPr>
-          <p:cNvPr id="9" name="key 3"/>
-          <p:cNvSpPr/>
-          <p:nvPr/>
-        </p:nvSpPr>
-        <p:spPr>
-          <a:xfrm>
-            <a:off x="10552176" y="1783080"/>
-            <a:ext cx="256032" cy="256032"/>
-          </a:xfrm>
-          <a:prstGeom prst="roundRect">
-            <a:avLst>
-              <a:gd name="adj" fmla="val 17857"/>
-            </a:avLst>
-          </a:prstGeom>
-          <a:solidFill>
-            <a:srgbClr val="2F6FA8"/>
-          </a:solidFill>
-          <a:ln w="12700">
-            <a:solidFill>
-              <a:srgbClr val="2F6FA8"/>
-            </a:solidFill>
-            <a:prstDash val="solid"/>
-          </a:ln>
-        </p:spPr>
-      </p:sp>
-      <p:sp>
-        <p:nvSpPr>
-          <p:cNvPr id="10" name="Text 7"/>
-          <p:cNvSpPr txBox="1"/>
-          <p:nvPr/>
-        </p:nvSpPr>
-        <p:spPr>
-          <a:xfrm>
-            <a:off x="10853928" y="1737360"/>
-            <a:ext cx="868680" cy="347472"/>
-          </a:xfrm>
-          <a:prstGeom prst="rect">
-            <a:avLst/>
-          </a:prstGeom>
-          <a:noFill/>
-          <a:ln/>
-        </p:spPr>
-        <p:txBody>
-          <a:bodyPr wrap="square" lIns="0" tIns="0" rIns="0" bIns="0" rtlCol="0" anchor="ctr"/>
-          <a:lstStyle/>
-          <a:p>
-            <a:pPr indent="0" marL="0">
-              <a:buNone/>
-            </a:pPr>
-            <a:r>
-              <a:rPr lang="en-US" sz="1100" dirty="0">
-                <a:solidFill>
-                  <a:srgbClr val="1D2B33"/>
-                </a:solidFill>
-              </a:rPr>
-              <a:t>뚜렷한 증가</a:t>
-            </a:r>
-            <a:endParaRPr lang="en-US" sz="1100" dirty="0"/>
-          </a:p>
-        </p:txBody>
-      </p:sp>
-      <p:sp>
-        <p:nvSpPr>
-          <p:cNvPr id="11" name="Text 8"/>
-          <p:cNvSpPr txBox="1"/>
-          <p:nvPr/>
-        </p:nvSpPr>
-        <p:spPr>
-          <a:xfrm>
-            <a:off x="8229600" y="2331720"/>
-            <a:ext cx="3429000" cy="3017520"/>
-          </a:xfrm>
-          <a:prstGeom prst="rect">
-            <a:avLst/>
-          </a:prstGeom>
-          <a:noFill/>
-          <a:ln/>
-        </p:spPr>
-        <p:txBody>
-          <a:bodyPr wrap="square" lIns="0" tIns="0" rIns="0" bIns="0" rtlCol="0" anchor="t"/>
-          <a:lstStyle/>
-          <a:p>
-            <a:pPr marL="342900" indent="-342900">
-              <a:spcAft>
-                <a:spcPts val="1000"/>
-              </a:spcAft>
-              <a:buSzPct val="100000"/>
-              <a:buChar char="•"/>
-            </a:pPr>
-            <a:r>
-              <a:rPr lang="en-US" sz="1400" dirty="0">
-                <a:solidFill>
-                  <a:srgbClr val="1D2B33"/>
-                </a:solidFill>
-              </a:rPr>
-              <a:t>감소 업종은 외지 고객 비중이 높음: 골프장 78%, 레저타운 80%, 교통 87%</a:t>
-            </a:r>
-            <a:endParaRPr lang="en-US" sz="1400" dirty="0"/>
-          </a:p>
-          <a:p>
-            <a:pPr marL="342900" indent="-342900">
-              <a:spcAft>
-                <a:spcPts val="1000"/>
-              </a:spcAft>
-              <a:buSzPct val="100000"/>
-              <a:buChar char="•"/>
-            </a:pPr>
-            <a:r>
-              <a:rPr lang="en-US" sz="1400" dirty="0">
-                <a:solidFill>
-                  <a:srgbClr val="1D2B33"/>
-                </a:solidFill>
-              </a:rPr>
-              <a:t>동네 주민 시설은 영향 없음: 헬스장(외지 10%), 스포츠시설(32%)</a:t>
-            </a:r>
-            <a:endParaRPr lang="en-US" sz="1400" dirty="0"/>
-          </a:p>
-          <a:p>
-            <a:pPr marL="342900" indent="-342900">
-              <a:spcAft>
-                <a:spcPts val="1000"/>
-              </a:spcAft>
-              <a:buSzPct val="100000"/>
-              <a:buChar char="•"/>
-            </a:pPr>
-            <a:r>
-              <a:rPr lang="en-US" sz="1400" dirty="0">
-                <a:solidFill>
-                  <a:srgbClr val="1D2B33"/>
-                </a:solidFill>
-              </a:rPr>
-              <a:t>사우나·목욕탕 +20%: 비가 오면 실내로 이동</a:t>
-            </a:r>
-            <a:endParaRPr lang="en-US" sz="1400" dirty="0"/>
-          </a:p>
-        </p:txBody>
-      </p:sp>
-      <p:sp>
-        <p:nvSpPr>
-          <p:cNvPr id="12" name="Text 9"/>
-          <p:cNvSpPr txBox="1"/>
-          <p:nvPr/>
-        </p:nvSpPr>
-        <p:spPr>
-          <a:xfrm>
-            <a:off x="8229600" y="5532120"/>
-            <a:ext cx="3474720" cy="640080"/>
-          </a:xfrm>
-          <a:prstGeom prst="rect">
-            <a:avLst/>
-          </a:prstGeom>
-          <a:noFill/>
-          <a:ln/>
-        </p:spPr>
-        <p:txBody>
-          <a:bodyPr wrap="square" lIns="0" tIns="0" rIns="0" bIns="0" rtlCol="0" anchor="ctr"/>
-          <a:lstStyle/>
-          <a:p>
-            <a:pPr indent="0" marL="0">
-              <a:buNone/>
-            </a:pPr>
-            <a:r>
-              <a:rPr lang="en-US" sz="1000" dirty="0">
-                <a:solidFill>
-                  <a:srgbClr val="6B7780"/>
-                </a:solidFill>
-              </a:rPr>
-              <a:t>여행사·항공사는 결제일이 적어 제외. 숙박 카드 결제는 앱 선결제가 빠진 현장 결제 위주</a:t>
-            </a:r>
-            <a:endParaRPr lang="en-US" sz="1000" dirty="0"/>
-          </a:p>
-        </p:txBody>
-      </p:sp>
-      <p:sp>
-        <p:nvSpPr>
-          <p:cNvPr id="25" name="Slide Number Placeholder 0"/>
-          <p:cNvSpPr>
-            <a:spLocks noGrp="1"/>
-          </p:cNvSpPr>
-          <p:nvPr>
-            <p:ph type="sldNum" sz="quarter" idx="4294967295"/>
-          </p:nvPr>
-        </p:nvSpPr>
-        <p:spPr>
-          <a:xfrm>
-            <a:off x="11247120" y="6355080"/>
-            <a:ext cx="457200" cy="274320"/>
-          </a:xfrm>
-          <a:prstGeom prst="rect">
-            <a:avLst/>
-          </a:prstGeom>
-          <a:extLst>
-            <a:ext uri="{C572A759-6A51-4108-AA02-DFA0A04FC94B}">
-              <ma14:wrappingTextBoxFlag xmlns:ma14="http://schemas.microsoft.com/office/mac/drawingml/2011/main" val="0"/>
-            </a:ext>
-          </a:extLst>
-        </p:spPr>
-        <p:txBody>
-          <a:bodyPr/>
-          <a:lstStyle>
-            <a:lvl1pPr>
-              <a:defRPr sz="1000">
-                <a:solidFill>
-                  <a:srgbClr val="6B7780"/>
-                </a:solidFill>
-              </a:defRPr>
-            </a:lvl1pPr>
-          </a:lstStyle>
-          <a:p>
-            <a:pPr algn="r"/>
-            <a:fld id="{F7021451-1387-4CA6-816F-3879F97B5CBC}" type="slidenum">
-              <a:rPr b="0" lang="en-US"/>
-              <a:t>5</a:t>
-            </a:fld>
-            <a:endParaRPr lang="en-US"/>
-          </a:p>
-        </p:txBody>
-      </p:sp>
-    </p:spTree>
-  </p:cSld>
-  <p:clrMapOvr>
-    <a:masterClrMapping/>
-  </p:clrMapOvr>
-</p:sld>
-</file>
-
-<file path=ppt/slides/slide6.xml><?xml version="1.0" encoding="utf-8"?>
-<p:sld xmlns:a="http://schemas.openxmlformats.org/drawingml/2006/main" xmlns:r="http://schemas.openxmlformats.org/officeDocument/2006/relationships" xmlns:p="http://schemas.openxmlformats.org/presentationml/2006/main">
-  <p:cSld name="Slide 6">
-    <p:spTree>
-      <p:nvGrpSpPr>
-        <p:cNvPr id="1" name=""/>
-        <p:cNvGrpSpPr/>
-        <p:nvPr/>
-      </p:nvGrpSpPr>
-      <p:grpSpPr>
-        <a:xfrm>
-          <a:off x="0" y="0"/>
-          <a:ext cx="0" cy="0"/>
-          <a:chOff x="0" y="0"/>
-          <a:chExt cx="0" cy="0"/>
-        </a:xfrm>
-      </p:grpSpPr>
-      <p:sp>
-        <p:nvSpPr>
-          <p:cNvPr id="2" name="Text 1"/>
-          <p:cNvSpPr/>
-          <p:nvPr>
-            <p:ph idx="101" type="title" hasCustomPrompt="1"/>
-          </p:nvPr>
-        </p:nvSpPr>
-        <p:spPr>
-          <a:xfrm>
-            <a:off x="548640" y="640080"/>
-            <a:ext cx="11064240" cy="822960"/>
-          </a:xfrm>
-          <a:prstGeom prst="rect">
-            <a:avLst/>
-          </a:prstGeom>
-          <a:noFill/>
-          <a:ln/>
-        </p:spPr>
-        <p:txBody>
-          <a:bodyPr wrap="square" lIns="0" tIns="0" rIns="0" bIns="0" rtlCol="0" anchor="t"/>
-          <a:lstStyle/>
-          <a:p>
-            <a:pPr algn="l" indent="0" marL="0">
-              <a:buNone/>
-            </a:pPr>
-            <a:r>
-              <a:rPr lang="en-US" sz="3000" b="1" dirty="0">
-                <a:solidFill>
-                  <a:schemeClr val="tx1"/>
-                </a:solidFill>
-              </a:rPr>
-              <a:t>외지 관광객이 더 크게 빠지고, 비가 오면 실내로 옮겨 간다</a:t>
-            </a:r>
-            <a:endParaRPr lang="en-US" sz="3000" dirty="0"/>
-          </a:p>
-        </p:txBody>
-      </p:sp>
-      <p:sp>
-        <p:nvSpPr>
-          <p:cNvPr id="3" name="chart caption"/>
-          <p:cNvSpPr txBox="1"/>
-          <p:nvPr/>
-        </p:nvSpPr>
-        <p:spPr>
-          <a:xfrm>
-            <a:off x="548640" y="1600200"/>
-            <a:ext cx="7223760" cy="320040"/>
-          </a:xfrm>
-          <a:prstGeom prst="rect">
-            <a:avLst/>
-          </a:prstGeom>
-          <a:noFill/>
-          <a:ln/>
-        </p:spPr>
-        <p:txBody>
-          <a:bodyPr wrap="square" lIns="0" tIns="0" rIns="0" bIns="0" rtlCol="0" anchor="ctr"/>
-          <a:lstStyle/>
-          <a:p>
-            <a:pPr indent="0" marL="0">
-              <a:buNone/>
-            </a:pPr>
-            <a:r>
-              <a:rPr lang="en-US" sz="1300" b="1" dirty="0">
-                <a:solidFill>
-                  <a:srgbClr val="1D2B33"/>
-                </a:solidFill>
-              </a:rPr>
-              <a:t>고객 거주지별 비 10mm+ 날 매출 변화</a:t>
-            </a:r>
-            <a:endParaRPr lang="en-US" sz="1300" dirty="0"/>
-          </a:p>
-        </p:txBody>
-      </p:sp>
-      <p:graphicFrame>
-        <p:nvGraphicFramePr>
-          <p:cNvPr id="4" name="residence chart" descr=""/>
-          <p:cNvGraphicFramePr/>
-          <p:nvPr/>
-        </p:nvGraphicFramePr>
-        <p:xfrm>
-          <a:off x="457200" y="1920240"/>
-          <a:ext cx="7315200" cy="4297680"/>
-        </p:xfrm>
-        <a:graphic xmlns:a="http://schemas.openxmlformats.org/drawingml/2006/main">
-          <a:graphicData uri="http://schemas.openxmlformats.org/drawingml/2006/chart">
-            <c:chart xmlns:c="http://schemas.openxmlformats.org/drawingml/2006/chart" r:id="rId1"/>
-          </a:graphicData>
-        </a:graphic>
-      </p:graphicFrame>
-      <p:sp>
-        <p:nvSpPr>
-          <p:cNvPr id="5" name="residence card 1"/>
-          <p:cNvSpPr/>
-          <p:nvPr/>
-        </p:nvSpPr>
-        <p:spPr>
-          <a:xfrm>
-            <a:off x="8229600" y="1783080"/>
-            <a:ext cx="3429000" cy="1143000"/>
-          </a:xfrm>
-          <a:prstGeom prst="roundRect">
-            <a:avLst>
-              <a:gd name="adj" fmla="val 8000"/>
-            </a:avLst>
-          </a:prstGeom>
-          <a:solidFill>
-            <a:srgbClr val="F3F6F8"/>
-          </a:solidFill>
-          <a:ln w="12700">
-            <a:solidFill>
-              <a:srgbClr val="F3F6F8"/>
-            </a:solidFill>
-            <a:prstDash val="solid"/>
-          </a:ln>
-        </p:spPr>
-      </p:sp>
-      <p:sp>
-        <p:nvSpPr>
-          <p:cNvPr id="6" name="Text 3"/>
-          <p:cNvSpPr txBox="1"/>
-          <p:nvPr/>
-        </p:nvSpPr>
-        <p:spPr>
-          <a:xfrm>
-            <a:off x="8412480" y="1856232"/>
-            <a:ext cx="3108960" cy="1005840"/>
-          </a:xfrm>
-          <a:prstGeom prst="rect">
-            <a:avLst/>
-          </a:prstGeom>
-          <a:noFill/>
-          <a:ln/>
-        </p:spPr>
-        <p:txBody>
-          <a:bodyPr wrap="square" lIns="0" tIns="0" rIns="0" bIns="0" rtlCol="0" anchor="t"/>
-          <a:lstStyle/>
-          <a:p>
-            <a:pPr indent="0" marL="0">
-              <a:buNone/>
-            </a:pPr>
-            <a:r>
-              <a:rPr lang="en-US" sz="1400" b="1" dirty="0">
-                <a:solidFill>
-                  <a:srgbClr val="1D2B33"/>
-                </a:solidFill>
-              </a:rPr>
-              <a:t>골프장</a:t>
-            </a:r>
-            <a:endParaRPr lang="en-US" sz="1400" dirty="0"/>
-          </a:p>
-          <a:p>
-            <a:pPr indent="0" marL="0">
-              <a:buNone/>
-            </a:pPr>
-            <a:r>
-              <a:rPr lang="en-US" sz="1700" b="1" dirty="0">
-                <a:solidFill>
-                  <a:srgbClr val="D9622B"/>
-                </a:solidFill>
-              </a:rPr>
-              <a:t>강원 -44% · 외지 -62%</a:t>
-            </a:r>
-            <a:endParaRPr lang="en-US" sz="1400" dirty="0"/>
-          </a:p>
-          <a:p>
-            <a:pPr indent="0" marL="0">
-              <a:buNone/>
-            </a:pPr>
-            <a:r>
-              <a:rPr lang="en-US" sz="1300" dirty="0">
-                <a:solidFill>
-                  <a:srgbClr val="1D2B33"/>
-                </a:solidFill>
-              </a:rPr>
-              <a:t>외지 관광객이 더 크게 취소</a:t>
-            </a:r>
-            <a:endParaRPr lang="en-US" sz="1400" dirty="0"/>
-          </a:p>
-        </p:txBody>
-      </p:sp>
-      <p:sp>
-        <p:nvSpPr>
-          <p:cNvPr id="7" name="residence card 2"/>
-          <p:cNvSpPr/>
-          <p:nvPr/>
-        </p:nvSpPr>
-        <p:spPr>
-          <a:xfrm>
-            <a:off x="8229600" y="3108960"/>
-            <a:ext cx="3429000" cy="1143000"/>
-          </a:xfrm>
-          <a:prstGeom prst="roundRect">
-            <a:avLst>
-              <a:gd name="adj" fmla="val 8000"/>
-            </a:avLst>
-          </a:prstGeom>
-          <a:solidFill>
-            <a:srgbClr val="F3F6F8"/>
-          </a:solidFill>
-          <a:ln w="12700">
-            <a:solidFill>
-              <a:srgbClr val="F3F6F8"/>
-            </a:solidFill>
-            <a:prstDash val="solid"/>
-          </a:ln>
-        </p:spPr>
-      </p:sp>
-      <p:sp>
-        <p:nvSpPr>
-          <p:cNvPr id="8" name="Text 5"/>
-          <p:cNvSpPr txBox="1"/>
-          <p:nvPr/>
-        </p:nvSpPr>
-        <p:spPr>
-          <a:xfrm>
-            <a:off x="8412480" y="3182112"/>
-            <a:ext cx="3108960" cy="1005840"/>
-          </a:xfrm>
-          <a:prstGeom prst="rect">
-            <a:avLst/>
-          </a:prstGeom>
-          <a:noFill/>
-          <a:ln/>
-        </p:spPr>
-        <p:txBody>
-          <a:bodyPr wrap="square" lIns="0" tIns="0" rIns="0" bIns="0" rtlCol="0" anchor="t"/>
-          <a:lstStyle/>
-          <a:p>
-            <a:pPr indent="0" marL="0">
-              <a:buNone/>
-            </a:pPr>
-            <a:r>
-              <a:rPr lang="en-US" sz="1400" b="1" dirty="0">
-                <a:solidFill>
-                  <a:srgbClr val="1D2B33"/>
-                </a:solidFill>
-              </a:rPr>
-              <a:t>사우나·목욕탕</a:t>
-            </a:r>
-            <a:endParaRPr lang="en-US" sz="1400" dirty="0"/>
-          </a:p>
-          <a:p>
-            <a:pPr indent="0" marL="0">
-              <a:buNone/>
-            </a:pPr>
-            <a:r>
-              <a:rPr lang="en-US" sz="1700" b="1" dirty="0">
-                <a:solidFill>
-                  <a:srgbClr val="2F6FA8"/>
-                </a:solidFill>
-              </a:rPr>
-              <a:t>강원 +15% · 외지 +47%</a:t>
-            </a:r>
-            <a:endParaRPr lang="en-US" sz="1400" dirty="0"/>
-          </a:p>
-          <a:p>
-            <a:pPr indent="0" marL="0">
-              <a:buNone/>
-            </a:pPr>
-            <a:r>
-              <a:rPr lang="en-US" sz="1300" dirty="0">
-                <a:solidFill>
-                  <a:srgbClr val="1D2B33"/>
-                </a:solidFill>
-              </a:rPr>
-              <a:t>비 오는 날 외지 관광객이 실내로</a:t>
-            </a:r>
-            <a:endParaRPr lang="en-US" sz="1400" dirty="0"/>
-          </a:p>
-        </p:txBody>
-      </p:sp>
-      <p:sp>
-        <p:nvSpPr>
-          <p:cNvPr id="9" name="residence card 3"/>
-          <p:cNvSpPr/>
-          <p:nvPr/>
-        </p:nvSpPr>
-        <p:spPr>
-          <a:xfrm>
-            <a:off x="8229600" y="4434840"/>
-            <a:ext cx="3429000" cy="1143000"/>
-          </a:xfrm>
-          <a:prstGeom prst="roundRect">
-            <a:avLst>
-              <a:gd name="adj" fmla="val 8000"/>
-            </a:avLst>
-          </a:prstGeom>
-          <a:solidFill>
-            <a:srgbClr val="F3F6F8"/>
-          </a:solidFill>
-          <a:ln w="12700">
-            <a:solidFill>
-              <a:srgbClr val="F3F6F8"/>
-            </a:solidFill>
-            <a:prstDash val="solid"/>
-          </a:ln>
-        </p:spPr>
-      </p:sp>
-      <p:sp>
-        <p:nvSpPr>
-          <p:cNvPr id="10" name="Text 7"/>
-          <p:cNvSpPr txBox="1"/>
-          <p:nvPr/>
-        </p:nvSpPr>
-        <p:spPr>
-          <a:xfrm>
-            <a:off x="8412480" y="4507992"/>
-            <a:ext cx="3108960" cy="1005840"/>
-          </a:xfrm>
-          <a:prstGeom prst="rect">
-            <a:avLst/>
-          </a:prstGeom>
-          <a:noFill/>
-          <a:ln/>
-        </p:spPr>
-        <p:txBody>
-          <a:bodyPr wrap="square" lIns="0" tIns="0" rIns="0" bIns="0" rtlCol="0" anchor="t"/>
-          <a:lstStyle/>
-          <a:p>
-            <a:pPr indent="0" marL="0">
-              <a:buNone/>
-            </a:pPr>
-            <a:r>
-              <a:rPr lang="en-US" sz="1400" b="1" dirty="0">
-                <a:solidFill>
-                  <a:srgbClr val="1D2B33"/>
-                </a:solidFill>
-              </a:rPr>
-              <a:t>레저타운·놀이동산</a:t>
-            </a:r>
-            <a:endParaRPr lang="en-US" sz="1400" dirty="0"/>
-          </a:p>
-          <a:p>
-            <a:pPr indent="0" marL="0">
-              <a:buNone/>
-            </a:pPr>
-            <a:r>
-              <a:rPr lang="en-US" sz="1700" b="1" dirty="0">
-                <a:solidFill>
-                  <a:srgbClr val="D9622B"/>
-                </a:solidFill>
-              </a:rPr>
-              <a:t>강원·외지 모두 약 -45%</a:t>
-            </a:r>
-            <a:endParaRPr lang="en-US" sz="1400" dirty="0"/>
-          </a:p>
-          <a:p>
-            <a:pPr indent="0" marL="0">
-              <a:buNone/>
-            </a:pPr>
-            <a:r>
-              <a:rPr lang="en-US" sz="1300" dirty="0">
-                <a:solidFill>
-                  <a:srgbClr val="1D2B33"/>
-                </a:solidFill>
-              </a:rPr>
-              <a:t>고객 대부분(80%)이 외지</a:t>
-            </a:r>
-            <a:endParaRPr lang="en-US" sz="1400" dirty="0"/>
-          </a:p>
-        </p:txBody>
-      </p:sp>
-      <p:sp>
-        <p:nvSpPr>
-          <p:cNvPr id="11" name="Text 8"/>
-          <p:cNvSpPr txBox="1"/>
-          <p:nvPr/>
-        </p:nvSpPr>
-        <p:spPr>
-          <a:xfrm>
-            <a:off x="8229600" y="5760720"/>
-            <a:ext cx="3474720" cy="457200"/>
-          </a:xfrm>
-          <a:prstGeom prst="rect">
-            <a:avLst/>
-          </a:prstGeom>
-          <a:noFill/>
-          <a:ln/>
-        </p:spPr>
-        <p:txBody>
-          <a:bodyPr wrap="square" lIns="0" tIns="0" rIns="0" bIns="0" rtlCol="0" anchor="ctr"/>
-          <a:lstStyle/>
-          <a:p>
-            <a:pPr indent="0" marL="0">
-              <a:buNone/>
-            </a:pPr>
-            <a:r>
-              <a:rPr lang="en-US" sz="1000" dirty="0">
-                <a:solidFill>
-                  <a:srgbClr val="6B7780"/>
-                </a:solidFill>
-              </a:rPr>
-              <a:t>강원 고객 = 강원도 거주(춘천 밖 포함). 사우나 외지 고객 95% 구간 +13% ~ +92%로 넓음</a:t>
-            </a:r>
-            <a:endParaRPr lang="en-US" sz="1000" dirty="0"/>
-          </a:p>
-        </p:txBody>
-      </p:sp>
-      <p:sp>
-        <p:nvSpPr>
-          <p:cNvPr id="25" name="Slide Number Placeholder 0"/>
-          <p:cNvSpPr>
-            <a:spLocks noGrp="1"/>
-          </p:cNvSpPr>
-          <p:nvPr>
-            <p:ph type="sldNum" sz="quarter" idx="4294967295"/>
-          </p:nvPr>
-        </p:nvSpPr>
-        <p:spPr>
-          <a:xfrm>
-            <a:off x="11247120" y="6355080"/>
-            <a:ext cx="457200" cy="274320"/>
-          </a:xfrm>
-          <a:prstGeom prst="rect">
-            <a:avLst/>
-          </a:prstGeom>
-          <a:extLst>
-            <a:ext uri="{C572A759-6A51-4108-AA02-DFA0A04FC94B}">
-              <ma14:wrappingTextBoxFlag xmlns:ma14="http://schemas.microsoft.com/office/mac/drawingml/2011/main" val="0"/>
-            </a:ext>
-          </a:extLst>
-        </p:spPr>
-        <p:txBody>
-          <a:bodyPr/>
-          <a:lstStyle>
-            <a:lvl1pPr>
-              <a:defRPr sz="1000">
-                <a:solidFill>
-                  <a:srgbClr val="6B7780"/>
-                </a:solidFill>
-              </a:defRPr>
-            </a:lvl1pPr>
-          </a:lstStyle>
-          <a:p>
-            <a:pPr algn="r"/>
-            <a:fld id="{F7021451-1387-4CA6-816F-3879F97B5CBC}" type="slidenum">
-              <a:rPr b="0" lang="en-US"/>
-              <a:t>6</a:t>
-            </a:fld>
-            <a:endParaRPr lang="en-US"/>
-          </a:p>
-        </p:txBody>
-      </p:sp>
-    </p:spTree>
-  </p:cSld>
-  <p:clrMapOvr>
-    <a:masterClrMapping/>
-  </p:clrMapOvr>
-</p:sld>
-</file>
-
-<file path=ppt/slides/slide7.xml><?xml version="1.0" encoding="utf-8"?>
-<p:sld xmlns:a="http://schemas.openxmlformats.org/drawingml/2006/main" xmlns:r="http://schemas.openxmlformats.org/officeDocument/2006/relationships" xmlns:p="http://schemas.openxmlformats.org/presentationml/2006/main">
-  <p:cSld name="Slide 7">
-    <p:spTree>
-      <p:nvGrpSpPr>
-        <p:cNvPr id="1" name=""/>
-        <p:cNvGrpSpPr/>
-        <p:nvPr/>
-      </p:nvGrpSpPr>
-      <p:grpSpPr>
-        <a:xfrm>
-          <a:off x="0" y="0"/>
-          <a:ext cx="0" cy="0"/>
-          <a:chOff x="0" y="0"/>
-          <a:chExt cx="0" cy="0"/>
-        </a:xfrm>
-      </p:grpSpPr>
-      <p:sp>
-        <p:nvSpPr>
-          <p:cNvPr id="2" name="Text 0"/>
-          <p:cNvSpPr/>
-          <p:nvPr>
-            <p:ph idx="100" type="title" hasCustomPrompt="1"/>
-          </p:nvPr>
-        </p:nvSpPr>
-        <p:spPr>
-          <a:xfrm>
-            <a:off x="731520" y="1371600"/>
-            <a:ext cx="10698480" cy="1828800"/>
-          </a:xfrm>
-          <a:prstGeom prst="rect">
-            <a:avLst/>
-          </a:prstGeom>
-          <a:noFill/>
-          <a:ln/>
-        </p:spPr>
-        <p:txBody>
-          <a:bodyPr wrap="square" lIns="0" tIns="0" rIns="0" bIns="0" rtlCol="0" anchor="b"/>
-          <a:lstStyle/>
-          <a:p>
-            <a:pPr algn="l" indent="0" marL="0">
-              <a:buNone/>
-            </a:pPr>
-            <a:r>
-              <a:rPr lang="en-US" sz="4400" b="1" dirty="0">
-                <a:solidFill>
-                  <a:schemeClr val="bg1"/>
-                </a:solidFill>
-              </a:rPr>
-              <a:t>정리: 춘천의 비 취약 상권은</a:t>
-            </a:r>
-            <a:endParaRPr lang="en-US" sz="4400" dirty="0"/>
-          </a:p>
-          <a:p>
-            <a:pPr algn="l" indent="0" marL="0">
-              <a:buNone/>
-            </a:pPr>
-            <a:r>
-              <a:rPr lang="en-US" sz="4400" b="1" dirty="0">
-                <a:solidFill>
-                  <a:schemeClr val="bg1"/>
-                </a:solidFill>
-              </a:rPr>
-              <a:t>레저(당일 충격)와 숙박(회복 실패)</a:t>
-            </a:r>
-            <a:endParaRPr lang="en-US" sz="4400" dirty="0"/>
-          </a:p>
-        </p:txBody>
-      </p:sp>
-      <p:sp>
-        <p:nvSpPr>
-          <p:cNvPr id="3" name="Text 0"/>
-          <p:cNvSpPr/>
-          <p:nvPr>
-            <p:ph idx="101" type="body" hasCustomPrompt="1"/>
-          </p:nvPr>
-        </p:nvSpPr>
-        <p:spPr>
-          <a:xfrm>
-            <a:off x="731520" y="3383280"/>
-            <a:ext cx="10698480" cy="548640"/>
-          </a:xfrm>
-          <a:prstGeom prst="rect">
-            <a:avLst/>
-          </a:prstGeom>
-          <a:noFill/>
-          <a:ln/>
-        </p:spPr>
-        <p:txBody>
-          <a:bodyPr wrap="square" lIns="0" tIns="0" rIns="0" bIns="0" rtlCol="0"/>
-          <a:lstStyle/>
-          <a:p>
-            <a:pPr indent="0" marL="0">
-              <a:buNone/>
-            </a:pPr>
-            <a:r>
-              <a:rPr lang="en-US" sz="2000" dirty="0">
-                <a:solidFill>
-                  <a:srgbClr val="C8D6DF"/>
-                </a:solidFill>
-              </a:rPr>
-              <a:t>원인은 외지 관광객의 이탈 → 모델은 이 손실과 회복을 예측하고, 정책은 재방문을 만든다</a:t>
-            </a:r>
-            <a:endParaRPr lang="en-US" sz="2000" dirty="0"/>
-          </a:p>
-        </p:txBody>
-      </p:sp>
-      <p:sp>
-        <p:nvSpPr>
-          <p:cNvPr id="4" name="summary card 1"/>
-          <p:cNvSpPr/>
-          <p:nvPr/>
-        </p:nvSpPr>
-        <p:spPr>
-          <a:xfrm>
-            <a:off x="731520" y="4297680"/>
-            <a:ext cx="3291840" cy="1508760"/>
-          </a:xfrm>
-          <a:prstGeom prst="roundRect">
-            <a:avLst>
-              <a:gd name="adj" fmla="val 7273"/>
-            </a:avLst>
-          </a:prstGeom>
-          <a:solidFill>
-            <a:srgbClr val="1F4252"/>
-          </a:solidFill>
-          <a:ln w="12700">
-            <a:solidFill>
-              <a:srgbClr val="1F4252"/>
-            </a:solidFill>
-            <a:prstDash val="solid"/>
-          </a:ln>
-        </p:spPr>
-      </p:sp>
-      <p:sp>
-        <p:nvSpPr>
-          <p:cNvPr id="5" name="summary number 1"/>
-          <p:cNvSpPr/>
-          <p:nvPr/>
-        </p:nvSpPr>
-        <p:spPr>
-          <a:xfrm>
-            <a:off x="960120" y="4480560"/>
-            <a:ext cx="411480" cy="411480"/>
-          </a:xfrm>
-          <a:prstGeom prst="ellipse">
-            <a:avLst/>
-          </a:prstGeom>
-          <a:solidFill>
-            <a:srgbClr val="D9622B"/>
-          </a:solidFill>
-          <a:ln w="12700">
-            <a:solidFill>
-              <a:srgbClr val="D9622B"/>
-            </a:solidFill>
-            <a:prstDash val="solid"/>
-          </a:ln>
-        </p:spPr>
-      </p:sp>
-      <p:sp>
-        <p:nvSpPr>
-          <p:cNvPr id="6" name="Text 4"/>
-          <p:cNvSpPr txBox="1"/>
-          <p:nvPr/>
-        </p:nvSpPr>
-        <p:spPr>
-          <a:xfrm>
-            <a:off x="960120" y="4480560"/>
-            <a:ext cx="411480" cy="411480"/>
-          </a:xfrm>
-          <a:prstGeom prst="rect">
-            <a:avLst/>
-          </a:prstGeom>
-          <a:noFill/>
-          <a:ln/>
-        </p:spPr>
-        <p:txBody>
-          <a:bodyPr wrap="square" lIns="0" tIns="0" rIns="0" bIns="0" rtlCol="0" anchor="ctr"/>
-          <a:lstStyle/>
-          <a:p>
-            <a:pPr algn="ctr" indent="0" marL="0">
-              <a:buNone/>
-            </a:pPr>
-            <a:r>
-              <a:rPr lang="en-US" sz="1500" b="1" dirty="0">
-                <a:solidFill>
-                  <a:srgbClr val="FFFFFF"/>
-                </a:solidFill>
-              </a:rPr>
-              <a:t>1</a:t>
-            </a:r>
-            <a:endParaRPr lang="en-US" sz="1500" dirty="0"/>
-          </a:p>
-        </p:txBody>
-      </p:sp>
-      <p:sp>
-        <p:nvSpPr>
-          <p:cNvPr id="7" name="Text 5"/>
-          <p:cNvSpPr txBox="1"/>
-          <p:nvPr/>
-        </p:nvSpPr>
-        <p:spPr>
-          <a:xfrm>
-            <a:off x="1508760" y="4480560"/>
-            <a:ext cx="2377440" cy="411480"/>
-          </a:xfrm>
-          <a:prstGeom prst="rect">
-            <a:avLst/>
-          </a:prstGeom>
-          <a:noFill/>
-          <a:ln/>
-        </p:spPr>
-        <p:txBody>
-          <a:bodyPr wrap="square" lIns="0" tIns="0" rIns="0" bIns="0" rtlCol="0" anchor="ctr"/>
-          <a:lstStyle/>
-          <a:p>
-            <a:pPr indent="0" marL="0">
-              <a:buNone/>
-            </a:pPr>
-            <a:r>
-              <a:rPr lang="en-US" sz="1700" b="1" dirty="0">
-                <a:solidFill>
-                  <a:srgbClr val="FFFFFF"/>
-                </a:solidFill>
-              </a:rPr>
-              <a:t>당일 충격</a:t>
-            </a:r>
-            <a:endParaRPr lang="en-US" sz="1700" dirty="0"/>
-          </a:p>
-        </p:txBody>
-      </p:sp>
-      <p:sp>
-        <p:nvSpPr>
-          <p:cNvPr id="8" name="Text 6"/>
-          <p:cNvSpPr txBox="1"/>
-          <p:nvPr/>
-        </p:nvSpPr>
-        <p:spPr>
-          <a:xfrm>
-            <a:off x="960120" y="4983480"/>
-            <a:ext cx="2926080" cy="731520"/>
-          </a:xfrm>
-          <a:prstGeom prst="rect">
-            <a:avLst/>
-          </a:prstGeom>
-          <a:noFill/>
-          <a:ln/>
-        </p:spPr>
-        <p:txBody>
-          <a:bodyPr wrap="square" lIns="0" tIns="0" rIns="0" bIns="0" rtlCol="0" anchor="t"/>
-          <a:lstStyle/>
-          <a:p>
-            <a:pPr indent="0" marL="0">
-              <a:buNone/>
-            </a:pPr>
-            <a:r>
-              <a:rPr lang="en-US" sz="1300" dirty="0">
-                <a:solidFill>
-                  <a:srgbClr val="DCE6EC"/>
-                </a:solidFill>
-              </a:rPr>
-              <a:t>야외·레저 -40%</a:t>
-            </a:r>
-            <a:endParaRPr lang="en-US" sz="1300" dirty="0"/>
-          </a:p>
-          <a:p>
-            <a:pPr indent="0" marL="0">
-              <a:buNone/>
-            </a:pPr>
-            <a:r>
-              <a:rPr lang="en-US" sz="1300" dirty="0">
-                <a:solidFill>
-                  <a:srgbClr val="DCE6EC"/>
-                </a:solidFill>
-              </a:rPr>
-              <a:t>업종 중 최대 감소</a:t>
-            </a:r>
-            <a:endParaRPr lang="en-US" sz="1300" dirty="0"/>
-          </a:p>
-        </p:txBody>
-      </p:sp>
-      <p:sp>
-        <p:nvSpPr>
-          <p:cNvPr id="9" name="summary card 2"/>
-          <p:cNvSpPr/>
-          <p:nvPr/>
-        </p:nvSpPr>
-        <p:spPr>
-          <a:xfrm>
-            <a:off x="4297680" y="4297680"/>
-            <a:ext cx="3291840" cy="1508760"/>
-          </a:xfrm>
-          <a:prstGeom prst="roundRect">
-            <a:avLst>
-              <a:gd name="adj" fmla="val 7273"/>
-            </a:avLst>
-          </a:prstGeom>
-          <a:solidFill>
-            <a:srgbClr val="1F4252"/>
-          </a:solidFill>
-          <a:ln w="12700">
-            <a:solidFill>
-              <a:srgbClr val="1F4252"/>
-            </a:solidFill>
-            <a:prstDash val="solid"/>
-          </a:ln>
-        </p:spPr>
-      </p:sp>
-      <p:sp>
-        <p:nvSpPr>
-          <p:cNvPr id="10" name="summary number 2"/>
-          <p:cNvSpPr/>
-          <p:nvPr/>
-        </p:nvSpPr>
-        <p:spPr>
-          <a:xfrm>
-            <a:off x="4526280" y="4480560"/>
-            <a:ext cx="411480" cy="411480"/>
-          </a:xfrm>
-          <a:prstGeom prst="ellipse">
-            <a:avLst/>
-          </a:prstGeom>
-          <a:solidFill>
-            <a:srgbClr val="D9622B"/>
-          </a:solidFill>
-          <a:ln w="12700">
-            <a:solidFill>
-              <a:srgbClr val="D9622B"/>
-            </a:solidFill>
-            <a:prstDash val="solid"/>
-          </a:ln>
-        </p:spPr>
-      </p:sp>
-      <p:sp>
-        <p:nvSpPr>
-          <p:cNvPr id="11" name="Text 9"/>
-          <p:cNvSpPr txBox="1"/>
-          <p:nvPr/>
-        </p:nvSpPr>
-        <p:spPr>
-          <a:xfrm>
-            <a:off x="4526280" y="4480560"/>
-            <a:ext cx="411480" cy="411480"/>
-          </a:xfrm>
-          <a:prstGeom prst="rect">
-            <a:avLst/>
-          </a:prstGeom>
-          <a:noFill/>
-          <a:ln/>
-        </p:spPr>
-        <p:txBody>
-          <a:bodyPr wrap="square" lIns="0" tIns="0" rIns="0" bIns="0" rtlCol="0" anchor="ctr"/>
-          <a:lstStyle/>
-          <a:p>
-            <a:pPr algn="ctr" indent="0" marL="0">
-              <a:buNone/>
-            </a:pPr>
-            <a:r>
-              <a:rPr lang="en-US" sz="1500" b="1" dirty="0">
-                <a:solidFill>
-                  <a:srgbClr val="FFFFFF"/>
-                </a:solidFill>
-              </a:rPr>
-              <a:t>2</a:t>
-            </a:r>
-            <a:endParaRPr lang="en-US" sz="1500" dirty="0"/>
-          </a:p>
-        </p:txBody>
-      </p:sp>
-      <p:sp>
-        <p:nvSpPr>
-          <p:cNvPr id="12" name="Text 10"/>
-          <p:cNvSpPr txBox="1"/>
-          <p:nvPr/>
-        </p:nvSpPr>
-        <p:spPr>
-          <a:xfrm>
-            <a:off x="5074920" y="4480560"/>
-            <a:ext cx="2377440" cy="411480"/>
-          </a:xfrm>
-          <a:prstGeom prst="rect">
-            <a:avLst/>
-          </a:prstGeom>
-          <a:noFill/>
-          <a:ln/>
-        </p:spPr>
-        <p:txBody>
-          <a:bodyPr wrap="square" lIns="0" tIns="0" rIns="0" bIns="0" rtlCol="0" anchor="ctr"/>
-          <a:lstStyle/>
-          <a:p>
-            <a:pPr indent="0" marL="0">
-              <a:buNone/>
-            </a:pPr>
-            <a:r>
-              <a:rPr lang="en-US" sz="1700" b="1" dirty="0">
-                <a:solidFill>
-                  <a:srgbClr val="FFFFFF"/>
-                </a:solidFill>
-              </a:rPr>
-              <a:t>회복 실패</a:t>
-            </a:r>
-            <a:endParaRPr lang="en-US" sz="1700" dirty="0"/>
-          </a:p>
-        </p:txBody>
-      </p:sp>
-      <p:sp>
-        <p:nvSpPr>
-          <p:cNvPr id="13" name="Text 11"/>
-          <p:cNvSpPr txBox="1"/>
-          <p:nvPr/>
-        </p:nvSpPr>
-        <p:spPr>
-          <a:xfrm>
-            <a:off x="4526280" y="4983480"/>
-            <a:ext cx="2926080" cy="731520"/>
-          </a:xfrm>
-          <a:prstGeom prst="rect">
-            <a:avLst/>
-          </a:prstGeom>
-          <a:noFill/>
-          <a:ln/>
-        </p:spPr>
-        <p:txBody>
-          <a:bodyPr wrap="square" lIns="0" tIns="0" rIns="0" bIns="0" rtlCol="0" anchor="t"/>
-          <a:lstStyle/>
-          <a:p>
-            <a:pPr indent="0" marL="0">
-              <a:buNone/>
-            </a:pPr>
-            <a:r>
-              <a:rPr lang="en-US" sz="1300" dirty="0">
-                <a:solidFill>
-                  <a:srgbClr val="DCE6EC"/>
-                </a:solidFill>
-              </a:rPr>
-              <a:t>숙박·여행 3일 누적 -38%</a:t>
-            </a:r>
-            <a:endParaRPr lang="en-US" sz="1300" dirty="0"/>
-          </a:p>
-          <a:p>
-            <a:pPr indent="0" marL="0">
-              <a:buNone/>
-            </a:pPr>
-            <a:r>
-              <a:rPr lang="en-US" sz="1300" dirty="0">
-                <a:solidFill>
-                  <a:srgbClr val="DCE6EC"/>
-                </a:solidFill>
-              </a:rPr>
-              <a:t>레저도 손실을 메우지 못함</a:t>
-            </a:r>
-            <a:endParaRPr lang="en-US" sz="1300" dirty="0"/>
-          </a:p>
-        </p:txBody>
-      </p:sp>
-      <p:sp>
-        <p:nvSpPr>
-          <p:cNvPr id="14" name="summary card 3"/>
-          <p:cNvSpPr/>
-          <p:nvPr/>
-        </p:nvSpPr>
-        <p:spPr>
-          <a:xfrm>
-            <a:off x="7863840" y="4297680"/>
-            <a:ext cx="3291840" cy="1508760"/>
-          </a:xfrm>
-          <a:prstGeom prst="roundRect">
-            <a:avLst>
-              <a:gd name="adj" fmla="val 7273"/>
-            </a:avLst>
-          </a:prstGeom>
-          <a:solidFill>
-            <a:srgbClr val="1F4252"/>
-          </a:solidFill>
-          <a:ln w="12700">
-            <a:solidFill>
-              <a:srgbClr val="1F4252"/>
-            </a:solidFill>
-            <a:prstDash val="solid"/>
-          </a:ln>
-        </p:spPr>
-      </p:sp>
-      <p:sp>
-        <p:nvSpPr>
-          <p:cNvPr id="15" name="summary number 3"/>
-          <p:cNvSpPr/>
-          <p:nvPr/>
-        </p:nvSpPr>
-        <p:spPr>
-          <a:xfrm>
-            <a:off x="8092440" y="4480560"/>
-            <a:ext cx="411480" cy="411480"/>
-          </a:xfrm>
-          <a:prstGeom prst="ellipse">
-            <a:avLst/>
-          </a:prstGeom>
-          <a:solidFill>
-            <a:srgbClr val="D9622B"/>
-          </a:solidFill>
-          <a:ln w="12700">
-            <a:solidFill>
-              <a:srgbClr val="D9622B"/>
-            </a:solidFill>
-            <a:prstDash val="solid"/>
-          </a:ln>
-        </p:spPr>
-      </p:sp>
-      <p:sp>
-        <p:nvSpPr>
-          <p:cNvPr id="16" name="Text 14"/>
-          <p:cNvSpPr txBox="1"/>
-          <p:nvPr/>
-        </p:nvSpPr>
-        <p:spPr>
-          <a:xfrm>
-            <a:off x="8092440" y="4480560"/>
-            <a:ext cx="411480" cy="411480"/>
-          </a:xfrm>
-          <a:prstGeom prst="rect">
-            <a:avLst/>
-          </a:prstGeom>
-          <a:noFill/>
-          <a:ln/>
-        </p:spPr>
-        <p:txBody>
-          <a:bodyPr wrap="square" lIns="0" tIns="0" rIns="0" bIns="0" rtlCol="0" anchor="ctr"/>
-          <a:lstStyle/>
-          <a:p>
-            <a:pPr algn="ctr" indent="0" marL="0">
-              <a:buNone/>
-            </a:pPr>
-            <a:r>
-              <a:rPr lang="en-US" sz="1500" b="1" dirty="0">
-                <a:solidFill>
-                  <a:srgbClr val="FFFFFF"/>
-                </a:solidFill>
-              </a:rPr>
-              <a:t>3</a:t>
-            </a:r>
-            <a:endParaRPr lang="en-US" sz="1500" dirty="0"/>
-          </a:p>
-        </p:txBody>
-      </p:sp>
-      <p:sp>
-        <p:nvSpPr>
-          <p:cNvPr id="17" name="Text 15"/>
-          <p:cNvSpPr txBox="1"/>
-          <p:nvPr/>
-        </p:nvSpPr>
-        <p:spPr>
-          <a:xfrm>
-            <a:off x="8641080" y="4480560"/>
-            <a:ext cx="2377440" cy="411480"/>
-          </a:xfrm>
-          <a:prstGeom prst="rect">
-            <a:avLst/>
-          </a:prstGeom>
-          <a:noFill/>
-          <a:ln/>
-        </p:spPr>
-        <p:txBody>
-          <a:bodyPr wrap="square" lIns="0" tIns="0" rIns="0" bIns="0" rtlCol="0" anchor="ctr"/>
-          <a:lstStyle/>
-          <a:p>
-            <a:pPr indent="0" marL="0">
-              <a:buNone/>
-            </a:pPr>
-            <a:r>
-              <a:rPr lang="en-US" sz="1700" b="1" dirty="0">
-                <a:solidFill>
-                  <a:srgbClr val="FFFFFF"/>
-                </a:solidFill>
-              </a:rPr>
-              <a:t>원인</a:t>
-            </a:r>
-            <a:endParaRPr lang="en-US" sz="1700" dirty="0"/>
-          </a:p>
-        </p:txBody>
-      </p:sp>
-      <p:sp>
-        <p:nvSpPr>
-          <p:cNvPr id="18" name="Text 16"/>
-          <p:cNvSpPr txBox="1"/>
-          <p:nvPr/>
-        </p:nvSpPr>
-        <p:spPr>
-          <a:xfrm>
-            <a:off x="8092440" y="4983480"/>
-            <a:ext cx="2926080" cy="731520"/>
-          </a:xfrm>
-          <a:prstGeom prst="rect">
-            <a:avLst/>
-          </a:prstGeom>
-          <a:noFill/>
-          <a:ln/>
-        </p:spPr>
-        <p:txBody>
-          <a:bodyPr wrap="square" lIns="0" tIns="0" rIns="0" bIns="0" rtlCol="0" anchor="t"/>
-          <a:lstStyle/>
-          <a:p>
-            <a:pPr indent="0" marL="0">
-              <a:buNone/>
-            </a:pPr>
-            <a:r>
-              <a:rPr lang="en-US" sz="1300" dirty="0">
-                <a:solidFill>
-                  <a:srgbClr val="DCE6EC"/>
-                </a:solidFill>
-              </a:rPr>
-              <a:t>외지 관광객 이탈</a:t>
-            </a:r>
-            <a:endParaRPr lang="en-US" sz="1300" dirty="0"/>
-          </a:p>
-          <a:p>
-            <a:pPr indent="0" marL="0">
-              <a:buNone/>
-            </a:pPr>
-            <a:r>
-              <a:rPr lang="en-US" sz="1300" dirty="0">
-                <a:solidFill>
-                  <a:srgbClr val="DCE6EC"/>
-                </a:solidFill>
-              </a:rPr>
-              <a:t>비 오면 실내(사우나 등)로 이동</a:t>
-            </a:r>
-            <a:endParaRPr lang="en-US" sz="1300" dirty="0"/>
-          </a:p>
-        </p:txBody>
-      </p:sp>
-      <p:sp>
-        <p:nvSpPr>
-          <p:cNvPr id="19" name="Text 17"/>
-          <p:cNvSpPr txBox="1"/>
-          <p:nvPr/>
-        </p:nvSpPr>
-        <p:spPr>
-          <a:xfrm>
-            <a:off x="731520" y="6080760"/>
-            <a:ext cx="10698480" cy="320040"/>
-          </a:xfrm>
-          <a:prstGeom prst="rect">
-            <a:avLst/>
-          </a:prstGeom>
-          <a:noFill/>
-          <a:ln/>
-        </p:spPr>
-        <p:txBody>
-          <a:bodyPr wrap="square" lIns="0" tIns="0" rIns="0" bIns="0" rtlCol="0" anchor="ctr"/>
-          <a:lstStyle/>
-          <a:p>
-            <a:pPr indent="0" marL="0">
-              <a:buNone/>
-            </a:pPr>
-            <a:r>
-              <a:rPr lang="en-US" sz="1100" dirty="0">
-                <a:solidFill>
-                  <a:srgbClr val="9FB3BF"/>
-                </a:solidFill>
-              </a:rPr>
-              <a:t>한계: 숙박 앱 선결제 미포함 · 6개월(비 10mm+ 26일) · 고객 거주지는 시도 단위 · 외지 비중과 피해의 관계는 레저·숙박 안에서만 확인</a:t>
-            </a:r>
-            <a:endParaRPr lang="en-US" sz="1100" dirty="0"/>
           </a:p>
         </p:txBody>
       </p:sp>

--- a/docs/slides/insight2_leisure_lodging.pptx
+++ b/docs/slides/insight2_leisure_lodging.pptx
@@ -110,14 +110,14 @@
   <p:extLst>
     <p:ext uri="{521415D9-36F7-43E2-AB2F-B90AF26B5E84}">
       <p14:sectionLst xmlns:p14="http://schemas.microsoft.com/office/powerpoint/2010/main">
-        <p14:section name="인사이트 2" id="{0ac39c49-d9bf-c251-2cec-1b2a95904615}">
+        <p14:section name="인사이트 2" id="{9e1d67b1-c5ed-d1b9-6fb1-edea4cf70f72}">
           <p14:sldIdLst>
             <p14:sldId id="256"/>
             <p14:sldId id="257"/>
             <p14:sldId id="258"/>
           </p14:sldIdLst>
         </p14:section>
-        <p14:section name="부록" id="{8fe068eb-f207-31f2-89d3-30b6a9dd437a}">
+        <p14:section name="부록" id="{60090f81-184d-e65e-fd28-d1fa79f856de}">
           <p14:sldIdLst>
             <p14:sldId id="259"/>
           </p14:sldIdLst>
@@ -159,7 +159,7 @@
           </c:tx>
           <c:spPr>
             <a:solidFill>
-              <a:srgbClr val="D9622B"/>
+              <a:srgbClr val="4A6E52"/>
             </a:solidFill>
             <a:effectLst/>
           </c:spPr>
@@ -173,7 +173,7 @@
                 <a:pPr>
                   <a:defRPr b="0" i="0" strike="noStrike" sz="1100" u="none">
                     <a:solidFill>
-                      <a:srgbClr val="1D2B33"/>
+                      <a:srgbClr val="192E26"/>
                     </a:solidFill>
                     <a:latin typeface="+mn-lt"/>
                   </a:defRPr>
@@ -194,7 +194,7 @@
             <c:bubble3D val="0"/>
             <c:spPr>
               <a:solidFill>
-                <a:srgbClr val="D9622B"/>
+                <a:srgbClr val="4A6E52"/>
               </a:solidFill>
               <a:effectLst/>
             </c:spPr>
@@ -205,7 +205,7 @@
             <c:bubble3D val="0"/>
             <c:spPr>
               <a:solidFill>
-                <a:srgbClr val="C5CBD1"/>
+                <a:srgbClr val="D5DDD1"/>
               </a:solidFill>
               <a:effectLst/>
             </c:spPr>
@@ -216,7 +216,7 @@
             <c:bubble3D val="0"/>
             <c:spPr>
               <a:solidFill>
-                <a:srgbClr val="C5CBD1"/>
+                <a:srgbClr val="D5DDD1"/>
               </a:solidFill>
               <a:effectLst/>
             </c:spPr>
@@ -227,7 +227,7 @@
             <c:bubble3D val="0"/>
             <c:spPr>
               <a:solidFill>
-                <a:srgbClr val="E9A27F"/>
+                <a:srgbClr val="96A89C"/>
               </a:solidFill>
               <a:effectLst/>
             </c:spPr>
@@ -238,7 +238,7 @@
             <c:bubble3D val="0"/>
             <c:spPr>
               <a:solidFill>
-                <a:srgbClr val="C5CBD1"/>
+                <a:srgbClr val="D5DDD1"/>
               </a:solidFill>
               <a:effectLst/>
             </c:spPr>
@@ -249,7 +249,7 @@
             <c:bubble3D val="0"/>
             <c:spPr>
               <a:solidFill>
-                <a:srgbClr val="C5CBD1"/>
+                <a:srgbClr val="D5DDD1"/>
               </a:solidFill>
               <a:effectLst/>
             </c:spPr>
@@ -260,7 +260,7 @@
             <c:bubble3D val="0"/>
             <c:spPr>
               <a:solidFill>
-                <a:srgbClr val="C5CBD1"/>
+                <a:srgbClr val="D5DDD1"/>
               </a:solidFill>
               <a:effectLst/>
             </c:spPr>
@@ -271,7 +271,7 @@
             <c:bubble3D val="0"/>
             <c:spPr>
               <a:solidFill>
-                <a:srgbClr val="C5CBD1"/>
+                <a:srgbClr val="D5DDD1"/>
               </a:solidFill>
               <a:effectLst/>
             </c:spPr>
@@ -282,7 +282,7 @@
             <c:bubble3D val="0"/>
             <c:spPr>
               <a:solidFill>
-                <a:srgbClr val="C5CBD1"/>
+                <a:srgbClr val="D5DDD1"/>
               </a:solidFill>
               <a:effectLst/>
             </c:spPr>
@@ -293,7 +293,7 @@
             <c:bubble3D val="0"/>
             <c:spPr>
               <a:solidFill>
-                <a:srgbClr val="C5CBD1"/>
+                <a:srgbClr val="D5DDD1"/>
               </a:solidFill>
               <a:effectLst/>
             </c:spPr>
@@ -304,7 +304,7 @@
             <c:bubble3D val="0"/>
             <c:spPr>
               <a:solidFill>
-                <a:srgbClr val="C5CBD1"/>
+                <a:srgbClr val="D5DDD1"/>
               </a:solidFill>
               <a:effectLst/>
             </c:spPr>
@@ -315,7 +315,7 @@
             <c:bubble3D val="0"/>
             <c:spPr>
               <a:solidFill>
-                <a:srgbClr val="C5CBD1"/>
+                <a:srgbClr val="D5DDD1"/>
               </a:solidFill>
               <a:effectLst/>
             </c:spPr>
@@ -421,7 +421,7 @@
               <a:pPr>
                 <a:defRPr b="0" i="0" strike="noStrike" sz="1100" u="none">
                   <a:solidFill>
-                    <a:srgbClr val="1D2B33"/>
+                    <a:srgbClr val="192E26"/>
                   </a:solidFill>
                   <a:latin typeface="+mn-lt"/>
                 </a:defRPr>
@@ -467,7 +467,7 @@
             <a:pPr>
               <a:defRPr sz="1200" b="0" i="0" u="none" strike="noStrike">
                 <a:solidFill>
-                  <a:srgbClr val="1D2B33"/>
+                  <a:srgbClr val="192E26"/>
                 </a:solidFill>
                 <a:latin typeface="+mn-lt"/>
               </a:defRPr>
@@ -494,7 +494,7 @@
           <c:spPr>
             <a:ln w="9525" cap="flat">
               <a:solidFill>
-                <a:srgbClr val="E3E7EA"/>
+                <a:srgbClr val="DCE3D5"/>
               </a:solidFill>
               <a:prstDash val="solid"/>
               <a:round/>
@@ -519,7 +519,7 @@
             <a:pPr>
               <a:defRPr sz="1000" b="0" i="0" u="none" strike="noStrike">
                 <a:solidFill>
-                  <a:srgbClr val="6B7780"/>
+                  <a:srgbClr val="617069"/>
                 </a:solidFill>
                 <a:latin typeface="+mn-lt"/>
               </a:defRPr>
@@ -584,7 +584,7 @@
           </c:tx>
           <c:spPr>
             <a:solidFill>
-              <a:srgbClr val="2F6FA8"/>
+              <a:srgbClr val="96A89C"/>
             </a:solidFill>
             <a:effectLst/>
           </c:spPr>
@@ -598,7 +598,7 @@
                 <a:pPr>
                   <a:defRPr b="0" i="0" strike="noStrike" sz="1100" u="none">
                     <a:solidFill>
-                      <a:srgbClr val="1D2B33"/>
+                      <a:srgbClr val="192E26"/>
                     </a:solidFill>
                     <a:latin typeface="+mn-lt"/>
                   </a:defRPr>
@@ -673,7 +673,7 @@
           </c:tx>
           <c:spPr>
             <a:solidFill>
-              <a:srgbClr val="D9622B"/>
+              <a:srgbClr val="4A6E52"/>
             </a:solidFill>
             <a:effectLst/>
           </c:spPr>
@@ -687,7 +687,7 @@
                 <a:pPr>
                   <a:defRPr b="0" i="0" strike="noStrike" sz="1100" u="none">
                     <a:solidFill>
-                      <a:srgbClr val="1D2B33"/>
+                      <a:srgbClr val="192E26"/>
                     </a:solidFill>
                     <a:latin typeface="+mn-lt"/>
                   </a:defRPr>
@@ -755,7 +755,7 @@
               <a:pPr>
                 <a:defRPr b="0" i="0" strike="noStrike" sz="1100" u="none">
                   <a:solidFill>
-                    <a:srgbClr val="1D2B33"/>
+                    <a:srgbClr val="192E26"/>
                   </a:solidFill>
                   <a:latin typeface="+mn-lt"/>
                 </a:defRPr>
@@ -801,7 +801,7 @@
             <a:pPr>
               <a:defRPr sz="1200" b="0" i="0" u="none" strike="noStrike">
                 <a:solidFill>
-                  <a:srgbClr val="1D2B33"/>
+                  <a:srgbClr val="192E26"/>
                 </a:solidFill>
                 <a:latin typeface="+mn-lt"/>
               </a:defRPr>
@@ -828,7 +828,7 @@
           <c:spPr>
             <a:ln w="9525" cap="flat">
               <a:solidFill>
-                <a:srgbClr val="E3E7EA"/>
+                <a:srgbClr val="DCE3D5"/>
               </a:solidFill>
               <a:prstDash val="solid"/>
               <a:round/>
@@ -853,7 +853,7 @@
             <a:pPr>
               <a:defRPr sz="1000" b="0" i="0" u="none" strike="noStrike">
                 <a:solidFill>
-                  <a:srgbClr val="6B7780"/>
+                  <a:srgbClr val="617069"/>
                 </a:solidFill>
                 <a:latin typeface="+mn-lt"/>
               </a:defRPr>
@@ -884,7 +884,7 @@
           <a:pPr>
             <a:defRPr sz="1200">
               <a:solidFill>
-                <a:srgbClr val="1D2B33"/>
+                <a:srgbClr val="192E26"/>
               </a:solidFill>
               <a:latin typeface="+mn-lt"/>
               <a:cs typeface="+mn-lt"/>
@@ -938,7 +938,7 @@
           </c:tx>
           <c:spPr>
             <a:solidFill>
-              <a:srgbClr val="D9622B"/>
+              <a:srgbClr val="4A6E52"/>
             </a:solidFill>
             <a:effectLst/>
           </c:spPr>
@@ -952,7 +952,7 @@
                 <a:pPr>
                   <a:defRPr b="0" i="0" strike="noStrike" sz="1100" u="none">
                     <a:solidFill>
-                      <a:srgbClr val="1D2B33"/>
+                      <a:srgbClr val="192E26"/>
                     </a:solidFill>
                     <a:latin typeface="+mn-lt"/>
                   </a:defRPr>
@@ -973,7 +973,7 @@
             <c:bubble3D val="0"/>
             <c:spPr>
               <a:solidFill>
-                <a:srgbClr val="D9622B"/>
+                <a:srgbClr val="4A6E52"/>
               </a:solidFill>
               <a:effectLst/>
             </c:spPr>
@@ -984,7 +984,7 @@
             <c:bubble3D val="0"/>
             <c:spPr>
               <a:solidFill>
-                <a:srgbClr val="D9622B"/>
+                <a:srgbClr val="4A6E52"/>
               </a:solidFill>
               <a:effectLst/>
             </c:spPr>
@@ -995,7 +995,7 @@
             <c:bubble3D val="0"/>
             <c:spPr>
               <a:solidFill>
-                <a:srgbClr val="D9622B"/>
+                <a:srgbClr val="4A6E52"/>
               </a:solidFill>
               <a:effectLst/>
             </c:spPr>
@@ -1006,7 +1006,7 @@
             <c:bubble3D val="0"/>
             <c:spPr>
               <a:solidFill>
-                <a:srgbClr val="C5CBD1"/>
+                <a:srgbClr val="D5DDD1"/>
               </a:solidFill>
               <a:effectLst/>
             </c:spPr>
@@ -1017,7 +1017,7 @@
             <c:bubble3D val="0"/>
             <c:spPr>
               <a:solidFill>
-                <a:srgbClr val="C5CBD1"/>
+                <a:srgbClr val="D5DDD1"/>
               </a:solidFill>
               <a:effectLst/>
             </c:spPr>
@@ -1028,7 +1028,7 @@
             <c:bubble3D val="0"/>
             <c:spPr>
               <a:solidFill>
-                <a:srgbClr val="C5CBD1"/>
+                <a:srgbClr val="D5DDD1"/>
               </a:solidFill>
               <a:effectLst/>
             </c:spPr>
@@ -1039,7 +1039,7 @@
             <c:bubble3D val="0"/>
             <c:spPr>
               <a:solidFill>
-                <a:srgbClr val="C5CBD1"/>
+                <a:srgbClr val="D5DDD1"/>
               </a:solidFill>
               <a:effectLst/>
             </c:spPr>
@@ -1050,7 +1050,7 @@
             <c:bubble3D val="0"/>
             <c:spPr>
               <a:solidFill>
-                <a:srgbClr val="2F6FA8"/>
+                <a:srgbClr val="9DBB45"/>
               </a:solidFill>
               <a:effectLst/>
             </c:spPr>
@@ -1132,7 +1132,7 @@
               <a:pPr>
                 <a:defRPr b="0" i="0" strike="noStrike" sz="1100" u="none">
                   <a:solidFill>
-                    <a:srgbClr val="1D2B33"/>
+                    <a:srgbClr val="192E26"/>
                   </a:solidFill>
                   <a:latin typeface="+mn-lt"/>
                 </a:defRPr>
@@ -1178,7 +1178,7 @@
             <a:pPr>
               <a:defRPr sz="1200" b="0" i="0" u="none" strike="noStrike">
                 <a:solidFill>
-                  <a:srgbClr val="1D2B33"/>
+                  <a:srgbClr val="192E26"/>
                 </a:solidFill>
                 <a:latin typeface="+mn-lt"/>
               </a:defRPr>
@@ -1205,7 +1205,7 @@
           <c:spPr>
             <a:ln w="9525" cap="flat">
               <a:solidFill>
-                <a:srgbClr val="E3E7EA"/>
+                <a:srgbClr val="DCE3D5"/>
               </a:solidFill>
               <a:prstDash val="solid"/>
               <a:round/>
@@ -1230,7 +1230,7 @@
             <a:pPr>
               <a:defRPr sz="1000" b="0" i="0" u="none" strike="noStrike">
                 <a:solidFill>
-                  <a:srgbClr val="6B7780"/>
+                  <a:srgbClr val="617069"/>
                 </a:solidFill>
                 <a:latin typeface="+mn-lt"/>
               </a:defRPr>
@@ -2004,7 +2004,7 @@
     <p:bg>
       <p:bgPr>
         <a:solidFill>
-          <a:srgbClr val="FFFFFF"/>
+          <a:srgbClr val="F6F9F1"/>
         </a:solidFill>
       </p:bgPr>
     </p:bg>
@@ -2024,14 +2024,39 @@
       </p:grpSpPr>
       <p:sp>
         <p:nvSpPr>
-          <p:cNvPr id="2" name="Text 0"/>
+          <p:cNvPr id="2" name="Shape 0"/>
           <p:cNvSpPr/>
           <p:nvPr/>
         </p:nvSpPr>
         <p:spPr>
           <a:xfrm>
-            <a:off x="548640" y="320040"/>
-            <a:ext cx="7315200" cy="274320"/>
+            <a:off x="548640" y="393192"/>
+            <a:ext cx="292608" cy="82296"/>
+          </a:xfrm>
+          <a:prstGeom prst="rect">
+            <a:avLst/>
+          </a:prstGeom>
+          <a:solidFill>
+            <a:srgbClr val="BAD666"/>
+          </a:solidFill>
+          <a:ln w="12700">
+            <a:solidFill>
+              <a:srgbClr val="BAD666"/>
+            </a:solidFill>
+            <a:prstDash val="solid"/>
+          </a:ln>
+        </p:spPr>
+      </p:sp>
+      <p:sp>
+        <p:nvSpPr>
+          <p:cNvPr id="3" name="Text 1"/>
+          <p:cNvSpPr/>
+          <p:nvPr/>
+        </p:nvSpPr>
+        <p:spPr>
+          <a:xfrm>
+            <a:off x="932688" y="301752"/>
+            <a:ext cx="5486400" cy="274320"/>
           </a:xfrm>
           <a:prstGeom prst="rect">
             <a:avLst/>
@@ -2047,29 +2072,29 @@
               <a:buNone/>
             </a:pPr>
             <a:r>
-              <a:rPr lang="en-US" sz="1200" b="1" dirty="0">
-                <a:solidFill>
-                  <a:schemeClr val="accent1"/>
+              <a:rPr lang="en-US" sz="1000" b="1" dirty="0">
+                <a:solidFill>
+                  <a:schemeClr val="tx1"/>
                 </a:solidFill>
               </a:rPr>
-              <a:t>인사이트 2 · 레저·숙박의 비 피해</a:t>
-            </a:r>
-            <a:endParaRPr lang="en-US" sz="1200" dirty="0"/>
+              <a:t>기후위기와 취약 상권 분석</a:t>
+            </a:r>
+            <a:endParaRPr lang="en-US" sz="1000" dirty="0"/>
           </a:p>
         </p:txBody>
       </p:sp>
       <p:sp>
         <p:nvSpPr>
-          <p:cNvPr id="3" name="Text 1"/>
+          <p:cNvPr id="4" name="Text 2"/>
           <p:cNvSpPr/>
           <p:nvPr>
-            <p:ph idx="101" type="title" hasCustomPrompt="1"/>
+            <p:ph idx="102" type="title" hasCustomPrompt="1"/>
           </p:nvPr>
         </p:nvSpPr>
         <p:spPr>
           <a:xfrm>
-            <a:off x="548640" y="640080"/>
-            <a:ext cx="11064240" cy="822960"/>
+            <a:off x="548640" y="621792"/>
+            <a:ext cx="11064240" cy="566928"/>
           </a:xfrm>
           <a:prstGeom prst="rect">
             <a:avLst/>
@@ -2082,7 +2107,7 @@
           <a:lstStyle>
             <a:lvl1pPr algn="l" indent="0" marL="0">
               <a:buNone/>
-              <a:defRPr lang="en-US" sz="3000" b="1" dirty="0">
+              <a:defRPr lang="en-US" sz="2800" b="1" dirty="0">
                 <a:solidFill>
                   <a:schemeClr val="tx1"/>
                 </a:solidFill>
@@ -2093,13 +2118,75 @@
             <a:pPr algn="l" indent="0" marL="0">
               <a:buNone/>
             </a:pPr>
-            <a:endParaRPr lang="en-US" sz="3000" dirty="0"/>
+            <a:endParaRPr lang="en-US" sz="2800" dirty="0"/>
           </a:p>
         </p:txBody>
       </p:sp>
       <p:sp>
         <p:nvSpPr>
-          <p:cNvPr id="4" name="Text 1"/>
+          <p:cNvPr id="5" name="Text 2"/>
+          <p:cNvSpPr/>
+          <p:nvPr>
+            <p:ph idx="103" type="body" hasCustomPrompt="1"/>
+          </p:nvPr>
+        </p:nvSpPr>
+        <p:spPr>
+          <a:xfrm>
+            <a:off x="548640" y="1188720"/>
+            <a:ext cx="11064240" cy="320040"/>
+          </a:xfrm>
+          <a:prstGeom prst="rect">
+            <a:avLst/>
+          </a:prstGeom>
+          <a:noFill/>
+          <a:ln/>
+        </p:spPr>
+        <p:txBody>
+          <a:bodyPr wrap="square" rtlCol="0"/>
+          <a:lstStyle>
+            <a:lvl1pPr algn="l" indent="0" marL="0">
+              <a:buNone/>
+              <a:defRPr lang="en-US" sz="1300" dirty="0">
+                <a:solidFill>
+                  <a:srgbClr val="617069"/>
+                </a:solidFill>
+              </a:defRPr>
+            </a:lvl1pPr>
+          </a:lstStyle>
+          <a:p>
+            <a:pPr algn="l" indent="0" marL="0">
+              <a:buNone/>
+            </a:pPr>
+            <a:endParaRPr lang="en-US" sz="1300" dirty="0"/>
+          </a:p>
+        </p:txBody>
+      </p:sp>
+      <p:sp>
+        <p:nvSpPr>
+          <p:cNvPr id="6" name="Shape 2"/>
+          <p:cNvSpPr/>
+          <p:nvPr/>
+        </p:nvSpPr>
+        <p:spPr>
+          <a:xfrm>
+            <a:off x="548640" y="6263640"/>
+            <a:ext cx="11091672" cy="0"/>
+          </a:xfrm>
+          <a:prstGeom prst="line">
+            <a:avLst/>
+          </a:prstGeom>
+          <a:noFill/>
+          <a:ln w="9525">
+            <a:solidFill>
+              <a:srgbClr val="DCE3D5"/>
+            </a:solidFill>
+            <a:prstDash val="solid"/>
+          </a:ln>
+        </p:spPr>
+      </p:sp>
+      <p:sp>
+        <p:nvSpPr>
+          <p:cNvPr id="7" name="Text 3"/>
           <p:cNvSpPr/>
           <p:nvPr/>
         </p:nvSpPr>
@@ -2124,7 +2211,7 @@
             <a:r>
               <a:rPr lang="en-US" sz="1000" dirty="0">
                 <a:solidFill>
-                  <a:srgbClr val="6B7780"/>
+                  <a:srgbClr val="617069"/>
                 </a:solidFill>
               </a:rPr>
               <a:t>자료: 신한카드 춘천 개인 결제(2025.7~12, 상권 업종), 기상청 ASOS 춘천 · 주·요일·공휴일·폭염 통제 회귀</a:t>
@@ -2145,7 +2232,7 @@
         </p:nvSpPr>
         <p:spPr>
           <a:xfrm>
-            <a:off x="11247120" y="6355080"/>
+            <a:off x="11183112" y="6355080"/>
             <a:ext cx="457200" cy="274320"/>
           </a:xfrm>
           <a:prstGeom prst="rect">
@@ -2161,9 +2248,9 @@
           <a:bodyPr/>
           <a:lstStyle>
             <a:lvl1pPr>
-              <a:defRPr sz="1000">
-                <a:solidFill>
-                  <a:srgbClr val="6B7780"/>
+              <a:defRPr sz="1100">
+                <a:solidFill>
+                  <a:srgbClr val="192E26"/>
                 </a:solidFill>
               </a:defRPr>
             </a:lvl1pPr>
@@ -2171,7 +2258,7 @@
           <a:p>
             <a:pPr algn="r"/>
             <a:fld id="{F7021451-1387-4CA6-816F-3879F97B5CBC}" type="slidenum">
-              <a:rPr b="0" lang="en-US"/>
+              <a:rPr b="1" lang="en-US"/>
               <a:t>1002</a:t>
             </a:fld>
             <a:endParaRPr lang="en-US"/>
@@ -2215,7 +2302,7 @@
         </p:nvSpPr>
         <p:spPr>
           <a:xfrm>
-            <a:off x="11247120" y="6355080"/>
+            <a:off x="11183112" y="6355080"/>
             <a:ext cx="457200" cy="274320"/>
           </a:xfrm>
           <a:prstGeom prst="rect">
@@ -2231,9 +2318,9 @@
           <a:bodyPr/>
           <a:lstStyle>
             <a:lvl1pPr>
-              <a:defRPr sz="1000">
-                <a:solidFill>
-                  <a:srgbClr val="6B7780"/>
+              <a:defRPr sz="1100">
+                <a:solidFill>
+                  <a:srgbClr val="192E26"/>
                 </a:solidFill>
               </a:defRPr>
             </a:lvl1pPr>
@@ -2241,7 +2328,7 @@
           <a:p>
             <a:pPr algn="r"/>
             <a:fld id="{F7021451-1387-4CA6-816F-3879F97B5CBC}" type="slidenum">
-              <a:rPr b="0" lang="en-US"/>
+              <a:rPr b="1" lang="en-US"/>
               <a:t>null</a:t>
             </a:fld>
             <a:endParaRPr lang="en-US"/>
@@ -2528,16 +2615,16 @@
       </p:grpSpPr>
       <p:sp>
         <p:nvSpPr>
-          <p:cNvPr id="2" name="Text 1"/>
+          <p:cNvPr id="2" name="Text 2"/>
           <p:cNvSpPr/>
           <p:nvPr>
-            <p:ph idx="101" type="title" hasCustomPrompt="1"/>
+            <p:ph idx="102" type="title" hasCustomPrompt="1"/>
           </p:nvPr>
         </p:nvSpPr>
         <p:spPr>
           <a:xfrm>
-            <a:off x="548640" y="640080"/>
-            <a:ext cx="11064240" cy="822960"/>
+            <a:off x="548640" y="621792"/>
+            <a:ext cx="11064240" cy="566928"/>
           </a:xfrm>
           <a:prstGeom prst="rect">
             <a:avLst/>
@@ -2553,20 +2640,58 @@
               <a:buNone/>
             </a:pPr>
             <a:r>
-              <a:rPr lang="en-US" sz="3000" b="1" dirty="0">
+              <a:rPr lang="en-US" sz="2800" b="1" dirty="0">
                 <a:solidFill>
                   <a:schemeClr val="tx1"/>
                 </a:solidFill>
               </a:rPr>
-              <a:t>비 오는 날 야외·레저 매출 40% 감소, 업종 중 최대</a:t>
-            </a:r>
-            <a:endParaRPr lang="en-US" sz="3000" dirty="0"/>
+              <a:t>인사이트 2 · 비 오면 야외·레저 매출 40% 감소</a:t>
+            </a:r>
+            <a:endParaRPr lang="en-US" sz="2800" dirty="0"/>
           </a:p>
         </p:txBody>
       </p:sp>
       <p:sp>
         <p:nvSpPr>
-          <p:cNvPr id="3" name="chart caption"/>
+          <p:cNvPr id="3" name="Text 2"/>
+          <p:cNvSpPr/>
+          <p:nvPr>
+            <p:ph idx="103" type="body" hasCustomPrompt="1"/>
+          </p:nvPr>
+        </p:nvSpPr>
+        <p:spPr>
+          <a:xfrm>
+            <a:off x="548640" y="1188720"/>
+            <a:ext cx="11064240" cy="320040"/>
+          </a:xfrm>
+          <a:prstGeom prst="rect">
+            <a:avLst/>
+          </a:prstGeom>
+          <a:noFill/>
+          <a:ln/>
+        </p:spPr>
+        <p:txBody>
+          <a:bodyPr wrap="square" lIns="0" tIns="0" rIns="0" bIns="0" rtlCol="0" anchor="t"/>
+          <a:lstStyle/>
+          <a:p>
+            <a:pPr algn="l" indent="0" marL="0">
+              <a:buNone/>
+            </a:pPr>
+            <a:r>
+              <a:rPr lang="en-US" sz="1300" dirty="0">
+                <a:solidFill>
+                  <a:srgbClr val="617069"/>
+                </a:solidFill>
+              </a:rPr>
+              <a:t>2025년 7–12월 · 일 강수량 10mm 이상을 '비 오는 날'로 구분 · 업종군 12개를 주·요일·공휴일·기온 통제 후 비교</a:t>
+            </a:r>
+            <a:endParaRPr lang="en-US" sz="1300" dirty="0"/>
+          </a:p>
+        </p:txBody>
+      </p:sp>
+      <p:sp>
+        <p:nvSpPr>
+          <p:cNvPr id="4" name="chart caption"/>
           <p:cNvSpPr txBox="1"/>
           <p:nvPr/>
         </p:nvSpPr>
@@ -2591,7 +2716,7 @@
             <a:r>
               <a:rPr lang="en-US" sz="1300" b="1" dirty="0">
                 <a:solidFill>
-                  <a:srgbClr val="1D2B33"/>
+                  <a:srgbClr val="192E26"/>
                 </a:solidFill>
               </a:rPr>
               <a:t>업종군별 비 10mm+ 날 매출 변화 (비 안 온 날 대비)</a:t>
@@ -2602,7 +2727,7 @@
       </p:sp>
       <p:graphicFrame>
         <p:nvGraphicFramePr>
-          <p:cNvPr id="4" name="group rain chart" descr=""/>
+          <p:cNvPr id="5" name="group rain chart" descr=""/>
           <p:cNvGraphicFramePr/>
           <p:nvPr/>
         </p:nvGraphicFramePr>
@@ -2618,7 +2743,7 @@
       </p:graphicFrame>
       <p:sp>
         <p:nvSpPr>
-          <p:cNvPr id="5" name="Text 2"/>
+          <p:cNvPr id="6" name="Text 3"/>
           <p:cNvSpPr txBox="1"/>
           <p:nvPr/>
         </p:nvSpPr>
@@ -2643,7 +2768,7 @@
             <a:r>
               <a:rPr lang="en-US" sz="6400" b="1" dirty="0">
                 <a:solidFill>
-                  <a:srgbClr val="D9622B"/>
+                  <a:srgbClr val="4A6E52"/>
                 </a:solidFill>
               </a:rPr>
               <a:t>-40%</a:t>
@@ -2654,7 +2779,7 @@
       </p:sp>
       <p:sp>
         <p:nvSpPr>
-          <p:cNvPr id="6" name="Text 3"/>
+          <p:cNvPr id="7" name="Text 4"/>
           <p:cNvSpPr txBox="1"/>
           <p:nvPr/>
         </p:nvSpPr>
@@ -2679,7 +2804,7 @@
             <a:r>
               <a:rPr lang="en-US" sz="1400" b="1" dirty="0">
                 <a:solidFill>
-                  <a:srgbClr val="1D2B33"/>
+                  <a:srgbClr val="192E26"/>
                 </a:solidFill>
               </a:rPr>
               <a:t>야외·레저</a:t>
@@ -2693,7 +2818,7 @@
             <a:r>
               <a:rPr lang="en-US" sz="1400" dirty="0">
                 <a:solidFill>
-                  <a:srgbClr val="1D2B33"/>
+                  <a:srgbClr val="192E26"/>
                 </a:solidFill>
               </a:rPr>
               <a:t>비 10mm+ 날 매출 변화</a:t>
@@ -2707,7 +2832,7 @@
             <a:r>
               <a:rPr lang="en-US" sz="1200" dirty="0">
                 <a:solidFill>
-                  <a:srgbClr val="6B7780"/>
+                  <a:srgbClr val="617069"/>
                 </a:solidFill>
               </a:rPr>
               <a:t>95% 구간 -47% ~ -33%</a:t>
@@ -2718,7 +2843,7 @@
       </p:sp>
       <p:sp>
         <p:nvSpPr>
-          <p:cNvPr id="7" name="Text 4"/>
+          <p:cNvPr id="8" name="Text 5"/>
           <p:cNvSpPr txBox="1"/>
           <p:nvPr/>
         </p:nvSpPr>
@@ -2747,7 +2872,7 @@
             <a:r>
               <a:rPr lang="en-US" sz="1400" dirty="0">
                 <a:solidFill>
-                  <a:srgbClr val="1D2B33"/>
+                  <a:srgbClr val="192E26"/>
                 </a:solidFill>
               </a:rPr>
               <a:t>매출 절반을 차지하는 외식·생활소매보다 6~8배 큰 감소</a:t>
@@ -2765,7 +2890,7 @@
             <a:r>
               <a:rPr lang="en-US" sz="1400" dirty="0">
                 <a:solidFill>
-                  <a:srgbClr val="1D2B33"/>
+                  <a:srgbClr val="192E26"/>
                 </a:solidFill>
               </a:rPr>
               <a:t>숙박·여행은 당일 감소가 불확실하고, 손실은 비 온 뒤에 드러남 (다음 장)</a:t>
@@ -2776,13 +2901,13 @@
       </p:sp>
       <p:sp>
         <p:nvSpPr>
-          <p:cNvPr id="8" name="footnote"/>
+          <p:cNvPr id="9" name="footnote"/>
           <p:cNvSpPr txBox="1"/>
           <p:nvPr/>
         </p:nvSpPr>
         <p:spPr>
           <a:xfrm>
-            <a:off x="8229600" y="5349240"/>
+            <a:off x="8229600" y="5257800"/>
             <a:ext cx="3474720" cy="914400"/>
           </a:xfrm>
           <a:prstGeom prst="rect">
@@ -2801,7 +2926,7 @@
             <a:r>
               <a:rPr lang="en-US" sz="1000" dirty="0">
                 <a:solidFill>
-                  <a:srgbClr val="6B7780"/>
+                  <a:srgbClr val="617069"/>
                 </a:solidFill>
               </a:rPr>
               <a:t>쓴 컬럼: 날짜·업종·결제금액·고객 거주지 (부록 A)</a:t>
@@ -2815,7 +2940,7 @@
             <a:r>
               <a:rPr lang="en-US" sz="1000" dirty="0">
                 <a:solidFill>
-                  <a:srgbClr val="6B7780"/>
+                  <a:srgbClr val="617069"/>
                 </a:solidFill>
               </a:rPr>
               <a:t>기온을 연속값으로 통제해도 야외·레저 -34% (p&lt;0.001)</a:t>
@@ -2836,7 +2961,7 @@
         </p:nvSpPr>
         <p:spPr>
           <a:xfrm>
-            <a:off x="11247120" y="6355080"/>
+            <a:off x="11183112" y="6355080"/>
             <a:ext cx="457200" cy="274320"/>
           </a:xfrm>
           <a:prstGeom prst="rect">
@@ -2852,9 +2977,9 @@
           <a:bodyPr/>
           <a:lstStyle>
             <a:lvl1pPr>
-              <a:defRPr sz="1000">
-                <a:solidFill>
-                  <a:srgbClr val="6B7780"/>
+              <a:defRPr sz="1100">
+                <a:solidFill>
+                  <a:srgbClr val="192E26"/>
                 </a:solidFill>
               </a:defRPr>
             </a:lvl1pPr>
@@ -2862,7 +2987,7 @@
           <a:p>
             <a:pPr algn="r"/>
             <a:fld id="{F7021451-1387-4CA6-816F-3879F97B5CBC}" type="slidenum">
-              <a:rPr b="0" lang="en-US"/>
+              <a:rPr b="1" lang="en-US"/>
               <a:t>1</a:t>
             </a:fld>
             <a:endParaRPr lang="en-US"/>
@@ -2896,16 +3021,16 @@
       </p:grpSpPr>
       <p:sp>
         <p:nvSpPr>
-          <p:cNvPr id="2" name="Text 1"/>
+          <p:cNvPr id="2" name="Text 2"/>
           <p:cNvSpPr/>
           <p:nvPr>
-            <p:ph idx="101" type="title" hasCustomPrompt="1"/>
+            <p:ph idx="102" type="title" hasCustomPrompt="1"/>
           </p:nvPr>
         </p:nvSpPr>
         <p:spPr>
           <a:xfrm>
-            <a:off x="548640" y="640080"/>
-            <a:ext cx="11064240" cy="822960"/>
+            <a:off x="548640" y="621792"/>
+            <a:ext cx="11064240" cy="566928"/>
           </a:xfrm>
           <a:prstGeom prst="rect">
             <a:avLst/>
@@ -2921,20 +3046,58 @@
               <a:buNone/>
             </a:pPr>
             <a:r>
-              <a:rPr lang="en-US" sz="3000" b="1" dirty="0">
+              <a:rPr lang="en-US" sz="2800" b="1" dirty="0">
                 <a:solidFill>
                   <a:schemeClr val="tx1"/>
                 </a:solidFill>
               </a:rPr>
-              <a:t>레저는 당일에, 숙박은 며칠에 걸쳐 무너지고 회복하지 못한다</a:t>
-            </a:r>
-            <a:endParaRPr lang="en-US" sz="3000" dirty="0"/>
+              <a:t>인사이트 2 · 레저·숙박은 비 온 뒤 회복하지 못한다</a:t>
+            </a:r>
+            <a:endParaRPr lang="en-US" sz="2800" dirty="0"/>
           </a:p>
         </p:txBody>
       </p:sp>
       <p:sp>
         <p:nvSpPr>
-          <p:cNvPr id="3" name="chart caption"/>
+          <p:cNvPr id="3" name="Text 2"/>
+          <p:cNvSpPr/>
+          <p:nvPr>
+            <p:ph idx="103" type="body" hasCustomPrompt="1"/>
+          </p:nvPr>
+        </p:nvSpPr>
+        <p:spPr>
+          <a:xfrm>
+            <a:off x="548640" y="1188720"/>
+            <a:ext cx="11064240" cy="320040"/>
+          </a:xfrm>
+          <a:prstGeom prst="rect">
+            <a:avLst/>
+          </a:prstGeom>
+          <a:noFill/>
+          <a:ln/>
+        </p:spPr>
+        <p:txBody>
+          <a:bodyPr wrap="square" lIns="0" tIns="0" rIns="0" bIns="0" rtlCol="0" anchor="t"/>
+          <a:lstStyle/>
+          <a:p>
+            <a:pPr algn="l" indent="0" marL="0">
+              <a:buNone/>
+            </a:pPr>
+            <a:r>
+              <a:rPr lang="en-US" sz="1300" dirty="0">
+                <a:solidFill>
+                  <a:srgbClr val="617069"/>
+                </a:solidFill>
+              </a:rPr>
+              <a:t>비 온 당일과 3일 뒤까지의 누적 매출 변화 비교 · 레저는 당일에, 숙박은 며칠에 걸쳐 감소 · 생활소매는 회복</a:t>
+            </a:r>
+            <a:endParaRPr lang="en-US" sz="1300" dirty="0"/>
+          </a:p>
+        </p:txBody>
+      </p:sp>
+      <p:sp>
+        <p:nvSpPr>
+          <p:cNvPr id="4" name="chart caption"/>
           <p:cNvSpPr txBox="1"/>
           <p:nvPr/>
         </p:nvSpPr>
@@ -2959,7 +3122,7 @@
             <a:r>
               <a:rPr lang="en-US" sz="1300" b="1" dirty="0">
                 <a:solidFill>
-                  <a:srgbClr val="1D2B33"/>
+                  <a:srgbClr val="192E26"/>
                 </a:solidFill>
               </a:rPr>
               <a:t>비 10mm+ 날 매출 변화: 당일 vs 3일 뒤까지 누적</a:t>
@@ -2970,7 +3133,7 @@
       </p:sp>
       <p:graphicFrame>
         <p:nvGraphicFramePr>
-          <p:cNvPr id="4" name="recovery chart" descr=""/>
+          <p:cNvPr id="5" name="recovery chart" descr=""/>
           <p:cNvGraphicFramePr/>
           <p:nvPr/>
         </p:nvGraphicFramePr>
@@ -2986,7 +3149,7 @@
       </p:graphicFrame>
       <p:sp>
         <p:nvSpPr>
-          <p:cNvPr id="5" name="recovery card 1"/>
+          <p:cNvPr id="6" name="recovery card 1"/>
           <p:cNvSpPr/>
           <p:nvPr/>
         </p:nvSpPr>
@@ -3001,11 +3164,11 @@
             </a:avLst>
           </a:prstGeom>
           <a:solidFill>
-            <a:srgbClr val="F3F6F8"/>
+            <a:srgbClr val="EAF0E3"/>
           </a:solidFill>
           <a:ln w="12700">
             <a:solidFill>
-              <a:srgbClr val="F3F6F8"/>
+              <a:srgbClr val="EAF0E3"/>
             </a:solidFill>
             <a:prstDash val="solid"/>
           </a:ln>
@@ -3013,7 +3176,7 @@
       </p:sp>
       <p:sp>
         <p:nvSpPr>
-          <p:cNvPr id="6" name="Text 3"/>
+          <p:cNvPr id="7" name="Text 4"/>
           <p:cNvSpPr txBox="1"/>
           <p:nvPr/>
         </p:nvSpPr>
@@ -3038,7 +3201,7 @@
             <a:r>
               <a:rPr lang="en-US" sz="1400" b="1" dirty="0">
                 <a:solidFill>
-                  <a:srgbClr val="1D2B33"/>
+                  <a:srgbClr val="192E26"/>
                 </a:solidFill>
               </a:rPr>
               <a:t>야외·레저</a:t>
@@ -3052,7 +3215,7 @@
             <a:r>
               <a:rPr lang="en-US" sz="1800" b="1" dirty="0">
                 <a:solidFill>
-                  <a:srgbClr val="D9622B"/>
+                  <a:srgbClr val="4A6E52"/>
                 </a:solidFill>
               </a:rPr>
               <a:t>-40.4% → -37.2%</a:t>
@@ -3066,7 +3229,7 @@
             <a:r>
               <a:rPr lang="en-US" sz="1300" dirty="0">
                 <a:solidFill>
-                  <a:srgbClr val="1D2B33"/>
+                  <a:srgbClr val="192E26"/>
                 </a:solidFill>
               </a:rPr>
               <a:t>잃은 손님이 돌아오지 않음</a:t>
@@ -3077,7 +3240,7 @@
       </p:sp>
       <p:sp>
         <p:nvSpPr>
-          <p:cNvPr id="7" name="recovery card 2"/>
+          <p:cNvPr id="8" name="recovery card 2"/>
           <p:cNvSpPr/>
           <p:nvPr/>
         </p:nvSpPr>
@@ -3092,11 +3255,11 @@
             </a:avLst>
           </a:prstGeom>
           <a:solidFill>
-            <a:srgbClr val="F3F6F8"/>
+            <a:srgbClr val="EAF0E3"/>
           </a:solidFill>
           <a:ln w="12700">
             <a:solidFill>
-              <a:srgbClr val="F3F6F8"/>
+              <a:srgbClr val="EAF0E3"/>
             </a:solidFill>
             <a:prstDash val="solid"/>
           </a:ln>
@@ -3104,7 +3267,7 @@
       </p:sp>
       <p:sp>
         <p:nvSpPr>
-          <p:cNvPr id="8" name="Text 5"/>
+          <p:cNvPr id="9" name="Text 6"/>
           <p:cNvSpPr txBox="1"/>
           <p:nvPr/>
         </p:nvSpPr>
@@ -3129,7 +3292,7 @@
             <a:r>
               <a:rPr lang="en-US" sz="1400" b="1" dirty="0">
                 <a:solidFill>
-                  <a:srgbClr val="1D2B33"/>
+                  <a:srgbClr val="192E26"/>
                 </a:solidFill>
               </a:rPr>
               <a:t>숙박·여행</a:t>
@@ -3143,7 +3306,7 @@
             <a:r>
               <a:rPr lang="en-US" sz="1800" b="1" dirty="0">
                 <a:solidFill>
-                  <a:srgbClr val="D9622B"/>
+                  <a:srgbClr val="4A6E52"/>
                 </a:solidFill>
               </a:rPr>
               <a:t>-15.5% → -37.9%</a:t>
@@ -3157,7 +3320,7 @@
             <a:r>
               <a:rPr lang="en-US" sz="1300" dirty="0">
                 <a:solidFill>
-                  <a:srgbClr val="1D2B33"/>
+                  <a:srgbClr val="192E26"/>
                 </a:solidFill>
               </a:rPr>
               <a:t>비 온 뒤에도 손실이 커짐</a:t>
@@ -3168,7 +3331,7 @@
       </p:sp>
       <p:sp>
         <p:nvSpPr>
-          <p:cNvPr id="9" name="recovery card 3"/>
+          <p:cNvPr id="10" name="recovery card 3"/>
           <p:cNvSpPr/>
           <p:nvPr/>
         </p:nvSpPr>
@@ -3183,11 +3346,11 @@
             </a:avLst>
           </a:prstGeom>
           <a:solidFill>
-            <a:srgbClr val="F3F6F8"/>
+            <a:srgbClr val="EAF0E3"/>
           </a:solidFill>
           <a:ln w="12700">
             <a:solidFill>
-              <a:srgbClr val="F3F6F8"/>
+              <a:srgbClr val="EAF0E3"/>
             </a:solidFill>
             <a:prstDash val="solid"/>
           </a:ln>
@@ -3195,7 +3358,7 @@
       </p:sp>
       <p:sp>
         <p:nvSpPr>
-          <p:cNvPr id="10" name="Text 7"/>
+          <p:cNvPr id="11" name="Text 8"/>
           <p:cNvSpPr txBox="1"/>
           <p:nvPr/>
         </p:nvSpPr>
@@ -3220,7 +3383,7 @@
             <a:r>
               <a:rPr lang="en-US" sz="1400" b="1" dirty="0">
                 <a:solidFill>
-                  <a:srgbClr val="1D2B33"/>
+                  <a:srgbClr val="192E26"/>
                 </a:solidFill>
               </a:rPr>
               <a:t>생활소매</a:t>
@@ -3234,7 +3397,7 @@
             <a:r>
               <a:rPr lang="en-US" sz="1800" b="1" dirty="0">
                 <a:solidFill>
-                  <a:srgbClr val="2F6FA8"/>
+                  <a:srgbClr val="5F7F25"/>
                 </a:solidFill>
               </a:rPr>
               <a:t>-4.8% → -0.5%</a:t>
@@ -3248,7 +3411,7 @@
             <a:r>
               <a:rPr lang="en-US" sz="1300" dirty="0">
                 <a:solidFill>
-                  <a:srgbClr val="1D2B33"/>
+                  <a:srgbClr val="192E26"/>
                 </a:solidFill>
               </a:rPr>
               <a:t>1~3일 안에 반등해 손실을 메움</a:t>
@@ -3259,13 +3422,13 @@
       </p:sp>
       <p:sp>
         <p:nvSpPr>
-          <p:cNvPr id="11" name="footnote"/>
+          <p:cNvPr id="12" name="footnote"/>
           <p:cNvSpPr txBox="1"/>
           <p:nvPr/>
         </p:nvSpPr>
         <p:spPr>
           <a:xfrm>
-            <a:off x="8229600" y="5669280"/>
+            <a:off x="8229600" y="5577840"/>
             <a:ext cx="3474720" cy="594360"/>
           </a:xfrm>
           <a:prstGeom prst="rect">
@@ -3284,7 +3447,7 @@
             <a:r>
               <a:rPr lang="en-US" sz="1000" dirty="0">
                 <a:solidFill>
-                  <a:srgbClr val="6B7780"/>
+                  <a:srgbClr val="617069"/>
                 </a:solidFill>
               </a:rPr>
               <a:t>누적 95% 구간: 레저 -55%~-12%, 숙박 -56%~-12%</a:t>
@@ -3298,7 +3461,7 @@
             <a:r>
               <a:rPr lang="en-US" sz="1000" dirty="0">
                 <a:solidFill>
-                  <a:srgbClr val="6B7780"/>
+                  <a:srgbClr val="617069"/>
                 </a:solidFill>
               </a:rPr>
               <a:t>생활소매 1~3일 뒤 반등 p = 0.04</a:t>
@@ -3319,7 +3482,7 @@
         </p:nvSpPr>
         <p:spPr>
           <a:xfrm>
-            <a:off x="11247120" y="6355080"/>
+            <a:off x="11183112" y="6355080"/>
             <a:ext cx="457200" cy="274320"/>
           </a:xfrm>
           <a:prstGeom prst="rect">
@@ -3335,9 +3498,9 @@
           <a:bodyPr/>
           <a:lstStyle>
             <a:lvl1pPr>
-              <a:defRPr sz="1000">
-                <a:solidFill>
-                  <a:srgbClr val="6B7780"/>
+              <a:defRPr sz="1100">
+                <a:solidFill>
+                  <a:srgbClr val="192E26"/>
                 </a:solidFill>
               </a:defRPr>
             </a:lvl1pPr>
@@ -3345,7 +3508,7 @@
           <a:p>
             <a:pPr algn="r"/>
             <a:fld id="{F7021451-1387-4CA6-816F-3879F97B5CBC}" type="slidenum">
-              <a:rPr b="0" lang="en-US"/>
+              <a:rPr b="1" lang="en-US"/>
               <a:t>2</a:t>
             </a:fld>
             <a:endParaRPr lang="en-US"/>
@@ -3379,16 +3542,16 @@
       </p:grpSpPr>
       <p:sp>
         <p:nvSpPr>
-          <p:cNvPr id="2" name="Text 1"/>
+          <p:cNvPr id="2" name="Text 2"/>
           <p:cNvSpPr/>
           <p:nvPr>
-            <p:ph idx="101" type="title" hasCustomPrompt="1"/>
+            <p:ph idx="102" type="title" hasCustomPrompt="1"/>
           </p:nvPr>
         </p:nvSpPr>
         <p:spPr>
           <a:xfrm>
-            <a:off x="548640" y="640080"/>
-            <a:ext cx="11064240" cy="822960"/>
+            <a:off x="548640" y="621792"/>
+            <a:ext cx="11064240" cy="566928"/>
           </a:xfrm>
           <a:prstGeom prst="rect">
             <a:avLst/>
@@ -3404,20 +3567,58 @@
               <a:buNone/>
             </a:pPr>
             <a:r>
-              <a:rPr lang="en-US" sz="3000" b="1" dirty="0">
+              <a:rPr lang="en-US" sz="2800" b="1" dirty="0">
                 <a:solidFill>
                   <a:schemeClr val="tx1"/>
                 </a:solidFill>
               </a:rPr>
-              <a:t>피해는 외지 관광객 업종에 집중, 비가 오면 실내로 옮겨 간다</a:t>
-            </a:r>
-            <a:endParaRPr lang="en-US" sz="3000" dirty="0"/>
+              <a:t>인사이트 2 · 피해는 외지 관광객이 찾는 업종에 집중</a:t>
+            </a:r>
+            <a:endParaRPr lang="en-US" sz="2800" dirty="0"/>
           </a:p>
         </p:txBody>
       </p:sp>
       <p:sp>
         <p:nvSpPr>
-          <p:cNvPr id="3" name="chart caption"/>
+          <p:cNvPr id="3" name="Text 2"/>
+          <p:cNvSpPr/>
+          <p:nvPr>
+            <p:ph idx="103" type="body" hasCustomPrompt="1"/>
+          </p:nvPr>
+        </p:nvSpPr>
+        <p:spPr>
+          <a:xfrm>
+            <a:off x="548640" y="1188720"/>
+            <a:ext cx="11064240" cy="320040"/>
+          </a:xfrm>
+          <a:prstGeom prst="rect">
+            <a:avLst/>
+          </a:prstGeom>
+          <a:noFill/>
+          <a:ln/>
+        </p:spPr>
+        <p:txBody>
+          <a:bodyPr wrap="square" lIns="0" tIns="0" rIns="0" bIns="0" rtlCol="0" anchor="t"/>
+          <a:lstStyle/>
+          <a:p>
+            <a:pPr algn="l" indent="0" marL="0">
+              <a:buNone/>
+            </a:pPr>
+            <a:r>
+              <a:rPr lang="en-US" sz="1300" dirty="0">
+                <a:solidFill>
+                  <a:srgbClr val="617069"/>
+                </a:solidFill>
+              </a:rPr>
+              <a:t>레저·숙박 세부 업종과 고객 거주지(외지·강원) 비교 · 비가 오면 관광객은 실내 시설로 이동</a:t>
+            </a:r>
+            <a:endParaRPr lang="en-US" sz="1300" dirty="0"/>
+          </a:p>
+        </p:txBody>
+      </p:sp>
+      <p:sp>
+        <p:nvSpPr>
+          <p:cNvPr id="4" name="chart caption"/>
           <p:cNvSpPr txBox="1"/>
           <p:nvPr/>
         </p:nvSpPr>
@@ -3442,7 +3643,7 @@
             <a:r>
               <a:rPr lang="en-US" sz="1300" b="1" dirty="0">
                 <a:solidFill>
-                  <a:srgbClr val="1D2B33"/>
+                  <a:srgbClr val="192E26"/>
                 </a:solidFill>
               </a:rPr>
               <a:t>레저·숙박 세부 업종별 비 10mm+ 날 매출 변화</a:t>
@@ -3453,7 +3654,7 @@
       </p:sp>
       <p:graphicFrame>
         <p:nvGraphicFramePr>
-          <p:cNvPr id="4" name="subindustry chart" descr=""/>
+          <p:cNvPr id="5" name="subindustry chart" descr=""/>
           <p:cNvGraphicFramePr/>
           <p:nvPr/>
         </p:nvGraphicFramePr>
@@ -3469,7 +3670,7 @@
       </p:graphicFrame>
       <p:sp>
         <p:nvSpPr>
-          <p:cNvPr id="5" name="key 1"/>
+          <p:cNvPr id="6" name="key 1"/>
           <p:cNvSpPr/>
           <p:nvPr/>
         </p:nvSpPr>
@@ -3484,11 +3685,11 @@
             </a:avLst>
           </a:prstGeom>
           <a:solidFill>
-            <a:srgbClr val="D9622B"/>
+            <a:srgbClr val="4A6E52"/>
           </a:solidFill>
           <a:ln w="12700">
             <a:solidFill>
-              <a:srgbClr val="D9622B"/>
+              <a:srgbClr val="4A6E52"/>
             </a:solidFill>
             <a:prstDash val="solid"/>
           </a:ln>
@@ -3496,7 +3697,7 @@
       </p:sp>
       <p:sp>
         <p:nvSpPr>
-          <p:cNvPr id="6" name="Text 3"/>
+          <p:cNvPr id="7" name="Text 4"/>
           <p:cNvSpPr txBox="1"/>
           <p:nvPr/>
         </p:nvSpPr>
@@ -3521,7 +3722,7 @@
             <a:r>
               <a:rPr lang="en-US" sz="1100" dirty="0">
                 <a:solidFill>
-                  <a:srgbClr val="1D2B33"/>
+                  <a:srgbClr val="192E26"/>
                 </a:solidFill>
               </a:rPr>
               <a:t>뚜렷한 감소</a:t>
@@ -3532,7 +3733,7 @@
       </p:sp>
       <p:sp>
         <p:nvSpPr>
-          <p:cNvPr id="7" name="key 2"/>
+          <p:cNvPr id="8" name="key 2"/>
           <p:cNvSpPr/>
           <p:nvPr/>
         </p:nvSpPr>
@@ -3547,11 +3748,11 @@
             </a:avLst>
           </a:prstGeom>
           <a:solidFill>
-            <a:srgbClr val="C5CBD1"/>
+            <a:srgbClr val="D5DDD1"/>
           </a:solidFill>
           <a:ln w="12700">
             <a:solidFill>
-              <a:srgbClr val="C5CBD1"/>
+              <a:srgbClr val="D5DDD1"/>
             </a:solidFill>
             <a:prstDash val="solid"/>
           </a:ln>
@@ -3559,7 +3760,7 @@
       </p:sp>
       <p:sp>
         <p:nvSpPr>
-          <p:cNvPr id="8" name="Text 5"/>
+          <p:cNvPr id="9" name="Text 6"/>
           <p:cNvSpPr txBox="1"/>
           <p:nvPr/>
         </p:nvSpPr>
@@ -3584,7 +3785,7 @@
             <a:r>
               <a:rPr lang="en-US" sz="1100" dirty="0">
                 <a:solidFill>
-                  <a:srgbClr val="1D2B33"/>
+                  <a:srgbClr val="192E26"/>
                 </a:solidFill>
               </a:rPr>
               <a:t>차이 불확실</a:t>
@@ -3595,7 +3796,7 @@
       </p:sp>
       <p:sp>
         <p:nvSpPr>
-          <p:cNvPr id="9" name="key 3"/>
+          <p:cNvPr id="10" name="key 3"/>
           <p:cNvSpPr/>
           <p:nvPr/>
         </p:nvSpPr>
@@ -3610,11 +3811,11 @@
             </a:avLst>
           </a:prstGeom>
           <a:solidFill>
-            <a:srgbClr val="2F6FA8"/>
+            <a:srgbClr val="9DBB45"/>
           </a:solidFill>
           <a:ln w="12700">
             <a:solidFill>
-              <a:srgbClr val="2F6FA8"/>
+              <a:srgbClr val="9DBB45"/>
             </a:solidFill>
             <a:prstDash val="solid"/>
           </a:ln>
@@ -3622,7 +3823,7 @@
       </p:sp>
       <p:sp>
         <p:nvSpPr>
-          <p:cNvPr id="10" name="Text 7"/>
+          <p:cNvPr id="11" name="Text 8"/>
           <p:cNvSpPr txBox="1"/>
           <p:nvPr/>
         </p:nvSpPr>
@@ -3647,7 +3848,7 @@
             <a:r>
               <a:rPr lang="en-US" sz="1100" dirty="0">
                 <a:solidFill>
-                  <a:srgbClr val="1D2B33"/>
+                  <a:srgbClr val="192E26"/>
                 </a:solidFill>
               </a:rPr>
               <a:t>뚜렷한 증가</a:t>
@@ -3658,7 +3859,7 @@
       </p:sp>
       <p:sp>
         <p:nvSpPr>
-          <p:cNvPr id="11" name="sub card 1"/>
+          <p:cNvPr id="12" name="sub card 1"/>
           <p:cNvSpPr/>
           <p:nvPr/>
         </p:nvSpPr>
@@ -3673,11 +3874,11 @@
             </a:avLst>
           </a:prstGeom>
           <a:solidFill>
-            <a:srgbClr val="F3F6F8"/>
+            <a:srgbClr val="EAF0E3"/>
           </a:solidFill>
           <a:ln w="12700">
             <a:solidFill>
-              <a:srgbClr val="F3F6F8"/>
+              <a:srgbClr val="EAF0E3"/>
             </a:solidFill>
             <a:prstDash val="solid"/>
           </a:ln>
@@ -3685,7 +3886,7 @@
       </p:sp>
       <p:sp>
         <p:nvSpPr>
-          <p:cNvPr id="12" name="Text 9"/>
+          <p:cNvPr id="13" name="Text 10"/>
           <p:cNvSpPr txBox="1"/>
           <p:nvPr/>
         </p:nvSpPr>
@@ -3710,7 +3911,7 @@
             <a:r>
               <a:rPr lang="en-US" sz="1400" b="1" dirty="0">
                 <a:solidFill>
-                  <a:srgbClr val="1D2B33"/>
+                  <a:srgbClr val="192E26"/>
                 </a:solidFill>
               </a:rPr>
               <a:t>골프장 (외지 고객 78%)</a:t>
@@ -3724,7 +3925,7 @@
             <a:r>
               <a:rPr lang="en-US" sz="1800" b="1" dirty="0">
                 <a:solidFill>
-                  <a:srgbClr val="D9622B"/>
+                  <a:srgbClr val="4A6E52"/>
                 </a:solidFill>
               </a:rPr>
               <a:t>강원 -44% · 외지 -62%</a:t>
@@ -3738,7 +3939,7 @@
             <a:r>
               <a:rPr lang="en-US" sz="1300" dirty="0">
                 <a:solidFill>
-                  <a:srgbClr val="1D2B33"/>
+                  <a:srgbClr val="192E26"/>
                 </a:solidFill>
               </a:rPr>
               <a:t>외지 관광객이 더 크게 취소</a:t>
@@ -3749,7 +3950,7 @@
       </p:sp>
       <p:sp>
         <p:nvSpPr>
-          <p:cNvPr id="13" name="sub card 2"/>
+          <p:cNvPr id="14" name="sub card 2"/>
           <p:cNvSpPr/>
           <p:nvPr/>
         </p:nvSpPr>
@@ -3764,11 +3965,11 @@
             </a:avLst>
           </a:prstGeom>
           <a:solidFill>
-            <a:srgbClr val="F3F6F8"/>
+            <a:srgbClr val="EAF0E3"/>
           </a:solidFill>
           <a:ln w="12700">
             <a:solidFill>
-              <a:srgbClr val="F3F6F8"/>
+              <a:srgbClr val="EAF0E3"/>
             </a:solidFill>
             <a:prstDash val="solid"/>
           </a:ln>
@@ -3776,7 +3977,7 @@
       </p:sp>
       <p:sp>
         <p:nvSpPr>
-          <p:cNvPr id="14" name="Text 11"/>
+          <p:cNvPr id="15" name="Text 12"/>
           <p:cNvSpPr txBox="1"/>
           <p:nvPr/>
         </p:nvSpPr>
@@ -3801,7 +4002,7 @@
             <a:r>
               <a:rPr lang="en-US" sz="1400" b="1" dirty="0">
                 <a:solidFill>
-                  <a:srgbClr val="1D2B33"/>
+                  <a:srgbClr val="192E26"/>
                 </a:solidFill>
               </a:rPr>
               <a:t>사우나·목욕탕</a:t>
@@ -3815,7 +4016,7 @@
             <a:r>
               <a:rPr lang="en-US" sz="1800" b="1" dirty="0">
                 <a:solidFill>
-                  <a:srgbClr val="2F6FA8"/>
+                  <a:srgbClr val="5F7F25"/>
                 </a:solidFill>
               </a:rPr>
               <a:t>강원 +15% · 외지 +47%</a:t>
@@ -3829,7 +4030,7 @@
             <a:r>
               <a:rPr lang="en-US" sz="1300" dirty="0">
                 <a:solidFill>
-                  <a:srgbClr val="1D2B33"/>
+                  <a:srgbClr val="192E26"/>
                 </a:solidFill>
               </a:rPr>
               <a:t>비 오는 날 실내로 이동</a:t>
@@ -3840,7 +4041,7 @@
       </p:sp>
       <p:sp>
         <p:nvSpPr>
-          <p:cNvPr id="15" name="sub card 3"/>
+          <p:cNvPr id="16" name="sub card 3"/>
           <p:cNvSpPr/>
           <p:nvPr/>
         </p:nvSpPr>
@@ -3855,11 +4056,11 @@
             </a:avLst>
           </a:prstGeom>
           <a:solidFill>
-            <a:srgbClr val="F3F6F8"/>
+            <a:srgbClr val="EAF0E3"/>
           </a:solidFill>
           <a:ln w="12700">
             <a:solidFill>
-              <a:srgbClr val="F3F6F8"/>
+              <a:srgbClr val="EAF0E3"/>
             </a:solidFill>
             <a:prstDash val="solid"/>
           </a:ln>
@@ -3867,7 +4068,7 @@
       </p:sp>
       <p:sp>
         <p:nvSpPr>
-          <p:cNvPr id="16" name="Text 13"/>
+          <p:cNvPr id="17" name="Text 14"/>
           <p:cNvSpPr txBox="1"/>
           <p:nvPr/>
         </p:nvSpPr>
@@ -3892,7 +4093,7 @@
             <a:r>
               <a:rPr lang="en-US" sz="1400" b="1" dirty="0">
                 <a:solidFill>
-                  <a:srgbClr val="1D2B33"/>
+                  <a:srgbClr val="192E26"/>
                 </a:solidFill>
               </a:rPr>
               <a:t>헬스장·스포츠시설</a:t>
@@ -3906,7 +4107,7 @@
             <a:r>
               <a:rPr lang="en-US" sz="1800" b="1" dirty="0">
                 <a:solidFill>
-                  <a:srgbClr val="6B7780"/>
+                  <a:srgbClr val="617069"/>
                 </a:solidFill>
               </a:rPr>
               <a:t>외지 고객 10%~32%</a:t>
@@ -3920,7 +4121,7 @@
             <a:r>
               <a:rPr lang="en-US" sz="1300" dirty="0">
                 <a:solidFill>
-                  <a:srgbClr val="1D2B33"/>
+                  <a:srgbClr val="192E26"/>
                 </a:solidFill>
               </a:rPr>
               <a:t>주민 이용 시설은 영향 없음</a:t>
@@ -3931,14 +4132,14 @@
       </p:sp>
       <p:sp>
         <p:nvSpPr>
-          <p:cNvPr id="17" name="footnote"/>
+          <p:cNvPr id="18" name="footnote"/>
           <p:cNvSpPr txBox="1"/>
           <p:nvPr/>
         </p:nvSpPr>
         <p:spPr>
           <a:xfrm>
-            <a:off x="8229600" y="5623560"/>
-            <a:ext cx="3474720" cy="640080"/>
+            <a:off x="8229600" y="5577840"/>
+            <a:ext cx="3474720" cy="594360"/>
           </a:xfrm>
           <a:prstGeom prst="rect">
             <a:avLst/>
@@ -3956,10 +4157,10 @@
             <a:r>
               <a:rPr lang="en-US" sz="1000" dirty="0">
                 <a:solidFill>
-                  <a:srgbClr val="6B7780"/>
+                  <a:srgbClr val="617069"/>
                 </a:solidFill>
               </a:rPr>
-              <a:t>사우나 증가는 기온 통제 방식을 바꿔도 +18% (p = 0.001). 강원 = 강원도 거주(춘천 밖 포함). 숙박은 앱 선결제가 빠진 현장 결제 위주</a:t>
+              <a:t>사우나 증가는 기온 통제 방식을 바꿔도 +18% (p = 0.001). 강원 = 강원도 거주(춘천 밖 포함)</a:t>
             </a:r>
             <a:endParaRPr lang="en-US" sz="1000" dirty="0"/>
           </a:p>
@@ -3977,7 +4178,7 @@
         </p:nvSpPr>
         <p:spPr>
           <a:xfrm>
-            <a:off x="11247120" y="6355080"/>
+            <a:off x="11183112" y="6355080"/>
             <a:ext cx="457200" cy="274320"/>
           </a:xfrm>
           <a:prstGeom prst="rect">
@@ -3993,9 +4194,9 @@
           <a:bodyPr/>
           <a:lstStyle>
             <a:lvl1pPr>
-              <a:defRPr sz="1000">
-                <a:solidFill>
-                  <a:srgbClr val="6B7780"/>
+              <a:defRPr sz="1100">
+                <a:solidFill>
+                  <a:srgbClr val="192E26"/>
                 </a:solidFill>
               </a:defRPr>
             </a:lvl1pPr>
@@ -4003,7 +4204,7 @@
           <a:p>
             <a:pPr algn="r"/>
             <a:fld id="{F7021451-1387-4CA6-816F-3879F97B5CBC}" type="slidenum">
-              <a:rPr b="0" lang="en-US"/>
+              <a:rPr b="1" lang="en-US"/>
               <a:t>3</a:t>
             </a:fld>
             <a:endParaRPr lang="en-US"/>
@@ -4037,16 +4238,16 @@
       </p:grpSpPr>
       <p:sp>
         <p:nvSpPr>
-          <p:cNvPr id="2" name="Text 1"/>
+          <p:cNvPr id="2" name="Text 2"/>
           <p:cNvSpPr/>
           <p:nvPr>
-            <p:ph idx="101" type="title" hasCustomPrompt="1"/>
+            <p:ph idx="102" type="title" hasCustomPrompt="1"/>
           </p:nvPr>
         </p:nvSpPr>
         <p:spPr>
           <a:xfrm>
-            <a:off x="548640" y="640080"/>
-            <a:ext cx="11064240" cy="822960"/>
+            <a:off x="548640" y="621792"/>
+            <a:ext cx="11064240" cy="566928"/>
           </a:xfrm>
           <a:prstGeom prst="rect">
             <a:avLst/>
@@ -4062,14 +4263,52 @@
               <a:buNone/>
             </a:pPr>
             <a:r>
-              <a:rPr lang="en-US" sz="3000" b="1" dirty="0">
+              <a:rPr lang="en-US" sz="2800" b="1" dirty="0">
                 <a:solidFill>
                   <a:schemeClr val="tx1"/>
                 </a:solidFill>
               </a:rPr>
-              <a:t>부록 A. 사용 컬럼과 선택 이유</a:t>
-            </a:r>
-            <a:endParaRPr lang="en-US" sz="3000" dirty="0"/>
+              <a:t>부록 A · 사용 컬럼과 선택 이유</a:t>
+            </a:r>
+            <a:endParaRPr lang="en-US" sz="2800" dirty="0"/>
+          </a:p>
+        </p:txBody>
+      </p:sp>
+      <p:sp>
+        <p:nvSpPr>
+          <p:cNvPr id="3" name="Text 2"/>
+          <p:cNvSpPr/>
+          <p:nvPr>
+            <p:ph idx="103" type="body" hasCustomPrompt="1"/>
+          </p:nvPr>
+        </p:nvSpPr>
+        <p:spPr>
+          <a:xfrm>
+            <a:off x="548640" y="1188720"/>
+            <a:ext cx="11064240" cy="320040"/>
+          </a:xfrm>
+          <a:prstGeom prst="rect">
+            <a:avLst/>
+          </a:prstGeom>
+          <a:noFill/>
+          <a:ln/>
+        </p:spPr>
+        <p:txBody>
+          <a:bodyPr wrap="square" lIns="0" tIns="0" rIns="0" bIns="0" rtlCol="0" anchor="t"/>
+          <a:lstStyle/>
+          <a:p>
+            <a:pPr algn="l" indent="0" marL="0">
+              <a:buNone/>
+            </a:pPr>
+            <a:r>
+              <a:rPr lang="en-US" sz="1300" dirty="0">
+                <a:solidFill>
+                  <a:srgbClr val="617069"/>
+                </a:solidFill>
+              </a:rPr>
+              <a:t>인사이트 2 분석에 쓴 컬럼, 비 피해율 정의, 통제 변수</a:t>
+            </a:r>
+            <a:endParaRPr lang="en-US" sz="1300" dirty="0"/>
           </a:p>
         </p:txBody>
       </p:sp>
@@ -4123,7 +4362,7 @@
                   <a:tcPr marL="73152" marR="73152" marT="73152" marB="73152" anchor="ctr">
                     <a:lnL w="9525" cap="flat" cmpd="sng" algn="ctr">
                       <a:solidFill>
-                        <a:srgbClr val="E3E7EA"/>
+                        <a:srgbClr val="DCE3D5"/>
                       </a:solidFill>
                       <a:prstDash val="solid"/>
                       <a:round/>
@@ -4132,7 +4371,7 @@
                     </a:lnL>
                     <a:lnR w="9525" cap="flat" cmpd="sng" algn="ctr">
                       <a:solidFill>
-                        <a:srgbClr val="E3E7EA"/>
+                        <a:srgbClr val="DCE3D5"/>
                       </a:solidFill>
                       <a:prstDash val="solid"/>
                       <a:round/>
@@ -4141,7 +4380,7 @@
                     </a:lnR>
                     <a:lnT w="9525" cap="flat" cmpd="sng" algn="ctr">
                       <a:solidFill>
-                        <a:srgbClr val="E3E7EA"/>
+                        <a:srgbClr val="DCE3D5"/>
                       </a:solidFill>
                       <a:prstDash val="solid"/>
                       <a:round/>
@@ -4150,7 +4389,7 @@
                     </a:lnT>
                     <a:lnB w="9525" cap="flat" cmpd="sng" algn="ctr">
                       <a:solidFill>
-                        <a:srgbClr val="E3E7EA"/>
+                        <a:srgbClr val="DCE3D5"/>
                       </a:solidFill>
                       <a:prstDash val="solid"/>
                       <a:round/>
@@ -4158,7 +4397,7 @@
                       <a:tailEnd type="none" w="med" len="med"/>
                     </a:lnB>
                     <a:solidFill>
-                      <a:srgbClr val="15303D"/>
+                      <a:srgbClr val="4A6E52"/>
                     </a:solidFill>
                   </a:tcPr>
                 </a:tc>
@@ -4184,7 +4423,7 @@
                   <a:tcPr marL="73152" marR="73152" marT="73152" marB="73152" anchor="ctr">
                     <a:lnL w="9525" cap="flat" cmpd="sng" algn="ctr">
                       <a:solidFill>
-                        <a:srgbClr val="E3E7EA"/>
+                        <a:srgbClr val="DCE3D5"/>
                       </a:solidFill>
                       <a:prstDash val="solid"/>
                       <a:round/>
@@ -4193,7 +4432,7 @@
                     </a:lnL>
                     <a:lnR w="9525" cap="flat" cmpd="sng" algn="ctr">
                       <a:solidFill>
-                        <a:srgbClr val="E3E7EA"/>
+                        <a:srgbClr val="DCE3D5"/>
                       </a:solidFill>
                       <a:prstDash val="solid"/>
                       <a:round/>
@@ -4202,7 +4441,7 @@
                     </a:lnR>
                     <a:lnT w="9525" cap="flat" cmpd="sng" algn="ctr">
                       <a:solidFill>
-                        <a:srgbClr val="E3E7EA"/>
+                        <a:srgbClr val="DCE3D5"/>
                       </a:solidFill>
                       <a:prstDash val="solid"/>
                       <a:round/>
@@ -4211,7 +4450,7 @@
                     </a:lnT>
                     <a:lnB w="9525" cap="flat" cmpd="sng" algn="ctr">
                       <a:solidFill>
-                        <a:srgbClr val="E3E7EA"/>
+                        <a:srgbClr val="DCE3D5"/>
                       </a:solidFill>
                       <a:prstDash val="solid"/>
                       <a:round/>
@@ -4219,7 +4458,7 @@
                       <a:tailEnd type="none" w="med" len="med"/>
                     </a:lnB>
                     <a:solidFill>
-                      <a:srgbClr val="15303D"/>
+                      <a:srgbClr val="4A6E52"/>
                     </a:solidFill>
                   </a:tcPr>
                 </a:tc>
@@ -4245,7 +4484,7 @@
                   <a:tcPr marL="73152" marR="73152" marT="73152" marB="73152" anchor="ctr">
                     <a:lnL w="9525" cap="flat" cmpd="sng" algn="ctr">
                       <a:solidFill>
-                        <a:srgbClr val="E3E7EA"/>
+                        <a:srgbClr val="DCE3D5"/>
                       </a:solidFill>
                       <a:prstDash val="solid"/>
                       <a:round/>
@@ -4254,7 +4493,7 @@
                     </a:lnL>
                     <a:lnR w="9525" cap="flat" cmpd="sng" algn="ctr">
                       <a:solidFill>
-                        <a:srgbClr val="E3E7EA"/>
+                        <a:srgbClr val="DCE3D5"/>
                       </a:solidFill>
                       <a:prstDash val="solid"/>
                       <a:round/>
@@ -4263,7 +4502,7 @@
                     </a:lnR>
                     <a:lnT w="9525" cap="flat" cmpd="sng" algn="ctr">
                       <a:solidFill>
-                        <a:srgbClr val="E3E7EA"/>
+                        <a:srgbClr val="DCE3D5"/>
                       </a:solidFill>
                       <a:prstDash val="solid"/>
                       <a:round/>
@@ -4272,7 +4511,7 @@
                     </a:lnT>
                     <a:lnB w="9525" cap="flat" cmpd="sng" algn="ctr">
                       <a:solidFill>
-                        <a:srgbClr val="E3E7EA"/>
+                        <a:srgbClr val="DCE3D5"/>
                       </a:solidFill>
                       <a:prstDash val="solid"/>
                       <a:round/>
@@ -4280,7 +4519,7 @@
                       <a:tailEnd type="none" w="med" len="med"/>
                     </a:lnB>
                     <a:solidFill>
-                      <a:srgbClr val="15303D"/>
+                      <a:srgbClr val="4A6E52"/>
                     </a:solidFill>
                   </a:tcPr>
                 </a:tc>
@@ -4297,7 +4536,7 @@
                       <a:r>
                         <a:rPr lang="en-US" sz="1300" dirty="0">
                           <a:solidFill>
-                            <a:srgbClr val="1D2B33"/>
+                            <a:srgbClr val="192E26"/>
                           </a:solidFill>
                         </a:rPr>
                         <a:t>TA_YMD</a:t>
@@ -4308,7 +4547,7 @@
                   <a:tcPr marL="73152" marR="73152" marT="73152" marB="73152" anchor="ctr">
                     <a:lnL w="9525" cap="flat" cmpd="sng" algn="ctr">
                       <a:solidFill>
-                        <a:srgbClr val="E3E7EA"/>
+                        <a:srgbClr val="DCE3D5"/>
                       </a:solidFill>
                       <a:prstDash val="solid"/>
                       <a:round/>
@@ -4317,7 +4556,7 @@
                     </a:lnL>
                     <a:lnR w="9525" cap="flat" cmpd="sng" algn="ctr">
                       <a:solidFill>
-                        <a:srgbClr val="E3E7EA"/>
+                        <a:srgbClr val="DCE3D5"/>
                       </a:solidFill>
                       <a:prstDash val="solid"/>
                       <a:round/>
@@ -4326,7 +4565,7 @@
                     </a:lnR>
                     <a:lnT w="9525" cap="flat" cmpd="sng" algn="ctr">
                       <a:solidFill>
-                        <a:srgbClr val="E3E7EA"/>
+                        <a:srgbClr val="DCE3D5"/>
                       </a:solidFill>
                       <a:prstDash val="solid"/>
                       <a:round/>
@@ -4335,7 +4574,7 @@
                     </a:lnT>
                     <a:lnB w="9525" cap="flat" cmpd="sng" algn="ctr">
                       <a:solidFill>
-                        <a:srgbClr val="E3E7EA"/>
+                        <a:srgbClr val="DCE3D5"/>
                       </a:solidFill>
                       <a:prstDash val="solid"/>
                       <a:round/>
@@ -4355,7 +4594,7 @@
                       <a:r>
                         <a:rPr lang="en-US" sz="1300" dirty="0">
                           <a:solidFill>
-                            <a:srgbClr val="1D2B33"/>
+                            <a:srgbClr val="192E26"/>
                           </a:solidFill>
                         </a:rPr>
                         <a:t>결제일</a:t>
@@ -4366,7 +4605,7 @@
                   <a:tcPr marL="73152" marR="73152" marT="73152" marB="73152" anchor="ctr">
                     <a:lnL w="9525" cap="flat" cmpd="sng" algn="ctr">
                       <a:solidFill>
-                        <a:srgbClr val="E3E7EA"/>
+                        <a:srgbClr val="DCE3D5"/>
                       </a:solidFill>
                       <a:prstDash val="solid"/>
                       <a:round/>
@@ -4375,7 +4614,7 @@
                     </a:lnL>
                     <a:lnR w="9525" cap="flat" cmpd="sng" algn="ctr">
                       <a:solidFill>
-                        <a:srgbClr val="E3E7EA"/>
+                        <a:srgbClr val="DCE3D5"/>
                       </a:solidFill>
                       <a:prstDash val="solid"/>
                       <a:round/>
@@ -4384,7 +4623,7 @@
                     </a:lnR>
                     <a:lnT w="9525" cap="flat" cmpd="sng" algn="ctr">
                       <a:solidFill>
-                        <a:srgbClr val="E3E7EA"/>
+                        <a:srgbClr val="DCE3D5"/>
                       </a:solidFill>
                       <a:prstDash val="solid"/>
                       <a:round/>
@@ -4393,7 +4632,7 @@
                     </a:lnT>
                     <a:lnB w="9525" cap="flat" cmpd="sng" algn="ctr">
                       <a:solidFill>
-                        <a:srgbClr val="E3E7EA"/>
+                        <a:srgbClr val="DCE3D5"/>
                       </a:solidFill>
                       <a:prstDash val="solid"/>
                       <a:round/>
@@ -4413,7 +4652,7 @@
                       <a:r>
                         <a:rPr lang="en-US" sz="1300" dirty="0">
                           <a:solidFill>
-                            <a:srgbClr val="1D2B33"/>
+                            <a:srgbClr val="192E26"/>
                           </a:solidFill>
                         </a:rPr>
                         <a:t>일별 기상 관측과 날짜로 1:1 연결</a:t>
@@ -4424,7 +4663,7 @@
                   <a:tcPr marL="73152" marR="73152" marT="73152" marB="73152" anchor="ctr">
                     <a:lnL w="9525" cap="flat" cmpd="sng" algn="ctr">
                       <a:solidFill>
-                        <a:srgbClr val="E3E7EA"/>
+                        <a:srgbClr val="DCE3D5"/>
                       </a:solidFill>
                       <a:prstDash val="solid"/>
                       <a:round/>
@@ -4433,7 +4672,7 @@
                     </a:lnL>
                     <a:lnR w="9525" cap="flat" cmpd="sng" algn="ctr">
                       <a:solidFill>
-                        <a:srgbClr val="E3E7EA"/>
+                        <a:srgbClr val="DCE3D5"/>
                       </a:solidFill>
                       <a:prstDash val="solid"/>
                       <a:round/>
@@ -4442,7 +4681,7 @@
                     </a:lnR>
                     <a:lnT w="9525" cap="flat" cmpd="sng" algn="ctr">
                       <a:solidFill>
-                        <a:srgbClr val="E3E7EA"/>
+                        <a:srgbClr val="DCE3D5"/>
                       </a:solidFill>
                       <a:prstDash val="solid"/>
                       <a:round/>
@@ -4451,7 +4690,7 @@
                     </a:lnT>
                     <a:lnB w="9525" cap="flat" cmpd="sng" algn="ctr">
                       <a:solidFill>
-                        <a:srgbClr val="E3E7EA"/>
+                        <a:srgbClr val="DCE3D5"/>
                       </a:solidFill>
                       <a:prstDash val="solid"/>
                       <a:round/>
@@ -4473,7 +4712,7 @@
                       <a:r>
                         <a:rPr lang="en-US" sz="1300" dirty="0">
                           <a:solidFill>
-                            <a:srgbClr val="1D2B33"/>
+                            <a:srgbClr val="192E26"/>
                           </a:solidFill>
                         </a:rPr>
                         <a:t>MCT_RY_CD</a:t>
@@ -4484,7 +4723,7 @@
                   <a:tcPr marL="73152" marR="73152" marT="73152" marB="73152" anchor="ctr">
                     <a:lnL w="9525" cap="flat" cmpd="sng" algn="ctr">
                       <a:solidFill>
-                        <a:srgbClr val="E3E7EA"/>
+                        <a:srgbClr val="DCE3D5"/>
                       </a:solidFill>
                       <a:prstDash val="solid"/>
                       <a:round/>
@@ -4493,7 +4732,7 @@
                     </a:lnL>
                     <a:lnR w="9525" cap="flat" cmpd="sng" algn="ctr">
                       <a:solidFill>
-                        <a:srgbClr val="E3E7EA"/>
+                        <a:srgbClr val="DCE3D5"/>
                       </a:solidFill>
                       <a:prstDash val="solid"/>
                       <a:round/>
@@ -4502,7 +4741,7 @@
                     </a:lnR>
                     <a:lnT w="9525" cap="flat" cmpd="sng" algn="ctr">
                       <a:solidFill>
-                        <a:srgbClr val="E3E7EA"/>
+                        <a:srgbClr val="DCE3D5"/>
                       </a:solidFill>
                       <a:prstDash val="solid"/>
                       <a:round/>
@@ -4511,7 +4750,7 @@
                     </a:lnT>
                     <a:lnB w="9525" cap="flat" cmpd="sng" algn="ctr">
                       <a:solidFill>
-                        <a:srgbClr val="E3E7EA"/>
+                        <a:srgbClr val="DCE3D5"/>
                       </a:solidFill>
                       <a:prstDash val="solid"/>
                       <a:round/>
@@ -4531,7 +4770,7 @@
                       <a:r>
                         <a:rPr lang="en-US" sz="1300" dirty="0">
                           <a:solidFill>
-                            <a:srgbClr val="1D2B33"/>
+                            <a:srgbClr val="192E26"/>
                           </a:solidFill>
                         </a:rPr>
                         <a:t>가맹점 업종</a:t>
@@ -4542,7 +4781,7 @@
                   <a:tcPr marL="73152" marR="73152" marT="73152" marB="73152" anchor="ctr">
                     <a:lnL w="9525" cap="flat" cmpd="sng" algn="ctr">
                       <a:solidFill>
-                        <a:srgbClr val="E3E7EA"/>
+                        <a:srgbClr val="DCE3D5"/>
                       </a:solidFill>
                       <a:prstDash val="solid"/>
                       <a:round/>
@@ -4551,7 +4790,7 @@
                     </a:lnL>
                     <a:lnR w="9525" cap="flat" cmpd="sng" algn="ctr">
                       <a:solidFill>
-                        <a:srgbClr val="E3E7EA"/>
+                        <a:srgbClr val="DCE3D5"/>
                       </a:solidFill>
                       <a:prstDash val="solid"/>
                       <a:round/>
@@ -4560,7 +4799,7 @@
                     </a:lnR>
                     <a:lnT w="9525" cap="flat" cmpd="sng" algn="ctr">
                       <a:solidFill>
-                        <a:srgbClr val="E3E7EA"/>
+                        <a:srgbClr val="DCE3D5"/>
                       </a:solidFill>
                       <a:prstDash val="solid"/>
                       <a:round/>
@@ -4569,7 +4808,7 @@
                     </a:lnT>
                     <a:lnB w="9525" cap="flat" cmpd="sng" algn="ctr">
                       <a:solidFill>
-                        <a:srgbClr val="E3E7EA"/>
+                        <a:srgbClr val="DCE3D5"/>
                       </a:solidFill>
                       <a:prstDash val="solid"/>
                       <a:round/>
@@ -4589,7 +4828,7 @@
                       <a:r>
                         <a:rPr lang="en-US" sz="1300" dirty="0">
                           <a:solidFill>
-                            <a:srgbClr val="1D2B33"/>
+                            <a:srgbClr val="192E26"/>
                           </a:solidFill>
                         </a:rPr>
                         <a:t>업종군 12개, 레저·숙박 세부 업종 9개를 직접 비교</a:t>
@@ -4600,7 +4839,7 @@
                   <a:tcPr marL="73152" marR="73152" marT="73152" marB="73152" anchor="ctr">
                     <a:lnL w="9525" cap="flat" cmpd="sng" algn="ctr">
                       <a:solidFill>
-                        <a:srgbClr val="E3E7EA"/>
+                        <a:srgbClr val="DCE3D5"/>
                       </a:solidFill>
                       <a:prstDash val="solid"/>
                       <a:round/>
@@ -4609,7 +4848,7 @@
                     </a:lnL>
                     <a:lnR w="9525" cap="flat" cmpd="sng" algn="ctr">
                       <a:solidFill>
-                        <a:srgbClr val="E3E7EA"/>
+                        <a:srgbClr val="DCE3D5"/>
                       </a:solidFill>
                       <a:prstDash val="solid"/>
                       <a:round/>
@@ -4618,7 +4857,7 @@
                     </a:lnR>
                     <a:lnT w="9525" cap="flat" cmpd="sng" algn="ctr">
                       <a:solidFill>
-                        <a:srgbClr val="E3E7EA"/>
+                        <a:srgbClr val="DCE3D5"/>
                       </a:solidFill>
                       <a:prstDash val="solid"/>
                       <a:round/>
@@ -4627,7 +4866,7 @@
                     </a:lnT>
                     <a:lnB w="9525" cap="flat" cmpd="sng" algn="ctr">
                       <a:solidFill>
-                        <a:srgbClr val="E3E7EA"/>
+                        <a:srgbClr val="DCE3D5"/>
                       </a:solidFill>
                       <a:prstDash val="solid"/>
                       <a:round/>
@@ -4649,7 +4888,7 @@
                       <a:r>
                         <a:rPr lang="en-US" sz="1300" dirty="0">
                           <a:solidFill>
-                            <a:srgbClr val="1D2B33"/>
+                            <a:srgbClr val="192E26"/>
                           </a:solidFill>
                         </a:rPr>
                         <a:t>TS_AT</a:t>
@@ -4660,7 +4899,7 @@
                   <a:tcPr marL="73152" marR="73152" marT="73152" marB="73152" anchor="ctr">
                     <a:lnL w="9525" cap="flat" cmpd="sng" algn="ctr">
                       <a:solidFill>
-                        <a:srgbClr val="E3E7EA"/>
+                        <a:srgbClr val="DCE3D5"/>
                       </a:solidFill>
                       <a:prstDash val="solid"/>
                       <a:round/>
@@ -4669,7 +4908,7 @@
                     </a:lnL>
                     <a:lnR w="9525" cap="flat" cmpd="sng" algn="ctr">
                       <a:solidFill>
-                        <a:srgbClr val="E3E7EA"/>
+                        <a:srgbClr val="DCE3D5"/>
                       </a:solidFill>
                       <a:prstDash val="solid"/>
                       <a:round/>
@@ -4678,7 +4917,7 @@
                     </a:lnR>
                     <a:lnT w="9525" cap="flat" cmpd="sng" algn="ctr">
                       <a:solidFill>
-                        <a:srgbClr val="E3E7EA"/>
+                        <a:srgbClr val="DCE3D5"/>
                       </a:solidFill>
                       <a:prstDash val="solid"/>
                       <a:round/>
@@ -4687,7 +4926,7 @@
                     </a:lnT>
                     <a:lnB w="9525" cap="flat" cmpd="sng" algn="ctr">
                       <a:solidFill>
-                        <a:srgbClr val="E3E7EA"/>
+                        <a:srgbClr val="DCE3D5"/>
                       </a:solidFill>
                       <a:prstDash val="solid"/>
                       <a:round/>
@@ -4707,7 +4946,7 @@
                       <a:r>
                         <a:rPr lang="en-US" sz="1300" dirty="0">
                           <a:solidFill>
-                            <a:srgbClr val="1D2B33"/>
+                            <a:srgbClr val="192E26"/>
                           </a:solidFill>
                         </a:rPr>
                         <a:t>결제 금액</a:t>
@@ -4718,7 +4957,7 @@
                   <a:tcPr marL="73152" marR="73152" marT="73152" marB="73152" anchor="ctr">
                     <a:lnL w="9525" cap="flat" cmpd="sng" algn="ctr">
                       <a:solidFill>
-                        <a:srgbClr val="E3E7EA"/>
+                        <a:srgbClr val="DCE3D5"/>
                       </a:solidFill>
                       <a:prstDash val="solid"/>
                       <a:round/>
@@ -4727,7 +4966,7 @@
                     </a:lnL>
                     <a:lnR w="9525" cap="flat" cmpd="sng" algn="ctr">
                       <a:solidFill>
-                        <a:srgbClr val="E3E7EA"/>
+                        <a:srgbClr val="DCE3D5"/>
                       </a:solidFill>
                       <a:prstDash val="solid"/>
                       <a:round/>
@@ -4736,7 +4975,7 @@
                     </a:lnR>
                     <a:lnT w="9525" cap="flat" cmpd="sng" algn="ctr">
                       <a:solidFill>
-                        <a:srgbClr val="E3E7EA"/>
+                        <a:srgbClr val="DCE3D5"/>
                       </a:solidFill>
                       <a:prstDash val="solid"/>
                       <a:round/>
@@ -4745,7 +4984,7 @@
                     </a:lnT>
                     <a:lnB w="9525" cap="flat" cmpd="sng" algn="ctr">
                       <a:solidFill>
-                        <a:srgbClr val="E3E7EA"/>
+                        <a:srgbClr val="DCE3D5"/>
                       </a:solidFill>
                       <a:prstDash val="solid"/>
                       <a:round/>
@@ -4765,7 +5004,7 @@
                       <a:r>
                         <a:rPr lang="en-US" sz="1300" dirty="0">
                           <a:solidFill>
-                            <a:srgbClr val="1D2B33"/>
+                            <a:srgbClr val="192E26"/>
                           </a:solidFill>
                         </a:rPr>
                         <a:t>피해를 매출 금액으로 보기 위해 사용</a:t>
@@ -4776,7 +5015,7 @@
                   <a:tcPr marL="73152" marR="73152" marT="73152" marB="73152" anchor="ctr">
                     <a:lnL w="9525" cap="flat" cmpd="sng" algn="ctr">
                       <a:solidFill>
-                        <a:srgbClr val="E3E7EA"/>
+                        <a:srgbClr val="DCE3D5"/>
                       </a:solidFill>
                       <a:prstDash val="solid"/>
                       <a:round/>
@@ -4785,7 +5024,7 @@
                     </a:lnL>
                     <a:lnR w="9525" cap="flat" cmpd="sng" algn="ctr">
                       <a:solidFill>
-                        <a:srgbClr val="E3E7EA"/>
+                        <a:srgbClr val="DCE3D5"/>
                       </a:solidFill>
                       <a:prstDash val="solid"/>
                       <a:round/>
@@ -4794,7 +5033,7 @@
                     </a:lnR>
                     <a:lnT w="9525" cap="flat" cmpd="sng" algn="ctr">
                       <a:solidFill>
-                        <a:srgbClr val="E3E7EA"/>
+                        <a:srgbClr val="DCE3D5"/>
                       </a:solidFill>
                       <a:prstDash val="solid"/>
                       <a:round/>
@@ -4803,7 +5042,7 @@
                     </a:lnT>
                     <a:lnB w="9525" cap="flat" cmpd="sng" algn="ctr">
                       <a:solidFill>
-                        <a:srgbClr val="E3E7EA"/>
+                        <a:srgbClr val="DCE3D5"/>
                       </a:solidFill>
                       <a:prstDash val="solid"/>
                       <a:round/>
@@ -4825,7 +5064,7 @@
                       <a:r>
                         <a:rPr lang="en-US" sz="1300" dirty="0">
                           <a:solidFill>
-                            <a:srgbClr val="1D2B33"/>
+                            <a:srgbClr val="192E26"/>
                           </a:solidFill>
                         </a:rPr>
                         <a:t>CLN_SGG_CD</a:t>
@@ -4836,7 +5075,7 @@
                   <a:tcPr marL="73152" marR="73152" marT="73152" marB="73152" anchor="ctr">
                     <a:lnL w="9525" cap="flat" cmpd="sng" algn="ctr">
                       <a:solidFill>
-                        <a:srgbClr val="E3E7EA"/>
+                        <a:srgbClr val="DCE3D5"/>
                       </a:solidFill>
                       <a:prstDash val="solid"/>
                       <a:round/>
@@ -4845,7 +5084,7 @@
                     </a:lnL>
                     <a:lnR w="9525" cap="flat" cmpd="sng" algn="ctr">
                       <a:solidFill>
-                        <a:srgbClr val="E3E7EA"/>
+                        <a:srgbClr val="DCE3D5"/>
                       </a:solidFill>
                       <a:prstDash val="solid"/>
                       <a:round/>
@@ -4854,7 +5093,7 @@
                     </a:lnR>
                     <a:lnT w="9525" cap="flat" cmpd="sng" algn="ctr">
                       <a:solidFill>
-                        <a:srgbClr val="E3E7EA"/>
+                        <a:srgbClr val="DCE3D5"/>
                       </a:solidFill>
                       <a:prstDash val="solid"/>
                       <a:round/>
@@ -4863,7 +5102,7 @@
                     </a:lnT>
                     <a:lnB w="9525" cap="flat" cmpd="sng" algn="ctr">
                       <a:solidFill>
-                        <a:srgbClr val="E3E7EA"/>
+                        <a:srgbClr val="DCE3D5"/>
                       </a:solidFill>
                       <a:prstDash val="solid"/>
                       <a:round/>
@@ -4883,7 +5122,7 @@
                       <a:r>
                         <a:rPr lang="en-US" sz="1300" dirty="0">
                           <a:solidFill>
-                            <a:srgbClr val="1D2B33"/>
+                            <a:srgbClr val="192E26"/>
                           </a:solidFill>
                         </a:rPr>
                         <a:t>고객 거주 시도 (데이터2)</a:t>
@@ -4894,7 +5133,7 @@
                   <a:tcPr marL="73152" marR="73152" marT="73152" marB="73152" anchor="ctr">
                     <a:lnL w="9525" cap="flat" cmpd="sng" algn="ctr">
                       <a:solidFill>
-                        <a:srgbClr val="E3E7EA"/>
+                        <a:srgbClr val="DCE3D5"/>
                       </a:solidFill>
                       <a:prstDash val="solid"/>
                       <a:round/>
@@ -4903,7 +5142,7 @@
                     </a:lnL>
                     <a:lnR w="9525" cap="flat" cmpd="sng" algn="ctr">
                       <a:solidFill>
-                        <a:srgbClr val="E3E7EA"/>
+                        <a:srgbClr val="DCE3D5"/>
                       </a:solidFill>
                       <a:prstDash val="solid"/>
                       <a:round/>
@@ -4912,7 +5151,7 @@
                     </a:lnR>
                     <a:lnT w="9525" cap="flat" cmpd="sng" algn="ctr">
                       <a:solidFill>
-                        <a:srgbClr val="E3E7EA"/>
+                        <a:srgbClr val="DCE3D5"/>
                       </a:solidFill>
                       <a:prstDash val="solid"/>
                       <a:round/>
@@ -4921,7 +5160,7 @@
                     </a:lnT>
                     <a:lnB w="9525" cap="flat" cmpd="sng" algn="ctr">
                       <a:solidFill>
-                        <a:srgbClr val="E3E7EA"/>
+                        <a:srgbClr val="DCE3D5"/>
                       </a:solidFill>
                       <a:prstDash val="solid"/>
                       <a:round/>
@@ -4941,7 +5180,7 @@
                       <a:r>
                         <a:rPr lang="en-US" sz="1300" dirty="0">
                           <a:solidFill>
-                            <a:srgbClr val="1D2B33"/>
+                            <a:srgbClr val="192E26"/>
                           </a:solidFill>
                         </a:rPr>
                         <a:t>외지 관광객과 강원 고객을 나눠 누가 빠지는지 확인</a:t>
@@ -4952,7 +5191,7 @@
                   <a:tcPr marL="73152" marR="73152" marT="73152" marB="73152" anchor="ctr">
                     <a:lnL w="9525" cap="flat" cmpd="sng" algn="ctr">
                       <a:solidFill>
-                        <a:srgbClr val="E3E7EA"/>
+                        <a:srgbClr val="DCE3D5"/>
                       </a:solidFill>
                       <a:prstDash val="solid"/>
                       <a:round/>
@@ -4961,7 +5200,7 @@
                     </a:lnL>
                     <a:lnR w="9525" cap="flat" cmpd="sng" algn="ctr">
                       <a:solidFill>
-                        <a:srgbClr val="E3E7EA"/>
+                        <a:srgbClr val="DCE3D5"/>
                       </a:solidFill>
                       <a:prstDash val="solid"/>
                       <a:round/>
@@ -4970,7 +5209,7 @@
                     </a:lnR>
                     <a:lnT w="9525" cap="flat" cmpd="sng" algn="ctr">
                       <a:solidFill>
-                        <a:srgbClr val="E3E7EA"/>
+                        <a:srgbClr val="DCE3D5"/>
                       </a:solidFill>
                       <a:prstDash val="solid"/>
                       <a:round/>
@@ -4979,7 +5218,7 @@
                     </a:lnT>
                     <a:lnB w="9525" cap="flat" cmpd="sng" algn="ctr">
                       <a:solidFill>
-                        <a:srgbClr val="E3E7EA"/>
+                        <a:srgbClr val="DCE3D5"/>
                       </a:solidFill>
                       <a:prstDash val="solid"/>
                       <a:round/>
@@ -5001,7 +5240,7 @@
                       <a:r>
                         <a:rPr lang="en-US" sz="1300" dirty="0">
                           <a:solidFill>
-                            <a:srgbClr val="1D2B33"/>
+                            <a:srgbClr val="192E26"/>
                           </a:solidFill>
                         </a:rPr>
                         <a:t>일강수량 · 기온</a:t>
@@ -5012,7 +5251,7 @@
                   <a:tcPr marL="73152" marR="73152" marT="73152" marB="73152" anchor="ctr">
                     <a:lnL w="9525" cap="flat" cmpd="sng" algn="ctr">
                       <a:solidFill>
-                        <a:srgbClr val="E3E7EA"/>
+                        <a:srgbClr val="DCE3D5"/>
                       </a:solidFill>
                       <a:prstDash val="solid"/>
                       <a:round/>
@@ -5021,7 +5260,7 @@
                     </a:lnL>
                     <a:lnR w="9525" cap="flat" cmpd="sng" algn="ctr">
                       <a:solidFill>
-                        <a:srgbClr val="E3E7EA"/>
+                        <a:srgbClr val="DCE3D5"/>
                       </a:solidFill>
                       <a:prstDash val="solid"/>
                       <a:round/>
@@ -5030,7 +5269,7 @@
                     </a:lnR>
                     <a:lnT w="9525" cap="flat" cmpd="sng" algn="ctr">
                       <a:solidFill>
-                        <a:srgbClr val="E3E7EA"/>
+                        <a:srgbClr val="DCE3D5"/>
                       </a:solidFill>
                       <a:prstDash val="solid"/>
                       <a:round/>
@@ -5039,7 +5278,7 @@
                     </a:lnT>
                     <a:lnB w="9525" cap="flat" cmpd="sng" algn="ctr">
                       <a:solidFill>
-                        <a:srgbClr val="E3E7EA"/>
+                        <a:srgbClr val="DCE3D5"/>
                       </a:solidFill>
                       <a:prstDash val="solid"/>
                       <a:round/>
@@ -5059,7 +5298,7 @@
                       <a:r>
                         <a:rPr lang="en-US" sz="1300" dirty="0">
                           <a:solidFill>
-                            <a:srgbClr val="1D2B33"/>
+                            <a:srgbClr val="192E26"/>
                           </a:solidFill>
                         </a:rPr>
                         <a:t>기상청 ASOS 춘천</a:t>
@@ -5070,7 +5309,7 @@
                   <a:tcPr marL="73152" marR="73152" marT="73152" marB="73152" anchor="ctr">
                     <a:lnL w="9525" cap="flat" cmpd="sng" algn="ctr">
                       <a:solidFill>
-                        <a:srgbClr val="E3E7EA"/>
+                        <a:srgbClr val="DCE3D5"/>
                       </a:solidFill>
                       <a:prstDash val="solid"/>
                       <a:round/>
@@ -5079,7 +5318,7 @@
                     </a:lnL>
                     <a:lnR w="9525" cap="flat" cmpd="sng" algn="ctr">
                       <a:solidFill>
-                        <a:srgbClr val="E3E7EA"/>
+                        <a:srgbClr val="DCE3D5"/>
                       </a:solidFill>
                       <a:prstDash val="solid"/>
                       <a:round/>
@@ -5088,7 +5327,7 @@
                     </a:lnR>
                     <a:lnT w="9525" cap="flat" cmpd="sng" algn="ctr">
                       <a:solidFill>
-                        <a:srgbClr val="E3E7EA"/>
+                        <a:srgbClr val="DCE3D5"/>
                       </a:solidFill>
                       <a:prstDash val="solid"/>
                       <a:round/>
@@ -5097,7 +5336,7 @@
                     </a:lnT>
                     <a:lnB w="9525" cap="flat" cmpd="sng" algn="ctr">
                       <a:solidFill>
-                        <a:srgbClr val="E3E7EA"/>
+                        <a:srgbClr val="DCE3D5"/>
                       </a:solidFill>
                       <a:prstDash val="solid"/>
                       <a:round/>
@@ -5117,7 +5356,7 @@
                       <a:r>
                         <a:rPr lang="en-US" sz="1300" dirty="0">
                           <a:solidFill>
-                            <a:srgbClr val="1D2B33"/>
+                            <a:srgbClr val="192E26"/>
                           </a:solidFill>
                         </a:rPr>
                         <a:t>비 10mm+ 여부, 기온 효과 통제</a:t>
@@ -5128,7 +5367,7 @@
                   <a:tcPr marL="73152" marR="73152" marT="73152" marB="73152" anchor="ctr">
                     <a:lnL w="9525" cap="flat" cmpd="sng" algn="ctr">
                       <a:solidFill>
-                        <a:srgbClr val="E3E7EA"/>
+                        <a:srgbClr val="DCE3D5"/>
                       </a:solidFill>
                       <a:prstDash val="solid"/>
                       <a:round/>
@@ -5137,7 +5376,7 @@
                     </a:lnL>
                     <a:lnR w="9525" cap="flat" cmpd="sng" algn="ctr">
                       <a:solidFill>
-                        <a:srgbClr val="E3E7EA"/>
+                        <a:srgbClr val="DCE3D5"/>
                       </a:solidFill>
                       <a:prstDash val="solid"/>
                       <a:round/>
@@ -5146,7 +5385,7 @@
                     </a:lnR>
                     <a:lnT w="9525" cap="flat" cmpd="sng" algn="ctr">
                       <a:solidFill>
-                        <a:srgbClr val="E3E7EA"/>
+                        <a:srgbClr val="DCE3D5"/>
                       </a:solidFill>
                       <a:prstDash val="solid"/>
                       <a:round/>
@@ -5155,7 +5394,7 @@
                     </a:lnT>
                     <a:lnB w="9525" cap="flat" cmpd="sng" algn="ctr">
                       <a:solidFill>
-                        <a:srgbClr val="E3E7EA"/>
+                        <a:srgbClr val="DCE3D5"/>
                       </a:solidFill>
                       <a:prstDash val="solid"/>
                       <a:round/>
@@ -5171,7 +5410,7 @@
       </p:graphicFrame>
       <p:sp>
         <p:nvSpPr>
-          <p:cNvPr id="4" name="Text 1"/>
+          <p:cNvPr id="5" name="Text 2"/>
           <p:cNvSpPr txBox="1"/>
           <p:nvPr/>
         </p:nvSpPr>
@@ -5196,7 +5435,7 @@
             <a:r>
               <a:rPr lang="en-US" sz="1200" dirty="0">
                 <a:solidFill>
-                  <a:srgbClr val="6B7780"/>
+                  <a:srgbClr val="617069"/>
                 </a:solidFill>
               </a:rPr>
               <a:t>법인 결제와 비상권 업종 13개는 제외 (전처리 장 참고)</a:t>
@@ -5207,7 +5446,7 @@
       </p:sp>
       <p:sp>
         <p:nvSpPr>
-          <p:cNvPr id="5" name="definition card"/>
+          <p:cNvPr id="6" name="definition card"/>
           <p:cNvSpPr/>
           <p:nvPr/>
         </p:nvSpPr>
@@ -5222,11 +5461,11 @@
             </a:avLst>
           </a:prstGeom>
           <a:solidFill>
-            <a:srgbClr val="F3F6F8"/>
+            <a:srgbClr val="EAF0E3"/>
           </a:solidFill>
           <a:ln w="12700">
             <a:solidFill>
-              <a:srgbClr val="F3F6F8"/>
+              <a:srgbClr val="EAF0E3"/>
             </a:solidFill>
             <a:prstDash val="solid"/>
           </a:ln>
@@ -5234,7 +5473,7 @@
       </p:sp>
       <p:sp>
         <p:nvSpPr>
-          <p:cNvPr id="6" name="step 1"/>
+          <p:cNvPr id="7" name="step 1"/>
           <p:cNvSpPr/>
           <p:nvPr/>
         </p:nvSpPr>
@@ -5247,11 +5486,11 @@
             <a:avLst/>
           </a:prstGeom>
           <a:solidFill>
-            <a:srgbClr val="D9622B"/>
+            <a:srgbClr val="4A6E52"/>
           </a:solidFill>
           <a:ln w="12700">
             <a:solidFill>
-              <a:srgbClr val="D9622B"/>
+              <a:srgbClr val="4A6E52"/>
             </a:solidFill>
             <a:prstDash val="solid"/>
           </a:ln>
@@ -5259,7 +5498,7 @@
       </p:sp>
       <p:sp>
         <p:nvSpPr>
-          <p:cNvPr id="7" name="Text 4"/>
+          <p:cNvPr id="8" name="Text 5"/>
           <p:cNvSpPr txBox="1"/>
           <p:nvPr/>
         </p:nvSpPr>
@@ -5295,7 +5534,7 @@
       </p:sp>
       <p:sp>
         <p:nvSpPr>
-          <p:cNvPr id="8" name="Text 5"/>
+          <p:cNvPr id="9" name="Text 6"/>
           <p:cNvSpPr txBox="1"/>
           <p:nvPr/>
         </p:nvSpPr>
@@ -5320,7 +5559,7 @@
             <a:r>
               <a:rPr lang="en-US" sz="1500" b="1" dirty="0">
                 <a:solidFill>
-                  <a:srgbClr val="1D2B33"/>
+                  <a:srgbClr val="192E26"/>
                 </a:solidFill>
               </a:rPr>
               <a:t>비 피해율</a:t>
@@ -5334,7 +5573,7 @@
             <a:r>
               <a:rPr lang="en-US" sz="1300" dirty="0">
                 <a:solidFill>
-                  <a:srgbClr val="1D2B33"/>
+                  <a:srgbClr val="192E26"/>
                 </a:solidFill>
               </a:rPr>
               <a:t>비 10mm+ 온 날의 매출 변화 (비 안 온 날 대비)</a:t>
@@ -5345,7 +5584,7 @@
       </p:sp>
       <p:sp>
         <p:nvSpPr>
-          <p:cNvPr id="9" name="step 2"/>
+          <p:cNvPr id="10" name="step 2"/>
           <p:cNvSpPr/>
           <p:nvPr/>
         </p:nvSpPr>
@@ -5358,11 +5597,11 @@
             <a:avLst/>
           </a:prstGeom>
           <a:solidFill>
-            <a:srgbClr val="D9622B"/>
+            <a:srgbClr val="4A6E52"/>
           </a:solidFill>
           <a:ln w="12700">
             <a:solidFill>
-              <a:srgbClr val="D9622B"/>
+              <a:srgbClr val="4A6E52"/>
             </a:solidFill>
             <a:prstDash val="solid"/>
           </a:ln>
@@ -5370,7 +5609,7 @@
       </p:sp>
       <p:sp>
         <p:nvSpPr>
-          <p:cNvPr id="10" name="Text 7"/>
+          <p:cNvPr id="11" name="Text 8"/>
           <p:cNvSpPr txBox="1"/>
           <p:nvPr/>
         </p:nvSpPr>
@@ -5406,7 +5645,7 @@
       </p:sp>
       <p:sp>
         <p:nvSpPr>
-          <p:cNvPr id="11" name="Text 8"/>
+          <p:cNvPr id="12" name="Text 9"/>
           <p:cNvSpPr txBox="1"/>
           <p:nvPr/>
         </p:nvSpPr>
@@ -5431,7 +5670,7 @@
             <a:r>
               <a:rPr lang="en-US" sz="1500" b="1" dirty="0">
                 <a:solidFill>
-                  <a:srgbClr val="1D2B33"/>
+                  <a:srgbClr val="192E26"/>
                 </a:solidFill>
               </a:rPr>
               <a:t>같이 통제</a:t>
@@ -5445,7 +5684,7 @@
             <a:r>
               <a:rPr lang="en-US" sz="1300" dirty="0">
                 <a:solidFill>
-                  <a:srgbClr val="1D2B33"/>
+                  <a:srgbClr val="192E26"/>
                 </a:solidFill>
               </a:rPr>
               <a:t>같은 주 · 요일 · 공휴일(추석 연휴) · 폭염. 강건성 확인으로 기온 연속값 통제도 함께</a:t>
@@ -5456,7 +5695,7 @@
       </p:sp>
       <p:sp>
         <p:nvSpPr>
-          <p:cNvPr id="12" name="step 3"/>
+          <p:cNvPr id="13" name="step 3"/>
           <p:cNvSpPr/>
           <p:nvPr/>
         </p:nvSpPr>
@@ -5469,11 +5708,11 @@
             <a:avLst/>
           </a:prstGeom>
           <a:solidFill>
-            <a:srgbClr val="D9622B"/>
+            <a:srgbClr val="4A6E52"/>
           </a:solidFill>
           <a:ln w="12700">
             <a:solidFill>
-              <a:srgbClr val="D9622B"/>
+              <a:srgbClr val="4A6E52"/>
             </a:solidFill>
             <a:prstDash val="solid"/>
           </a:ln>
@@ -5481,7 +5720,7 @@
       </p:sp>
       <p:sp>
         <p:nvSpPr>
-          <p:cNvPr id="13" name="Text 10"/>
+          <p:cNvPr id="14" name="Text 11"/>
           <p:cNvSpPr txBox="1"/>
           <p:nvPr/>
         </p:nvSpPr>
@@ -5517,7 +5756,7 @@
       </p:sp>
       <p:sp>
         <p:nvSpPr>
-          <p:cNvPr id="14" name="Text 11"/>
+          <p:cNvPr id="15" name="Text 12"/>
           <p:cNvSpPr txBox="1"/>
           <p:nvPr/>
         </p:nvSpPr>
@@ -5542,7 +5781,7 @@
             <a:r>
               <a:rPr lang="en-US" sz="1500" b="1" dirty="0">
                 <a:solidFill>
-                  <a:srgbClr val="1D2B33"/>
+                  <a:srgbClr val="192E26"/>
                 </a:solidFill>
               </a:rPr>
               <a:t>회복</a:t>
@@ -5556,7 +5795,7 @@
             <a:r>
               <a:rPr lang="en-US" sz="1300" dirty="0">
                 <a:solidFill>
-                  <a:srgbClr val="1D2B33"/>
+                  <a:srgbClr val="192E26"/>
                 </a:solidFill>
               </a:rPr>
               <a:t>비 온 뒤 1~3일 효과까지 더한 누적 변화</a:t>
@@ -5577,7 +5816,7 @@
         </p:nvSpPr>
         <p:spPr>
           <a:xfrm>
-            <a:off x="11247120" y="6355080"/>
+            <a:off x="11183112" y="6355080"/>
             <a:ext cx="457200" cy="274320"/>
           </a:xfrm>
           <a:prstGeom prst="rect">
@@ -5593,9 +5832,9 @@
           <a:bodyPr/>
           <a:lstStyle>
             <a:lvl1pPr>
-              <a:defRPr sz="1000">
-                <a:solidFill>
-                  <a:srgbClr val="6B7780"/>
+              <a:defRPr sz="1100">
+                <a:solidFill>
+                  <a:srgbClr val="192E26"/>
                 </a:solidFill>
               </a:defRPr>
             </a:lvl1pPr>
@@ -5603,7 +5842,7 @@
           <a:p>
             <a:pPr algn="r"/>
             <a:fld id="{F7021451-1387-4CA6-816F-3879F97B5CBC}" type="slidenum">
-              <a:rPr b="0" lang="en-US"/>
+              <a:rPr b="1" lang="en-US"/>
               <a:t>4</a:t>
             </a:fld>
             <a:endParaRPr lang="en-US"/>
@@ -5619,47 +5858,47 @@
 </file>
 
 <file path=ppt/theme/theme1.xml><?xml version="1.0" encoding="utf-8"?>
-<a:theme xmlns:a="http://schemas.openxmlformats.org/drawingml/2006/main" name="Chuncheon Rain">
+<a:theme xmlns:a="http://schemas.openxmlformats.org/drawingml/2006/main" name="Team Green">
   <a:themeElements>
-    <a:clrScheme name="Chuncheon Rain">
+    <a:clrScheme name="Team Green">
       <a:dk1>
-        <a:srgbClr val="1D2B33"/>
+        <a:srgbClr val="192E26"/>
       </a:dk1>
       <a:lt1>
         <a:srgbClr val="FFFFFF"/>
       </a:lt1>
       <a:dk2>
-        <a:srgbClr val="15303D"/>
+        <a:srgbClr val="4A6E52"/>
       </a:dk2>
       <a:lt2>
-        <a:srgbClr val="EEF2F5"/>
+        <a:srgbClr val="F6F9F1"/>
       </a:lt2>
       <a:accent1>
-        <a:srgbClr val="D9622B"/>
+        <a:srgbClr val="4A6E52"/>
       </a:accent1>
       <a:accent2>
-        <a:srgbClr val="2F6FA8"/>
+        <a:srgbClr val="96A89C"/>
       </a:accent2>
       <a:accent3>
-        <a:srgbClr val="C5CBD1"/>
+        <a:srgbClr val="BAD666"/>
       </a:accent3>
       <a:accent4>
-        <a:srgbClr val="E9A27F"/>
+        <a:srgbClr val="9DBB45"/>
       </a:accent4>
       <a:accent5>
-        <a:srgbClr val="5B7083"/>
+        <a:srgbClr val="617069"/>
       </a:accent5>
       <a:accent6>
-        <a:srgbClr val="8FB4D6"/>
+        <a:srgbClr val="D5DDD1"/>
       </a:accent6>
       <a:hlink>
-        <a:srgbClr val="2F6FA8"/>
+        <a:srgbClr val="4A6E52"/>
       </a:hlink>
       <a:folHlink>
-        <a:srgbClr val="5B7083"/>
+        <a:srgbClr val="617069"/>
       </a:folHlink>
     </a:clrScheme>
-    <a:fontScheme name="Chuncheon Rain">
+    <a:fontScheme name="Team Green">
       <a:majorFont>
         <a:latin typeface="Malgun Gothic"/>
         <a:ea typeface=""/>
